--- a/someproject/artifacts/kickoff-deck.pptx
+++ b/someproject/artifacts/kickoff-deck.pptx
@@ -20,6 +20,8 @@
     <p:sldId id="858" r:id="rId11"/>
     <p:sldId id="859" r:id="rId12"/>
     <p:sldId id="554" r:id="rId13"/>
+    <p:sldId id="901" r:id="rId39"/>
+    <p:sldId id="902" r:id="rId40"/>
   </p:sldIdLst>
   <p:sldSz cx="12192000" cy="6858000"/>
   <p:notesSz cx="6858000" cy="9144000"/>
@@ -9778,6 +9780,171 @@
         <p14:creationId xmlns:p14="http://schemas.microsoft.com/office/powerpoint/2010/main" val="247990684"/>
       </p:ext>
     </p:extLst>
+  </p:cSld>
+  <p:clrMapOvr>
+    <a:masterClrMapping/>
+  </p:clrMapOvr>
+</p:sld>
+</file>
+
+<file path=ppt/slides/slide10.xml><?xml version="1.0" encoding="utf-8"?>
+<p:sld xmlns:a="http://schemas.openxmlformats.org/drawingml/2006/main" xmlns:p="http://schemas.openxmlformats.org/presentationml/2006/main" xmlns:r="http://schemas.openxmlformats.org/officeDocument/2006/relationships">
+  <p:cSld>
+    <p:spTree>
+      <p:nvGrpSpPr>
+        <p:cNvPr id="1" name=""/>
+        <p:cNvGrpSpPr/>
+        <p:nvPr/>
+      </p:nvGrpSpPr>
+      <p:grpSpPr/>
+      <p:sp>
+        <p:nvSpPr>
+          <p:cNvPr id="2" name="Text Placeholder 1"/>
+          <p:cNvSpPr>
+            <a:spLocks noGrp="1"/>
+          </p:cNvSpPr>
+          <p:nvPr>
+            <p:ph type="body" idx="10" sz="quarter"/>
+          </p:nvPr>
+        </p:nvSpPr>
+        <p:spPr/>
+        <p:txBody>
+          <a:bodyPr/>
+          <a:lstStyle/>
+          <a:p/>
+        </p:txBody>
+      </p:sp>
+      <p:sp>
+        <p:nvSpPr>
+          <p:cNvPr id="3" name="Text Placeholder 2"/>
+          <p:cNvSpPr>
+            <a:spLocks noGrp="1"/>
+          </p:cNvSpPr>
+          <p:nvPr>
+            <p:ph type="body" idx="11" sz="quarter"/>
+          </p:nvPr>
+        </p:nvSpPr>
+        <p:spPr/>
+        <p:txBody>
+          <a:bodyPr/>
+          <a:lstStyle/>
+          <a:p>
+            <a:r>
+              <a:t>Topic: Transcription Service Testing</a:t>
+            </a:r>
+          </a:p>
+          <a:p>
+            <a:r>
+              <a:t>Participants: Andrey Kerchin</a:t>
+            </a:r>
+          </a:p>
+          <a:p/>
+          <a:p>
+            <a:r>
+              <a:t>Key Decisions:</a:t>
+            </a:r>
+          </a:p>
+          <a:p>
+            <a:pPr lvl="1"/>
+            <a:r>
+              <a:t>• Meeting initiated to test transcription service effectiveness</a:t>
+            </a:r>
+          </a:p>
+          <a:p/>
+          <a:p>
+            <a:r>
+              <a:t>Recommendations:</a:t>
+            </a:r>
+          </a:p>
+          <a:p>
+            <a:pPr lvl="1"/>
+            <a:r>
+              <a:t>• Transcription service is being implemented as part of the project</a:t>
+            </a:r>
+          </a:p>
+          <a:p>
+            <a:pPr lvl="1"/>
+            <a:r>
+              <a:t>• Transcription results will be applied to the project</a:t>
+            </a:r>
+          </a:p>
+        </p:txBody>
+      </p:sp>
+    </p:spTree>
+  </p:cSld>
+  <p:clrMapOvr>
+    <a:masterClrMapping/>
+  </p:clrMapOvr>
+</p:sld>
+</file>
+
+<file path=ppt/slides/slide11.xml><?xml version="1.0" encoding="utf-8"?>
+<p:sld xmlns:a="http://schemas.openxmlformats.org/drawingml/2006/main" xmlns:p="http://schemas.openxmlformats.org/presentationml/2006/main" xmlns:r="http://schemas.openxmlformats.org/officeDocument/2006/relationships">
+  <p:cSld>
+    <p:spTree>
+      <p:nvGrpSpPr>
+        <p:cNvPr id="1" name=""/>
+        <p:cNvGrpSpPr/>
+        <p:nvPr/>
+      </p:nvGrpSpPr>
+      <p:grpSpPr/>
+      <p:sp>
+        <p:nvSpPr>
+          <p:cNvPr id="2" name="Text Placeholder 1"/>
+          <p:cNvSpPr>
+            <a:spLocks noGrp="1"/>
+          </p:cNvSpPr>
+          <p:nvPr>
+            <p:ph type="body" idx="10" sz="quarter"/>
+          </p:nvPr>
+        </p:nvSpPr>
+        <p:spPr/>
+        <p:txBody>
+          <a:bodyPr/>
+          <a:lstStyle/>
+          <a:p/>
+        </p:txBody>
+      </p:sp>
+      <p:sp>
+        <p:nvSpPr>
+          <p:cNvPr id="3" name="Text Placeholder 2"/>
+          <p:cNvSpPr>
+            <a:spLocks noGrp="1"/>
+          </p:cNvSpPr>
+          <p:nvPr>
+            <p:ph type="body" idx="11" sz="quarter"/>
+          </p:nvPr>
+        </p:nvSpPr>
+        <p:spPr/>
+        <p:txBody>
+          <a:bodyPr/>
+          <a:lstStyle/>
+          <a:p>
+            <a:r>
+              <a:t>1. Test Transcription Service Effectiveness</a:t>
+            </a:r>
+          </a:p>
+          <a:p>
+            <a:pPr lvl="1"/>
+            <a:r>
+              <a:t>   Owner: [Not Specified] | Due Date: [Not Specified]</a:t>
+            </a:r>
+          </a:p>
+          <a:p/>
+          <a:p>
+            <a:r>
+              <a:t>2. Apply Transcription Results to Project</a:t>
+            </a:r>
+          </a:p>
+          <a:p>
+            <a:pPr lvl="1"/>
+            <a:r>
+              <a:t>   Owner: [Not Specified] | Due Date: [Not Specified]</a:t>
+            </a:r>
+          </a:p>
+        </p:txBody>
+      </p:sp>
+    </p:spTree>
   </p:cSld>
   <p:clrMapOvr>
     <a:masterClrMapping/>

--- a/someproject/artifacts/kickoff-deck.pptx
+++ b/someproject/artifacts/kickoff-deck.pptx
@@ -21,6 +21,7 @@
     <p:sldId id="859" r:id="rId12"/>
     <p:sldId id="554" r:id="rId13"/>
     <p:sldId id="901" r:id="rId39"/>
+    <p:sldId id="903" r:id="rId41"/>
     <p:sldId id="902" r:id="rId40"/>
   </p:sldIdLst>
   <p:sldSz cx="12192000" cy="6858000"/>
@@ -9942,6 +9943,75 @@
               <a:t>   Owner: [Not Specified] | Due Date: [Not Specified]</a:t>
             </a:r>
           </a:p>
+        </p:txBody>
+      </p:sp>
+    </p:spTree>
+  </p:cSld>
+  <p:clrMapOvr>
+    <a:masterClrMapping/>
+  </p:clrMapOvr>
+</p:sld>
+</file>
+
+<file path=ppt/slides/slide12.xml><?xml version="1.0" encoding="utf-8"?>
+<p:sld xmlns:a="http://schemas.openxmlformats.org/drawingml/2006/main" xmlns:p="http://schemas.openxmlformats.org/presentationml/2006/main" xmlns:r="http://schemas.openxmlformats.org/officeDocument/2006/relationships">
+  <p:cSld>
+    <p:spTree>
+      <p:nvGrpSpPr>
+        <p:cNvPr id="1" name=""/>
+        <p:cNvGrpSpPr/>
+        <p:nvPr/>
+      </p:nvGrpSpPr>
+      <p:grpSpPr/>
+      <p:sp>
+        <p:nvSpPr>
+          <p:cNvPr id="2" name="Text Placeholder 1"/>
+          <p:cNvSpPr>
+            <a:spLocks noGrp="1"/>
+          </p:cNvSpPr>
+          <p:nvPr>
+            <p:ph type="body" idx="10" sz="quarter"/>
+          </p:nvPr>
+        </p:nvSpPr>
+        <p:spPr/>
+        <p:txBody>
+          <a:bodyPr/>
+          <a:lstStyle/>
+          <a:p/>
+        </p:txBody>
+      </p:sp>
+      <p:sp>
+        <p:nvSpPr>
+          <p:cNvPr id="3" name="Text Placeholder 2"/>
+          <p:cNvSpPr>
+            <a:spLocks noGrp="1"/>
+          </p:cNvSpPr>
+          <p:nvPr>
+            <p:ph type="body" idx="11" sz="quarter"/>
+          </p:nvPr>
+        </p:nvSpPr>
+        <p:spPr/>
+        <p:txBody>
+          <a:bodyPr/>
+          <a:lstStyle/>
+          <a:p/>
+        </p:txBody>
+      </p:sp>
+      <p:sp>
+        <p:nvSpPr>
+          <p:cNvPr id="4" name="Text Placeholder 3"/>
+          <p:cNvSpPr>
+            <a:spLocks noGrp="1"/>
+          </p:cNvSpPr>
+          <p:nvPr>
+            <p:ph type="body" idx="12" sz="quarter"/>
+          </p:nvPr>
+        </p:nvSpPr>
+        <p:spPr/>
+        <p:txBody>
+          <a:bodyPr/>
+          <a:lstStyle/>
+          <a:p/>
         </p:txBody>
       </p:sp>
     </p:spTree>

--- a/someproject/artifacts/kickoff-deck.pptx
+++ b/someproject/artifacts/kickoff-deck.pptx
@@ -20,9 +20,6 @@
     <p:sldId id="858" r:id="rId11"/>
     <p:sldId id="859" r:id="rId12"/>
     <p:sldId id="554" r:id="rId13"/>
-    <p:sldId id="901" r:id="rId39"/>
-    <p:sldId id="903" r:id="rId41"/>
-    <p:sldId id="902" r:id="rId40"/>
   </p:sldIdLst>
   <p:sldSz cx="12192000" cy="6858000"/>
   <p:notesSz cx="6858000" cy="9144000"/>
@@ -9781,240 +9778,6 @@
         <p14:creationId xmlns:p14="http://schemas.microsoft.com/office/powerpoint/2010/main" val="247990684"/>
       </p:ext>
     </p:extLst>
-  </p:cSld>
-  <p:clrMapOvr>
-    <a:masterClrMapping/>
-  </p:clrMapOvr>
-</p:sld>
-</file>
-
-<file path=ppt/slides/slide10.xml><?xml version="1.0" encoding="utf-8"?>
-<p:sld xmlns:a="http://schemas.openxmlformats.org/drawingml/2006/main" xmlns:p="http://schemas.openxmlformats.org/presentationml/2006/main" xmlns:r="http://schemas.openxmlformats.org/officeDocument/2006/relationships">
-  <p:cSld>
-    <p:spTree>
-      <p:nvGrpSpPr>
-        <p:cNvPr id="1" name=""/>
-        <p:cNvGrpSpPr/>
-        <p:nvPr/>
-      </p:nvGrpSpPr>
-      <p:grpSpPr/>
-      <p:sp>
-        <p:nvSpPr>
-          <p:cNvPr id="2" name="Text Placeholder 1"/>
-          <p:cNvSpPr>
-            <a:spLocks noGrp="1"/>
-          </p:cNvSpPr>
-          <p:nvPr>
-            <p:ph type="body" idx="10" sz="quarter"/>
-          </p:nvPr>
-        </p:nvSpPr>
-        <p:spPr/>
-        <p:txBody>
-          <a:bodyPr/>
-          <a:lstStyle/>
-          <a:p/>
-        </p:txBody>
-      </p:sp>
-      <p:sp>
-        <p:nvSpPr>
-          <p:cNvPr id="3" name="Text Placeholder 2"/>
-          <p:cNvSpPr>
-            <a:spLocks noGrp="1"/>
-          </p:cNvSpPr>
-          <p:nvPr>
-            <p:ph type="body" idx="11" sz="quarter"/>
-          </p:nvPr>
-        </p:nvSpPr>
-        <p:spPr/>
-        <p:txBody>
-          <a:bodyPr/>
-          <a:lstStyle/>
-          <a:p>
-            <a:r>
-              <a:t>Topic: Transcription Service Testing</a:t>
-            </a:r>
-          </a:p>
-          <a:p>
-            <a:r>
-              <a:t>Participants: Andrey Kerchin</a:t>
-            </a:r>
-          </a:p>
-          <a:p/>
-          <a:p>
-            <a:r>
-              <a:t>Key Decisions:</a:t>
-            </a:r>
-          </a:p>
-          <a:p>
-            <a:pPr lvl="1"/>
-            <a:r>
-              <a:t>• Meeting initiated to test transcription service effectiveness</a:t>
-            </a:r>
-          </a:p>
-          <a:p/>
-          <a:p>
-            <a:r>
-              <a:t>Recommendations:</a:t>
-            </a:r>
-          </a:p>
-          <a:p>
-            <a:pPr lvl="1"/>
-            <a:r>
-              <a:t>• Transcription service is being implemented as part of the project</a:t>
-            </a:r>
-          </a:p>
-          <a:p>
-            <a:pPr lvl="1"/>
-            <a:r>
-              <a:t>• Transcription results will be applied to the project</a:t>
-            </a:r>
-          </a:p>
-        </p:txBody>
-      </p:sp>
-    </p:spTree>
-  </p:cSld>
-  <p:clrMapOvr>
-    <a:masterClrMapping/>
-  </p:clrMapOvr>
-</p:sld>
-</file>
-
-<file path=ppt/slides/slide11.xml><?xml version="1.0" encoding="utf-8"?>
-<p:sld xmlns:a="http://schemas.openxmlformats.org/drawingml/2006/main" xmlns:p="http://schemas.openxmlformats.org/presentationml/2006/main" xmlns:r="http://schemas.openxmlformats.org/officeDocument/2006/relationships">
-  <p:cSld>
-    <p:spTree>
-      <p:nvGrpSpPr>
-        <p:cNvPr id="1" name=""/>
-        <p:cNvGrpSpPr/>
-        <p:nvPr/>
-      </p:nvGrpSpPr>
-      <p:grpSpPr/>
-      <p:sp>
-        <p:nvSpPr>
-          <p:cNvPr id="2" name="Text Placeholder 1"/>
-          <p:cNvSpPr>
-            <a:spLocks noGrp="1"/>
-          </p:cNvSpPr>
-          <p:nvPr>
-            <p:ph type="body" idx="10" sz="quarter"/>
-          </p:nvPr>
-        </p:nvSpPr>
-        <p:spPr/>
-        <p:txBody>
-          <a:bodyPr/>
-          <a:lstStyle/>
-          <a:p/>
-        </p:txBody>
-      </p:sp>
-      <p:sp>
-        <p:nvSpPr>
-          <p:cNvPr id="3" name="Text Placeholder 2"/>
-          <p:cNvSpPr>
-            <a:spLocks noGrp="1"/>
-          </p:cNvSpPr>
-          <p:nvPr>
-            <p:ph type="body" idx="11" sz="quarter"/>
-          </p:nvPr>
-        </p:nvSpPr>
-        <p:spPr/>
-        <p:txBody>
-          <a:bodyPr/>
-          <a:lstStyle/>
-          <a:p>
-            <a:r>
-              <a:t>1. Test Transcription Service Effectiveness</a:t>
-            </a:r>
-          </a:p>
-          <a:p>
-            <a:pPr lvl="1"/>
-            <a:r>
-              <a:t>   Owner: [Not Specified] | Due Date: [Not Specified]</a:t>
-            </a:r>
-          </a:p>
-          <a:p/>
-          <a:p>
-            <a:r>
-              <a:t>2. Apply Transcription Results to Project</a:t>
-            </a:r>
-          </a:p>
-          <a:p>
-            <a:pPr lvl="1"/>
-            <a:r>
-              <a:t>   Owner: [Not Specified] | Due Date: [Not Specified]</a:t>
-            </a:r>
-          </a:p>
-        </p:txBody>
-      </p:sp>
-    </p:spTree>
-  </p:cSld>
-  <p:clrMapOvr>
-    <a:masterClrMapping/>
-  </p:clrMapOvr>
-</p:sld>
-</file>
-
-<file path=ppt/slides/slide12.xml><?xml version="1.0" encoding="utf-8"?>
-<p:sld xmlns:a="http://schemas.openxmlformats.org/drawingml/2006/main" xmlns:p="http://schemas.openxmlformats.org/presentationml/2006/main" xmlns:r="http://schemas.openxmlformats.org/officeDocument/2006/relationships">
-  <p:cSld>
-    <p:spTree>
-      <p:nvGrpSpPr>
-        <p:cNvPr id="1" name=""/>
-        <p:cNvGrpSpPr/>
-        <p:nvPr/>
-      </p:nvGrpSpPr>
-      <p:grpSpPr/>
-      <p:sp>
-        <p:nvSpPr>
-          <p:cNvPr id="2" name="Text Placeholder 1"/>
-          <p:cNvSpPr>
-            <a:spLocks noGrp="1"/>
-          </p:cNvSpPr>
-          <p:nvPr>
-            <p:ph type="body" idx="10" sz="quarter"/>
-          </p:nvPr>
-        </p:nvSpPr>
-        <p:spPr/>
-        <p:txBody>
-          <a:bodyPr/>
-          <a:lstStyle/>
-          <a:p/>
-        </p:txBody>
-      </p:sp>
-      <p:sp>
-        <p:nvSpPr>
-          <p:cNvPr id="3" name="Text Placeholder 2"/>
-          <p:cNvSpPr>
-            <a:spLocks noGrp="1"/>
-          </p:cNvSpPr>
-          <p:nvPr>
-            <p:ph type="body" idx="11" sz="quarter"/>
-          </p:nvPr>
-        </p:nvSpPr>
-        <p:spPr/>
-        <p:txBody>
-          <a:bodyPr/>
-          <a:lstStyle/>
-          <a:p/>
-        </p:txBody>
-      </p:sp>
-      <p:sp>
-        <p:nvSpPr>
-          <p:cNvPr id="4" name="Text Placeholder 3"/>
-          <p:cNvSpPr>
-            <a:spLocks noGrp="1"/>
-          </p:cNvSpPr>
-          <p:nvPr>
-            <p:ph type="body" idx="12" sz="quarter"/>
-          </p:nvPr>
-        </p:nvSpPr>
-        <p:spPr/>
-        <p:txBody>
-          <a:bodyPr/>
-          <a:lstStyle/>
-          <a:p/>
-        </p:txBody>
-      </p:sp>
-    </p:spTree>
   </p:cSld>
   <p:clrMapOvr>
     <a:masterClrMapping/>

--- a/someproject/artifacts/kickoff-deck.pptx
+++ b/someproject/artifacts/kickoff-deck.pptx
@@ -19,6 +19,7 @@
     <p:sldId id="866" r:id="rId10"/>
     <p:sldId id="858" r:id="rId11"/>
     <p:sldId id="859" r:id="rId12"/>
+    <p:sldId id="901" r:id="rId39"/>
     <p:sldId id="554" r:id="rId13"/>
   </p:sldIdLst>
   <p:sldSz cx="12192000" cy="6858000"/>
@@ -9778,6 +9779,123 @@
         <p14:creationId xmlns:p14="http://schemas.microsoft.com/office/powerpoint/2010/main" val="247990684"/>
       </p:ext>
     </p:extLst>
+  </p:cSld>
+  <p:clrMapOvr>
+    <a:masterClrMapping/>
+  </p:clrMapOvr>
+</p:sld>
+</file>
+
+<file path=ppt/slides/slide10.xml><?xml version="1.0" encoding="utf-8"?>
+<p:sld xmlns:a="http://schemas.openxmlformats.org/drawingml/2006/main" xmlns:p="http://schemas.openxmlformats.org/presentationml/2006/main" xmlns:r="http://schemas.openxmlformats.org/officeDocument/2006/relationships">
+  <p:cSld>
+    <p:spTree>
+      <p:nvGrpSpPr>
+        <p:cNvPr id="1" name=""/>
+        <p:cNvGrpSpPr/>
+        <p:nvPr/>
+      </p:nvGrpSpPr>
+      <p:grpSpPr/>
+      <p:sp>
+        <p:nvSpPr>
+          <p:cNvPr id="2" name="Text Placeholder 1"/>
+          <p:cNvSpPr>
+            <a:spLocks noGrp="1"/>
+          </p:cNvSpPr>
+          <p:nvPr>
+            <p:ph type="body" idx="10" sz="quarter"/>
+          </p:nvPr>
+        </p:nvSpPr>
+        <p:spPr/>
+        <p:txBody>
+          <a:bodyPr/>
+          <a:lstStyle/>
+          <a:p/>
+        </p:txBody>
+      </p:sp>
+      <p:sp>
+        <p:nvSpPr>
+          <p:cNvPr id="3" name="Text Placeholder 2"/>
+          <p:cNvSpPr>
+            <a:spLocks noGrp="1"/>
+          </p:cNvSpPr>
+          <p:nvPr>
+            <p:ph type="body" idx="11" sz="quarter"/>
+          </p:nvPr>
+        </p:nvSpPr>
+        <p:spPr/>
+        <p:txBody>
+          <a:bodyPr/>
+          <a:lstStyle/>
+          <a:p>
+            <a:r>
+              <a:t>Meeting Summary</a:t>
+            </a:r>
+          </a:p>
+        </p:txBody>
+      </p:sp>
+      <p:sp>
+        <p:nvSpPr>
+          <p:cNvPr id="4" name="Text Placeholder 3"/>
+          <p:cNvSpPr>
+            <a:spLocks noGrp="1"/>
+          </p:cNvSpPr>
+          <p:nvPr>
+            <p:ph type="body" idx="12" sz="quarter"/>
+          </p:nvPr>
+        </p:nvSpPr>
+        <p:spPr/>
+        <p:txBody>
+          <a:bodyPr wrap="square"/>
+          <a:lstStyle/>
+          <a:p>
+            <a:r>
+              <a:rPr b="1"/>
+              <a:t>Summary</a:t>
+            </a:r>
+          </a:p>
+          <a:p>
+            <a:r>
+              <a:t>Andrey Kerchin initiated a meeting to evaluate the performance of the transcription service. The project requires transcription to be applied, and the results of this transcription need to be integrated into the project's framework. The meeting serves as a verification step to ensure the transcription service is functioning as expected.</a:t>
+            </a:r>
+          </a:p>
+          <a:p/>
+          <a:p>
+            <a:r>
+              <a:rPr b="1"/>
+              <a:t>Agreed Recommendations</a:t>
+            </a:r>
+          </a:p>
+          <a:p>
+            <a:r>
+              <a:t>• Test transcription service effectiveness</a:t>
+            </a:r>
+          </a:p>
+          <a:p>
+            <a:r>
+              <a:t>• Apply transcription results to the project</a:t>
+            </a:r>
+          </a:p>
+          <a:p/>
+          <a:p>
+            <a:r>
+              <a:rPr b="1"/>
+              <a:t>Action Items</a:t>
+            </a:r>
+          </a:p>
+          <a:p>
+            <a:r>
+              <a:t>1. Test transcription service effectiveness — Andrey Kerchin — Not specified</a:t>
+            </a:r>
+          </a:p>
+          <a:p>
+            <a:r>
+              <a:t>2. Apply transcription results to the project — Not specified — Not specified</a:t>
+            </a:r>
+          </a:p>
+        </p:txBody>
+      </p:sp>
+    </p:spTree>
   </p:cSld>
   <p:clrMapOvr>
     <a:masterClrMapping/>

--- a/someproject/artifacts/kickoff-deck.pptx
+++ b/someproject/artifacts/kickoff-deck.pptx
@@ -20,6 +20,7 @@
     <p:sldId id="858" r:id="rId11"/>
     <p:sldId id="859" r:id="rId12"/>
     <p:sldId id="901" r:id="rId39"/>
+    <p:sldId id="902" r:id="rId40"/>
     <p:sldId id="554" r:id="rId13"/>
   </p:sldIdLst>
   <p:sldSz cx="12192000" cy="6858000"/>
@@ -9787,6 +9788,108 @@
 </file>
 
 <file path=ppt/slides/slide10.xml><?xml version="1.0" encoding="utf-8"?>
+<p:sld xmlns:a="http://schemas.openxmlformats.org/drawingml/2006/main" xmlns:r="http://schemas.openxmlformats.org/officeDocument/2006/relationships" xmlns:p="http://schemas.openxmlformats.org/presentationml/2006/main">
+  <p:cSld>
+    <p:spTree>
+      <p:nvGrpSpPr>
+        <p:cNvPr id="1" name=""/>
+        <p:cNvGrpSpPr/>
+        <p:nvPr/>
+      </p:nvGrpSpPr>
+      <p:grpSpPr>
+        <a:xfrm>
+          <a:off x="0" y="0"/>
+          <a:ext cx="0" cy="0"/>
+          <a:chOff x="0" y="0"/>
+          <a:chExt cx="0" cy="0"/>
+        </a:xfrm>
+      </p:grpSpPr>
+      <p:sp>
+        <p:nvSpPr>
+          <p:cNvPr id="8" name="Text Placeholder 7">
+            <a:extLst>
+              <a:ext uri="{FF2B5EF4-FFF2-40B4-BE49-F238E27FC236}">
+                <a16:creationId xmlns:a16="http://schemas.microsoft.com/office/drawing/2014/main" id="{59578A67-2261-B465-0FF1-D79919431FBB}"/>
+              </a:ext>
+            </a:extLst>
+          </p:cNvPr>
+          <p:cNvSpPr>
+            <a:spLocks noGrp="1"/>
+          </p:cNvSpPr>
+          <p:nvPr>
+            <p:ph type="body" sz="quarter" idx="10"/>
+          </p:nvPr>
+        </p:nvSpPr>
+        <p:spPr>
+          <a:xfrm>
+            <a:off x="3619500" y="3864902"/>
+            <a:ext cx="4953000" cy="344827"/>
+          </a:xfrm>
+        </p:spPr>
+        <p:txBody>
+          <a:bodyPr>
+            <a:noAutofit/>
+          </a:bodyPr>
+          <a:lstStyle/>
+          <a:p>
+            <a:r>
+              <a:rPr lang="en-US" spc="10"/>
+              <a:t>Visit our site to learn more:</a:t>
+            </a:r>
+            <a:endParaRPr lang="en-ZA" spc="10"/>
+          </a:p>
+        </p:txBody>
+      </p:sp>
+      <p:sp>
+        <p:nvSpPr>
+          <p:cNvPr id="9" name="Text Placeholder 8">
+            <a:extLst>
+              <a:ext uri="{FF2B5EF4-FFF2-40B4-BE49-F238E27FC236}">
+                <a16:creationId xmlns:a16="http://schemas.microsoft.com/office/drawing/2014/main" id="{5B36AC1F-C159-ABC1-6BC9-3CAC77BF35BB}"/>
+              </a:ext>
+            </a:extLst>
+          </p:cNvPr>
+          <p:cNvSpPr>
+            <a:spLocks noGrp="1"/>
+          </p:cNvSpPr>
+          <p:nvPr>
+            <p:ph type="body" sz="quarter" idx="11"/>
+          </p:nvPr>
+        </p:nvSpPr>
+        <p:spPr>
+          <a:xfrm>
+            <a:off x="4441577" y="4747873"/>
+            <a:ext cx="3273674" cy="344827"/>
+          </a:xfrm>
+        </p:spPr>
+        <p:txBody>
+          <a:bodyPr>
+            <a:noAutofit/>
+          </a:bodyPr>
+          <a:lstStyle/>
+          <a:p>
+            <a:r>
+              <a:rPr lang="en-US" dirty="0"/>
+              <a:t>https://www.litware.com</a:t>
+            </a:r>
+            <a:endParaRPr lang="en-ZA" dirty="0"/>
+          </a:p>
+        </p:txBody>
+      </p:sp>
+    </p:spTree>
+    <p:extLst>
+      <p:ext uri="{BB962C8B-B14F-4D97-AF65-F5344CB8AC3E}">
+        <p14:creationId xmlns:p14="http://schemas.microsoft.com/office/powerpoint/2010/main" val="1559448605"/>
+      </p:ext>
+    </p:extLst>
+  </p:cSld>
+  <p:clrMapOvr>
+    <a:masterClrMapping/>
+  </p:clrMapOvr>
+</p:sld>
+</file>
+
+<file path=ppt/slides/slide11.xml><?xml version="1.0" encoding="utf-8"?>
 <p:sld xmlns:a="http://schemas.openxmlformats.org/drawingml/2006/main" xmlns:p="http://schemas.openxmlformats.org/presentationml/2006/main" xmlns:r="http://schemas.openxmlformats.org/officeDocument/2006/relationships">
   <p:cSld>
     <p:spTree>
@@ -9856,7 +9959,7 @@
           </a:p>
           <a:p>
             <a:r>
-              <a:t>Andrey Kerchin initiated a meeting to evaluate the performance of the transcription service. The project requires transcription to be applied, and the results of this transcription need to be integrated into the project's framework. The meeting serves as a verification step to ensure the transcription service is functioning as expected.</a:t>
+              <a:t>This meeting served as an initial check to verify the operational status of the transcription service. The primary objective was to confirm that the transcription process is working as intended within the context of the current project. A key requirement identified is the necessity to integrate and utilize the output generated by this transcription service effectively within the project's workflow.</a:t>
             </a:r>
           </a:p>
           <a:p/>
@@ -9868,12 +9971,17 @@
           </a:p>
           <a:p>
             <a:r>
-              <a:t>• Test transcription service effectiveness</a:t>
-            </a:r>
-          </a:p>
-          <a:p>
-            <a:r>
-              <a:t>• Apply transcription results to the project</a:t>
+              <a:t>• The meeting was initiated to test the functionality of the transcription service.</a:t>
+            </a:r>
+          </a:p>
+          <a:p>
+            <a:r>
+              <a:t>• The transcription service is being implemented in the current project.</a:t>
+            </a:r>
+          </a:p>
+          <a:p>
+            <a:r>
+              <a:t>• The outcome of the transcription needs to be applied to the project.</a:t>
             </a:r>
           </a:p>
           <a:p/>
@@ -9885,12 +9993,12 @@
           </a:p>
           <a:p>
             <a:r>
-              <a:t>1. Test transcription service effectiveness — Andrey Kerchin — Not specified</a:t>
-            </a:r>
-          </a:p>
-          <a:p>
-            <a:r>
-              <a:t>2. Apply transcription results to the project — Not specified — Not specified</a:t>
+              <a:t>1. Test transcription service functionality — Andrey Kerchin — Not specified</a:t>
+            </a:r>
+          </a:p>
+          <a:p>
+            <a:r>
+              <a:t>2. Ensure transcription results are applied to the project — Andrey Kerchin — Not specified</a:t>
             </a:r>
           </a:p>
         </p:txBody>
@@ -14489,7 +14597,7 @@
 </file>
 
 <file path=ppt/slides/slide9.xml><?xml version="1.0" encoding="utf-8"?>
-<p:sld xmlns:a="http://schemas.openxmlformats.org/drawingml/2006/main" xmlns:r="http://schemas.openxmlformats.org/officeDocument/2006/relationships" xmlns:p="http://schemas.openxmlformats.org/presentationml/2006/main">
+<p:sld xmlns:a="http://schemas.openxmlformats.org/drawingml/2006/main" xmlns:p="http://schemas.openxmlformats.org/presentationml/2006/main" xmlns:r="http://schemas.openxmlformats.org/officeDocument/2006/relationships">
   <p:cSld>
     <p:spTree>
       <p:nvGrpSpPr>
@@ -14497,92 +14605,107 @@
         <p:cNvGrpSpPr/>
         <p:nvPr/>
       </p:nvGrpSpPr>
-      <p:grpSpPr>
-        <a:xfrm>
-          <a:off x="0" y="0"/>
-          <a:ext cx="0" cy="0"/>
-          <a:chOff x="0" y="0"/>
-          <a:chExt cx="0" cy="0"/>
-        </a:xfrm>
-      </p:grpSpPr>
+      <p:grpSpPr/>
       <p:sp>
         <p:nvSpPr>
-          <p:cNvPr id="8" name="Text Placeholder 7">
-            <a:extLst>
-              <a:ext uri="{FF2B5EF4-FFF2-40B4-BE49-F238E27FC236}">
-                <a16:creationId xmlns:a16="http://schemas.microsoft.com/office/drawing/2014/main" id="{59578A67-2261-B465-0FF1-D79919431FBB}"/>
-              </a:ext>
-            </a:extLst>
-          </p:cNvPr>
+          <p:cNvPr id="2" name="Text Placeholder 1"/>
           <p:cNvSpPr>
             <a:spLocks noGrp="1"/>
           </p:cNvSpPr>
           <p:nvPr>
-            <p:ph type="body" sz="quarter" idx="10"/>
+            <p:ph type="body" idx="10" sz="quarter"/>
           </p:nvPr>
         </p:nvSpPr>
-        <p:spPr>
-          <a:xfrm>
-            <a:off x="3619500" y="3864902"/>
-            <a:ext cx="4953000" cy="344827"/>
-          </a:xfrm>
-        </p:spPr>
+        <p:spPr/>
         <p:txBody>
-          <a:bodyPr>
-            <a:noAutofit/>
-          </a:bodyPr>
+          <a:bodyPr/>
           <a:lstStyle/>
-          <a:p>
-            <a:r>
-              <a:rPr lang="en-US" spc="10"/>
-              <a:t>Visit our site to learn more:</a:t>
-            </a:r>
-            <a:endParaRPr lang="en-ZA" spc="10"/>
-          </a:p>
+          <a:p/>
         </p:txBody>
       </p:sp>
       <p:sp>
         <p:nvSpPr>
-          <p:cNvPr id="9" name="Text Placeholder 8">
-            <a:extLst>
-              <a:ext uri="{FF2B5EF4-FFF2-40B4-BE49-F238E27FC236}">
-                <a16:creationId xmlns:a16="http://schemas.microsoft.com/office/drawing/2014/main" id="{5B36AC1F-C159-ABC1-6BC9-3CAC77BF35BB}"/>
-              </a:ext>
-            </a:extLst>
-          </p:cNvPr>
+          <p:cNvPr id="3" name="Text Placeholder 2"/>
           <p:cNvSpPr>
             <a:spLocks noGrp="1"/>
           </p:cNvSpPr>
           <p:nvPr>
-            <p:ph type="body" sz="quarter" idx="11"/>
+            <p:ph type="body" idx="11" sz="quarter"/>
           </p:nvPr>
         </p:nvSpPr>
-        <p:spPr>
-          <a:xfrm>
-            <a:off x="4441577" y="4747873"/>
-            <a:ext cx="3273674" cy="344827"/>
-          </a:xfrm>
-        </p:spPr>
+        <p:spPr/>
         <p:txBody>
-          <a:bodyPr>
-            <a:noAutofit/>
-          </a:bodyPr>
+          <a:bodyPr/>
           <a:lstStyle/>
           <a:p>
             <a:r>
-              <a:rPr lang="en-US" dirty="0"/>
-              <a:t>https://www.litware.com</a:t>
-            </a:r>
-            <a:endParaRPr lang="en-ZA" dirty="0"/>
+              <a:t>Meeting Summary</a:t>
+            </a:r>
+          </a:p>
+        </p:txBody>
+      </p:sp>
+      <p:sp>
+        <p:nvSpPr>
+          <p:cNvPr id="4" name="Text Placeholder 3"/>
+          <p:cNvSpPr>
+            <a:spLocks noGrp="1"/>
+          </p:cNvSpPr>
+          <p:nvPr>
+            <p:ph type="body" idx="12" sz="quarter"/>
+          </p:nvPr>
+        </p:nvSpPr>
+        <p:spPr/>
+        <p:txBody>
+          <a:bodyPr wrap="square"/>
+          <a:lstStyle/>
+          <a:p>
+            <a:r>
+              <a:rPr b="1"/>
+              <a:t>Summary</a:t>
+            </a:r>
+          </a:p>
+          <a:p>
+            <a:r>
+              <a:t>Andrey Kerchin initiated a meeting to evaluate the performance of the transcription service. The project requires transcription to be applied, and the results of this transcription need to be integrated into the project's framework. The meeting serves as a verification step to ensure the transcription service is functioning as expected.</a:t>
+            </a:r>
+          </a:p>
+          <a:p/>
+          <a:p>
+            <a:r>
+              <a:rPr b="1"/>
+              <a:t>Agreed Recommendations</a:t>
+            </a:r>
+          </a:p>
+          <a:p>
+            <a:r>
+              <a:t>• Test transcription service effectiveness</a:t>
+            </a:r>
+          </a:p>
+          <a:p>
+            <a:r>
+              <a:t>• Apply transcription results to the project</a:t>
+            </a:r>
+          </a:p>
+          <a:p/>
+          <a:p>
+            <a:r>
+              <a:rPr b="1"/>
+              <a:t>Action Items</a:t>
+            </a:r>
+          </a:p>
+          <a:p>
+            <a:r>
+              <a:t>1. Test transcription service effectiveness — Andrey Kerchin — Not specified</a:t>
+            </a:r>
+          </a:p>
+          <a:p>
+            <a:r>
+              <a:t>2. Apply transcription results to the project — Not specified — Not specified</a:t>
+            </a:r>
           </a:p>
         </p:txBody>
       </p:sp>
     </p:spTree>
-    <p:extLst>
-      <p:ext uri="{BB962C8B-B14F-4D97-AF65-F5344CB8AC3E}">
-        <p14:creationId xmlns:p14="http://schemas.microsoft.com/office/powerpoint/2010/main" val="1559448605"/>
-      </p:ext>
-    </p:extLst>
   </p:cSld>
   <p:clrMapOvr>
     <a:masterClrMapping/>

--- a/someproject/artifacts/kickoff-deck.pptx
+++ b/someproject/artifacts/kickoff-deck.pptx
@@ -19,9 +19,7 @@
     <p:sldId id="866" r:id="rId10"/>
     <p:sldId id="858" r:id="rId11"/>
     <p:sldId id="859" r:id="rId12"/>
-    <p:sldId id="901" r:id="rId39"/>
-    <p:sldId id="902" r:id="rId40"/>
-    <p:sldId id="554" r:id="rId13"/>
+    <p:sldId id="901" r:id="rId43"/>
   </p:sldIdLst>
   <p:sldSz cx="12192000" cy="6858000"/>
   <p:notesSz cx="6858000" cy="9144000"/>
@@ -9788,7 +9786,7 @@
 </file>
 
 <file path=ppt/slides/slide10.xml><?xml version="1.0" encoding="utf-8"?>
-<p:sld xmlns:a="http://schemas.openxmlformats.org/drawingml/2006/main" xmlns:r="http://schemas.openxmlformats.org/officeDocument/2006/relationships" xmlns:p="http://schemas.openxmlformats.org/presentationml/2006/main">
+<p:sld xmlns:a="http://schemas.openxmlformats.org/drawingml/2006/main" xmlns:p="http://schemas.openxmlformats.org/presentationml/2006/main" xmlns:r="http://schemas.openxmlformats.org/officeDocument/2006/relationships">
   <p:cSld>
     <p:spTree>
       <p:nvGrpSpPr>
@@ -9796,92 +9794,107 @@
         <p:cNvGrpSpPr/>
         <p:nvPr/>
       </p:nvGrpSpPr>
-      <p:grpSpPr>
-        <a:xfrm>
-          <a:off x="0" y="0"/>
-          <a:ext cx="0" cy="0"/>
-          <a:chOff x="0" y="0"/>
-          <a:chExt cx="0" cy="0"/>
-        </a:xfrm>
-      </p:grpSpPr>
+      <p:grpSpPr/>
       <p:sp>
         <p:nvSpPr>
-          <p:cNvPr id="8" name="Text Placeholder 7">
-            <a:extLst>
-              <a:ext uri="{FF2B5EF4-FFF2-40B4-BE49-F238E27FC236}">
-                <a16:creationId xmlns:a16="http://schemas.microsoft.com/office/drawing/2014/main" id="{59578A67-2261-B465-0FF1-D79919431FBB}"/>
-              </a:ext>
-            </a:extLst>
-          </p:cNvPr>
+          <p:cNvPr id="2" name="Text Placeholder 1"/>
           <p:cNvSpPr>
             <a:spLocks noGrp="1"/>
           </p:cNvSpPr>
           <p:nvPr>
-            <p:ph type="body" sz="quarter" idx="10"/>
+            <p:ph type="body" idx="10" sz="quarter"/>
           </p:nvPr>
         </p:nvSpPr>
-        <p:spPr>
-          <a:xfrm>
-            <a:off x="3619500" y="3864902"/>
-            <a:ext cx="4953000" cy="344827"/>
-          </a:xfrm>
-        </p:spPr>
+        <p:spPr/>
         <p:txBody>
-          <a:bodyPr>
-            <a:noAutofit/>
-          </a:bodyPr>
+          <a:bodyPr/>
           <a:lstStyle/>
-          <a:p>
-            <a:r>
-              <a:rPr lang="en-US" spc="10"/>
-              <a:t>Visit our site to learn more:</a:t>
-            </a:r>
-            <a:endParaRPr lang="en-ZA" spc="10"/>
-          </a:p>
+          <a:p/>
         </p:txBody>
       </p:sp>
       <p:sp>
         <p:nvSpPr>
-          <p:cNvPr id="9" name="Text Placeholder 8">
-            <a:extLst>
-              <a:ext uri="{FF2B5EF4-FFF2-40B4-BE49-F238E27FC236}">
-                <a16:creationId xmlns:a16="http://schemas.microsoft.com/office/drawing/2014/main" id="{5B36AC1F-C159-ABC1-6BC9-3CAC77BF35BB}"/>
-              </a:ext>
-            </a:extLst>
-          </p:cNvPr>
+          <p:cNvPr id="3" name="Text Placeholder 2"/>
           <p:cNvSpPr>
             <a:spLocks noGrp="1"/>
           </p:cNvSpPr>
           <p:nvPr>
-            <p:ph type="body" sz="quarter" idx="11"/>
+            <p:ph type="body" idx="11" sz="quarter"/>
           </p:nvPr>
         </p:nvSpPr>
-        <p:spPr>
-          <a:xfrm>
-            <a:off x="4441577" y="4747873"/>
-            <a:ext cx="3273674" cy="344827"/>
-          </a:xfrm>
-        </p:spPr>
+        <p:spPr/>
         <p:txBody>
-          <a:bodyPr>
-            <a:noAutofit/>
-          </a:bodyPr>
+          <a:bodyPr/>
           <a:lstStyle/>
           <a:p>
             <a:r>
-              <a:rPr lang="en-US" dirty="0"/>
-              <a:t>https://www.litware.com</a:t>
-            </a:r>
-            <a:endParaRPr lang="en-ZA" dirty="0"/>
+              <a:t>Meeting Summary</a:t>
+            </a:r>
+          </a:p>
+        </p:txBody>
+      </p:sp>
+      <p:sp>
+        <p:nvSpPr>
+          <p:cNvPr id="4" name="Text Placeholder 3"/>
+          <p:cNvSpPr>
+            <a:spLocks noGrp="1"/>
+          </p:cNvSpPr>
+          <p:nvPr>
+            <p:ph type="body" idx="12" sz="quarter"/>
+          </p:nvPr>
+        </p:nvSpPr>
+        <p:spPr/>
+        <p:txBody>
+          <a:bodyPr wrap="square"/>
+          <a:lstStyle/>
+          <a:p>
+            <a:r>
+              <a:rPr b="1"/>
+              <a:t>Summary</a:t>
+            </a:r>
+          </a:p>
+          <a:p>
+            <a:r>
+              <a:t>Andrey Kerchin initiated a meeting to evaluate the performance of the transcription service. The project requires transcription to be applied, and the results of this transcription need to be integrated into the project's framework. The meeting serves as a verification step to ensure the transcription service is functioning as expected.</a:t>
+            </a:r>
+          </a:p>
+          <a:p/>
+          <a:p>
+            <a:r>
+              <a:rPr b="1"/>
+              <a:t>Agreed Recommendations</a:t>
+            </a:r>
+          </a:p>
+          <a:p>
+            <a:r>
+              <a:t>• Test transcription service effectiveness</a:t>
+            </a:r>
+          </a:p>
+          <a:p>
+            <a:r>
+              <a:t>• Apply transcription results to the project</a:t>
+            </a:r>
+          </a:p>
+          <a:p/>
+          <a:p>
+            <a:r>
+              <a:rPr b="1"/>
+              <a:t>Action Items</a:t>
+            </a:r>
+          </a:p>
+          <a:p>
+            <a:r>
+              <a:t>1. Test transcription service effectiveness — Andrey Kerchin — Not specified</a:t>
+            </a:r>
+          </a:p>
+          <a:p>
+            <a:r>
+              <a:t>2. Apply transcription results to the project — Not specified — Not specified</a:t>
+            </a:r>
           </a:p>
         </p:txBody>
       </p:sp>
     </p:spTree>
-    <p:extLst>
-      <p:ext uri="{BB962C8B-B14F-4D97-AF65-F5344CB8AC3E}">
-        <p14:creationId xmlns:p14="http://schemas.microsoft.com/office/powerpoint/2010/main" val="1559448605"/>
-      </p:ext>
-    </p:extLst>
   </p:cSld>
   <p:clrMapOvr>
     <a:masterClrMapping/>
@@ -9930,11 +9943,7 @@
         <p:txBody>
           <a:bodyPr/>
           <a:lstStyle/>
-          <a:p>
-            <a:r>
-              <a:t>Meeting Summary</a:t>
-            </a:r>
-          </a:p>
+          <a:p/>
         </p:txBody>
       </p:sp>
       <p:sp>
@@ -9949,7 +9958,31 @@
         </p:nvSpPr>
         <p:spPr/>
         <p:txBody>
-          <a:bodyPr wrap="square"/>
+          <a:bodyPr/>
+          <a:lstStyle/>
+          <a:p/>
+        </p:txBody>
+      </p:sp>
+      <p:sp>
+        <p:nvSpPr>
+          <p:cNvPr id="5" name="TextBox 4"/>
+          <p:cNvSpPr txBox="1"/>
+          <p:nvPr/>
+        </p:nvSpPr>
+        <p:spPr>
+          <a:xfrm>
+            <a:off x="457200" y="1371600"/>
+            <a:ext cx="11277600" cy="5029200"/>
+          </a:xfrm>
+          <a:prstGeom prst="rect">
+            <a:avLst/>
+          </a:prstGeom>
+          <a:noFill/>
+        </p:spPr>
+        <p:txBody>
+          <a:bodyPr wrap="square">
+            <a:spAutoFit/>
+          </a:bodyPr>
           <a:lstStyle/>
           <a:p>
             <a:r>
@@ -9959,7 +9992,7 @@
           </a:p>
           <a:p>
             <a:r>
-              <a:t>This meeting served as an initial check to verify the operational status of the transcription service. The primary objective was to confirm that the transcription process is working as intended within the context of the current project. A key requirement identified is the necessity to integrate and utilize the output generated by this transcription service effectively within the project's workflow.</a:t>
+              <a:t>Andrey Kerchin initiated the meeting to assess the performance of the transcription service. The core objective was to confirm that the transcription results are accurate and can be effectively utilized within the ongoing project.</a:t>
             </a:r>
           </a:p>
           <a:p/>
@@ -9971,17 +10004,12 @@
           </a:p>
           <a:p>
             <a:r>
-              <a:t>• The meeting was initiated to test the functionality of the transcription service.</a:t>
-            </a:r>
-          </a:p>
-          <a:p>
-            <a:r>
-              <a:t>• The transcription service is being implemented in the current project.</a:t>
-            </a:r>
-          </a:p>
-          <a:p>
-            <a:r>
-              <a:t>• The outcome of the transcription needs to be applied to the project.</a:t>
+              <a:t>• The project requires the transcription results to be successfully integrated and applied to the project</a:t>
+            </a:r>
+          </a:p>
+          <a:p>
+            <a:r>
+              <a:t>• Transcription functionality is crucial for the project's progression</a:t>
             </a:r>
           </a:p>
           <a:p/>
@@ -9993,12 +10021,168 @@
           </a:p>
           <a:p>
             <a:r>
-              <a:t>1. Test transcription service functionality — Andrey Kerchin — Not specified</a:t>
-            </a:r>
-          </a:p>
-          <a:p>
-            <a:r>
-              <a:t>2. Ensure transcription results are applied to the project — Andrey Kerchin — Not specified</a:t>
+              <a:t>1. Verify transcription functionality for project integration — Andrey Kerchin — Not specified</a:t>
+            </a:r>
+          </a:p>
+        </p:txBody>
+      </p:sp>
+    </p:spTree>
+  </p:cSld>
+  <p:clrMapOvr>
+    <a:masterClrMapping/>
+  </p:clrMapOvr>
+</p:sld>
+</file>
+
+<file path=ppt/slides/slide12.xml><?xml version="1.0" encoding="utf-8"?>
+<p:sld xmlns:a="http://schemas.openxmlformats.org/drawingml/2006/main" xmlns:p="http://schemas.openxmlformats.org/presentationml/2006/main" xmlns:r="http://schemas.openxmlformats.org/officeDocument/2006/relationships">
+  <p:cSld>
+    <p:spTree>
+      <p:nvGrpSpPr>
+        <p:cNvPr id="1" name=""/>
+        <p:cNvGrpSpPr/>
+        <p:nvPr/>
+      </p:nvGrpSpPr>
+      <p:grpSpPr/>
+      <p:sp>
+        <p:nvSpPr>
+          <p:cNvPr id="2" name="Text Placeholder 1"/>
+          <p:cNvSpPr>
+            <a:spLocks noGrp="1"/>
+          </p:cNvSpPr>
+          <p:nvPr>
+            <p:ph type="body" idx="10" sz="quarter"/>
+          </p:nvPr>
+        </p:nvSpPr>
+        <p:spPr/>
+        <p:txBody>
+          <a:bodyPr/>
+          <a:lstStyle/>
+          <a:p/>
+        </p:txBody>
+      </p:sp>
+      <p:sp>
+        <p:nvSpPr>
+          <p:cNvPr id="3" name="Text Placeholder 2"/>
+          <p:cNvSpPr>
+            <a:spLocks noGrp="1"/>
+          </p:cNvSpPr>
+          <p:nvPr>
+            <p:ph type="body" idx="11" sz="quarter"/>
+          </p:nvPr>
+        </p:nvSpPr>
+        <p:spPr/>
+        <p:txBody>
+          <a:bodyPr/>
+          <a:lstStyle/>
+          <a:p/>
+        </p:txBody>
+      </p:sp>
+      <p:sp>
+        <p:nvSpPr>
+          <p:cNvPr id="4" name="Text Placeholder 3"/>
+          <p:cNvSpPr>
+            <a:spLocks noGrp="1"/>
+          </p:cNvSpPr>
+          <p:nvPr>
+            <p:ph type="body" idx="12" sz="quarter"/>
+          </p:nvPr>
+        </p:nvSpPr>
+        <p:spPr/>
+        <p:txBody>
+          <a:bodyPr/>
+          <a:lstStyle/>
+          <a:p/>
+        </p:txBody>
+      </p:sp>
+      <p:sp>
+        <p:nvSpPr>
+          <p:cNvPr id="5" name="TextBox 4"/>
+          <p:cNvSpPr txBox="1"/>
+          <p:nvPr/>
+        </p:nvSpPr>
+        <p:spPr>
+          <a:xfrm>
+            <a:off x="457200" y="457200"/>
+            <a:ext cx="8229600" cy="731520"/>
+          </a:xfrm>
+          <a:prstGeom prst="rect">
+            <a:avLst/>
+          </a:prstGeom>
+          <a:noFill/>
+        </p:spPr>
+        <p:txBody>
+          <a:bodyPr wrap="none">
+            <a:spAutoFit/>
+          </a:bodyPr>
+          <a:lstStyle/>
+          <a:p>
+            <a:r>
+              <a:rPr b="1" sz="3200"/>
+              <a:t>Meeting Summary</a:t>
+            </a:r>
+          </a:p>
+        </p:txBody>
+      </p:sp>
+      <p:sp>
+        <p:nvSpPr>
+          <p:cNvPr id="6" name="TextBox 5"/>
+          <p:cNvSpPr txBox="1"/>
+          <p:nvPr/>
+        </p:nvSpPr>
+        <p:spPr>
+          <a:xfrm>
+            <a:off x="457200" y="1371600"/>
+            <a:ext cx="11277600" cy="5029200"/>
+          </a:xfrm>
+          <a:prstGeom prst="rect">
+            <a:avLst/>
+          </a:prstGeom>
+          <a:noFill/>
+        </p:spPr>
+        <p:txBody>
+          <a:bodyPr wrap="square">
+            <a:spAutoFit/>
+          </a:bodyPr>
+          <a:lstStyle/>
+          <a:p>
+            <a:r>
+              <a:rPr b="1"/>
+              <a:t>Summary</a:t>
+            </a:r>
+          </a:p>
+          <a:p>
+            <a:r>
+              <a:t>Andrey Kerchin initiated the meeting to assess the performance of the transcription service. The core objective was to confirm that the transcription results are accurate and can be effectively utilized within the ongoing project.</a:t>
+            </a:r>
+          </a:p>
+          <a:p/>
+          <a:p>
+            <a:r>
+              <a:rPr b="1"/>
+              <a:t>Agreed Recommendations</a:t>
+            </a:r>
+          </a:p>
+          <a:p>
+            <a:r>
+              <a:t>• The project requires the transcription results to be successfully integrated and applied to the project</a:t>
+            </a:r>
+          </a:p>
+          <a:p>
+            <a:r>
+              <a:t>• Transcription functionality is crucial for the project's progression</a:t>
+            </a:r>
+          </a:p>
+          <a:p/>
+          <a:p>
+            <a:r>
+              <a:rPr b="1"/>
+              <a:t>Action Items</a:t>
+            </a:r>
+          </a:p>
+          <a:p>
+            <a:r>
+              <a:t>1. Verify transcription functionality for project integration — Andrey Kerchin — Not specified</a:t>
             </a:r>
           </a:p>
         </p:txBody>
@@ -14637,11 +14821,7 @@
         <p:txBody>
           <a:bodyPr/>
           <a:lstStyle/>
-          <a:p>
-            <a:r>
-              <a:t>Meeting Summary</a:t>
-            </a:r>
-          </a:p>
+          <a:p/>
         </p:txBody>
       </p:sp>
       <p:sp>
@@ -14656,7 +14836,60 @@
         </p:nvSpPr>
         <p:spPr/>
         <p:txBody>
-          <a:bodyPr wrap="square"/>
+          <a:bodyPr/>
+          <a:lstStyle/>
+          <a:p/>
+        </p:txBody>
+      </p:sp>
+      <p:sp>
+        <p:nvSpPr>
+          <p:cNvPr id="5" name="TextBox 4"/>
+          <p:cNvSpPr txBox="1"/>
+          <p:nvPr/>
+        </p:nvSpPr>
+        <p:spPr>
+          <a:xfrm>
+            <a:off x="457200" y="457200"/>
+            <a:ext cx="8229600" cy="731520"/>
+          </a:xfrm>
+          <a:prstGeom prst="rect">
+            <a:avLst/>
+          </a:prstGeom>
+          <a:noFill/>
+        </p:spPr>
+        <p:txBody>
+          <a:bodyPr wrap="none">
+            <a:spAutoFit/>
+          </a:bodyPr>
+          <a:lstStyle/>
+          <a:p>
+            <a:r>
+              <a:rPr b="1" sz="3200"/>
+              <a:t>Meeting Summary</a:t>
+            </a:r>
+          </a:p>
+        </p:txBody>
+      </p:sp>
+      <p:sp>
+        <p:nvSpPr>
+          <p:cNvPr id="6" name="TextBox 5"/>
+          <p:cNvSpPr txBox="1"/>
+          <p:nvPr/>
+        </p:nvSpPr>
+        <p:spPr>
+          <a:xfrm>
+            <a:off x="457200" y="1371600"/>
+            <a:ext cx="11277600" cy="5029200"/>
+          </a:xfrm>
+          <a:prstGeom prst="rect">
+            <a:avLst/>
+          </a:prstGeom>
+          <a:noFill/>
+        </p:spPr>
+        <p:txBody>
+          <a:bodyPr wrap="square">
+            <a:spAutoFit/>
+          </a:bodyPr>
           <a:lstStyle/>
           <a:p>
             <a:r>
@@ -14666,7 +14899,7 @@
           </a:p>
           <a:p>
             <a:r>
-              <a:t>Andrey Kerchin initiated a meeting to evaluate the performance of the transcription service. The project requires transcription to be applied, and the results of this transcription need to be integrated into the project's framework. The meeting serves as a verification step to ensure the transcription service is functioning as expected.</a:t>
+              <a:t>Andrey Kerchin initiated the meeting to assess the performance of the transcription service. The core objective was to confirm that the transcription results are accurate and can be effectively utilized within the ongoing project.</a:t>
             </a:r>
           </a:p>
           <a:p/>
@@ -14678,12 +14911,12 @@
           </a:p>
           <a:p>
             <a:r>
-              <a:t>• Test transcription service effectiveness</a:t>
-            </a:r>
-          </a:p>
-          <a:p>
-            <a:r>
-              <a:t>• Apply transcription results to the project</a:t>
+              <a:t>• The project requires the transcription results to be successfully integrated and applied to the project</a:t>
+            </a:r>
+          </a:p>
+          <a:p>
+            <a:r>
+              <a:t>• Transcription functionality is crucial for the project's progression</a:t>
             </a:r>
           </a:p>
           <a:p/>
@@ -14695,12 +14928,7 @@
           </a:p>
           <a:p>
             <a:r>
-              <a:t>1. Test transcription service effectiveness — Andrey Kerchin — Not specified</a:t>
-            </a:r>
-          </a:p>
-          <a:p>
-            <a:r>
-              <a:t>2. Apply transcription results to the project — Not specified — Not specified</a:t>
+              <a:t>1. Verify transcription functionality for project integration — Andrey Kerchin — Not specified</a:t>
             </a:r>
           </a:p>
         </p:txBody>

--- a/someproject/artifacts/kickoff-deck.pptx
+++ b/someproject/artifacts/kickoff-deck.pptx
@@ -19,7 +19,7 @@
     <p:sldId id="866" r:id="rId10"/>
     <p:sldId id="858" r:id="rId11"/>
     <p:sldId id="859" r:id="rId12"/>
-    <p:sldId id="901" r:id="rId43"/>
+    <p:sldId id="554" r:id="rId13"/>
   </p:sldIdLst>
   <p:sldSz cx="12192000" cy="6858000"/>
   <p:notesSz cx="6858000" cy="9144000"/>
@@ -9785,416 +9785,6 @@
 </p:sld>
 </file>
 
-<file path=ppt/slides/slide10.xml><?xml version="1.0" encoding="utf-8"?>
-<p:sld xmlns:a="http://schemas.openxmlformats.org/drawingml/2006/main" xmlns:p="http://schemas.openxmlformats.org/presentationml/2006/main" xmlns:r="http://schemas.openxmlformats.org/officeDocument/2006/relationships">
-  <p:cSld>
-    <p:spTree>
-      <p:nvGrpSpPr>
-        <p:cNvPr id="1" name=""/>
-        <p:cNvGrpSpPr/>
-        <p:nvPr/>
-      </p:nvGrpSpPr>
-      <p:grpSpPr/>
-      <p:sp>
-        <p:nvSpPr>
-          <p:cNvPr id="2" name="Text Placeholder 1"/>
-          <p:cNvSpPr>
-            <a:spLocks noGrp="1"/>
-          </p:cNvSpPr>
-          <p:nvPr>
-            <p:ph type="body" idx="10" sz="quarter"/>
-          </p:nvPr>
-        </p:nvSpPr>
-        <p:spPr/>
-        <p:txBody>
-          <a:bodyPr/>
-          <a:lstStyle/>
-          <a:p/>
-        </p:txBody>
-      </p:sp>
-      <p:sp>
-        <p:nvSpPr>
-          <p:cNvPr id="3" name="Text Placeholder 2"/>
-          <p:cNvSpPr>
-            <a:spLocks noGrp="1"/>
-          </p:cNvSpPr>
-          <p:nvPr>
-            <p:ph type="body" idx="11" sz="quarter"/>
-          </p:nvPr>
-        </p:nvSpPr>
-        <p:spPr/>
-        <p:txBody>
-          <a:bodyPr/>
-          <a:lstStyle/>
-          <a:p>
-            <a:r>
-              <a:t>Meeting Summary</a:t>
-            </a:r>
-          </a:p>
-        </p:txBody>
-      </p:sp>
-      <p:sp>
-        <p:nvSpPr>
-          <p:cNvPr id="4" name="Text Placeholder 3"/>
-          <p:cNvSpPr>
-            <a:spLocks noGrp="1"/>
-          </p:cNvSpPr>
-          <p:nvPr>
-            <p:ph type="body" idx="12" sz="quarter"/>
-          </p:nvPr>
-        </p:nvSpPr>
-        <p:spPr/>
-        <p:txBody>
-          <a:bodyPr wrap="square"/>
-          <a:lstStyle/>
-          <a:p>
-            <a:r>
-              <a:rPr b="1"/>
-              <a:t>Summary</a:t>
-            </a:r>
-          </a:p>
-          <a:p>
-            <a:r>
-              <a:t>Andrey Kerchin initiated a meeting to evaluate the performance of the transcription service. The project requires transcription to be applied, and the results of this transcription need to be integrated into the project's framework. The meeting serves as a verification step to ensure the transcription service is functioning as expected.</a:t>
-            </a:r>
-          </a:p>
-          <a:p/>
-          <a:p>
-            <a:r>
-              <a:rPr b="1"/>
-              <a:t>Agreed Recommendations</a:t>
-            </a:r>
-          </a:p>
-          <a:p>
-            <a:r>
-              <a:t>• Test transcription service effectiveness</a:t>
-            </a:r>
-          </a:p>
-          <a:p>
-            <a:r>
-              <a:t>• Apply transcription results to the project</a:t>
-            </a:r>
-          </a:p>
-          <a:p/>
-          <a:p>
-            <a:r>
-              <a:rPr b="1"/>
-              <a:t>Action Items</a:t>
-            </a:r>
-          </a:p>
-          <a:p>
-            <a:r>
-              <a:t>1. Test transcription service effectiveness — Andrey Kerchin — Not specified</a:t>
-            </a:r>
-          </a:p>
-          <a:p>
-            <a:r>
-              <a:t>2. Apply transcription results to the project — Not specified — Not specified</a:t>
-            </a:r>
-          </a:p>
-        </p:txBody>
-      </p:sp>
-    </p:spTree>
-  </p:cSld>
-  <p:clrMapOvr>
-    <a:masterClrMapping/>
-  </p:clrMapOvr>
-</p:sld>
-</file>
-
-<file path=ppt/slides/slide11.xml><?xml version="1.0" encoding="utf-8"?>
-<p:sld xmlns:a="http://schemas.openxmlformats.org/drawingml/2006/main" xmlns:p="http://schemas.openxmlformats.org/presentationml/2006/main" xmlns:r="http://schemas.openxmlformats.org/officeDocument/2006/relationships">
-  <p:cSld>
-    <p:spTree>
-      <p:nvGrpSpPr>
-        <p:cNvPr id="1" name=""/>
-        <p:cNvGrpSpPr/>
-        <p:nvPr/>
-      </p:nvGrpSpPr>
-      <p:grpSpPr/>
-      <p:sp>
-        <p:nvSpPr>
-          <p:cNvPr id="2" name="Text Placeholder 1"/>
-          <p:cNvSpPr>
-            <a:spLocks noGrp="1"/>
-          </p:cNvSpPr>
-          <p:nvPr>
-            <p:ph type="body" idx="10" sz="quarter"/>
-          </p:nvPr>
-        </p:nvSpPr>
-        <p:spPr/>
-        <p:txBody>
-          <a:bodyPr/>
-          <a:lstStyle/>
-          <a:p/>
-        </p:txBody>
-      </p:sp>
-      <p:sp>
-        <p:nvSpPr>
-          <p:cNvPr id="3" name="Text Placeholder 2"/>
-          <p:cNvSpPr>
-            <a:spLocks noGrp="1"/>
-          </p:cNvSpPr>
-          <p:nvPr>
-            <p:ph type="body" idx="11" sz="quarter"/>
-          </p:nvPr>
-        </p:nvSpPr>
-        <p:spPr/>
-        <p:txBody>
-          <a:bodyPr/>
-          <a:lstStyle/>
-          <a:p/>
-        </p:txBody>
-      </p:sp>
-      <p:sp>
-        <p:nvSpPr>
-          <p:cNvPr id="4" name="Text Placeholder 3"/>
-          <p:cNvSpPr>
-            <a:spLocks noGrp="1"/>
-          </p:cNvSpPr>
-          <p:nvPr>
-            <p:ph type="body" idx="12" sz="quarter"/>
-          </p:nvPr>
-        </p:nvSpPr>
-        <p:spPr/>
-        <p:txBody>
-          <a:bodyPr/>
-          <a:lstStyle/>
-          <a:p/>
-        </p:txBody>
-      </p:sp>
-      <p:sp>
-        <p:nvSpPr>
-          <p:cNvPr id="5" name="TextBox 4"/>
-          <p:cNvSpPr txBox="1"/>
-          <p:nvPr/>
-        </p:nvSpPr>
-        <p:spPr>
-          <a:xfrm>
-            <a:off x="457200" y="1371600"/>
-            <a:ext cx="11277600" cy="5029200"/>
-          </a:xfrm>
-          <a:prstGeom prst="rect">
-            <a:avLst/>
-          </a:prstGeom>
-          <a:noFill/>
-        </p:spPr>
-        <p:txBody>
-          <a:bodyPr wrap="square">
-            <a:spAutoFit/>
-          </a:bodyPr>
-          <a:lstStyle/>
-          <a:p>
-            <a:r>
-              <a:rPr b="1"/>
-              <a:t>Summary</a:t>
-            </a:r>
-          </a:p>
-          <a:p>
-            <a:r>
-              <a:t>Andrey Kerchin initiated the meeting to assess the performance of the transcription service. The core objective was to confirm that the transcription results are accurate and can be effectively utilized within the ongoing project.</a:t>
-            </a:r>
-          </a:p>
-          <a:p/>
-          <a:p>
-            <a:r>
-              <a:rPr b="1"/>
-              <a:t>Agreed Recommendations</a:t>
-            </a:r>
-          </a:p>
-          <a:p>
-            <a:r>
-              <a:t>• The project requires the transcription results to be successfully integrated and applied to the project</a:t>
-            </a:r>
-          </a:p>
-          <a:p>
-            <a:r>
-              <a:t>• Transcription functionality is crucial for the project's progression</a:t>
-            </a:r>
-          </a:p>
-          <a:p/>
-          <a:p>
-            <a:r>
-              <a:rPr b="1"/>
-              <a:t>Action Items</a:t>
-            </a:r>
-          </a:p>
-          <a:p>
-            <a:r>
-              <a:t>1. Verify transcription functionality for project integration — Andrey Kerchin — Not specified</a:t>
-            </a:r>
-          </a:p>
-        </p:txBody>
-      </p:sp>
-    </p:spTree>
-  </p:cSld>
-  <p:clrMapOvr>
-    <a:masterClrMapping/>
-  </p:clrMapOvr>
-</p:sld>
-</file>
-
-<file path=ppt/slides/slide12.xml><?xml version="1.0" encoding="utf-8"?>
-<p:sld xmlns:a="http://schemas.openxmlformats.org/drawingml/2006/main" xmlns:p="http://schemas.openxmlformats.org/presentationml/2006/main" xmlns:r="http://schemas.openxmlformats.org/officeDocument/2006/relationships">
-  <p:cSld>
-    <p:spTree>
-      <p:nvGrpSpPr>
-        <p:cNvPr id="1" name=""/>
-        <p:cNvGrpSpPr/>
-        <p:nvPr/>
-      </p:nvGrpSpPr>
-      <p:grpSpPr/>
-      <p:sp>
-        <p:nvSpPr>
-          <p:cNvPr id="2" name="Text Placeholder 1"/>
-          <p:cNvSpPr>
-            <a:spLocks noGrp="1"/>
-          </p:cNvSpPr>
-          <p:nvPr>
-            <p:ph type="body" idx="10" sz="quarter"/>
-          </p:nvPr>
-        </p:nvSpPr>
-        <p:spPr/>
-        <p:txBody>
-          <a:bodyPr/>
-          <a:lstStyle/>
-          <a:p/>
-        </p:txBody>
-      </p:sp>
-      <p:sp>
-        <p:nvSpPr>
-          <p:cNvPr id="3" name="Text Placeholder 2"/>
-          <p:cNvSpPr>
-            <a:spLocks noGrp="1"/>
-          </p:cNvSpPr>
-          <p:nvPr>
-            <p:ph type="body" idx="11" sz="quarter"/>
-          </p:nvPr>
-        </p:nvSpPr>
-        <p:spPr/>
-        <p:txBody>
-          <a:bodyPr/>
-          <a:lstStyle/>
-          <a:p/>
-        </p:txBody>
-      </p:sp>
-      <p:sp>
-        <p:nvSpPr>
-          <p:cNvPr id="4" name="Text Placeholder 3"/>
-          <p:cNvSpPr>
-            <a:spLocks noGrp="1"/>
-          </p:cNvSpPr>
-          <p:nvPr>
-            <p:ph type="body" idx="12" sz="quarter"/>
-          </p:nvPr>
-        </p:nvSpPr>
-        <p:spPr/>
-        <p:txBody>
-          <a:bodyPr/>
-          <a:lstStyle/>
-          <a:p/>
-        </p:txBody>
-      </p:sp>
-      <p:sp>
-        <p:nvSpPr>
-          <p:cNvPr id="5" name="TextBox 4"/>
-          <p:cNvSpPr txBox="1"/>
-          <p:nvPr/>
-        </p:nvSpPr>
-        <p:spPr>
-          <a:xfrm>
-            <a:off x="457200" y="457200"/>
-            <a:ext cx="8229600" cy="731520"/>
-          </a:xfrm>
-          <a:prstGeom prst="rect">
-            <a:avLst/>
-          </a:prstGeom>
-          <a:noFill/>
-        </p:spPr>
-        <p:txBody>
-          <a:bodyPr wrap="none">
-            <a:spAutoFit/>
-          </a:bodyPr>
-          <a:lstStyle/>
-          <a:p>
-            <a:r>
-              <a:rPr b="1" sz="3200"/>
-              <a:t>Meeting Summary</a:t>
-            </a:r>
-          </a:p>
-        </p:txBody>
-      </p:sp>
-      <p:sp>
-        <p:nvSpPr>
-          <p:cNvPr id="6" name="TextBox 5"/>
-          <p:cNvSpPr txBox="1"/>
-          <p:nvPr/>
-        </p:nvSpPr>
-        <p:spPr>
-          <a:xfrm>
-            <a:off x="457200" y="1371600"/>
-            <a:ext cx="11277600" cy="5029200"/>
-          </a:xfrm>
-          <a:prstGeom prst="rect">
-            <a:avLst/>
-          </a:prstGeom>
-          <a:noFill/>
-        </p:spPr>
-        <p:txBody>
-          <a:bodyPr wrap="square">
-            <a:spAutoFit/>
-          </a:bodyPr>
-          <a:lstStyle/>
-          <a:p>
-            <a:r>
-              <a:rPr b="1"/>
-              <a:t>Summary</a:t>
-            </a:r>
-          </a:p>
-          <a:p>
-            <a:r>
-              <a:t>Andrey Kerchin initiated the meeting to assess the performance of the transcription service. The core objective was to confirm that the transcription results are accurate and can be effectively utilized within the ongoing project.</a:t>
-            </a:r>
-          </a:p>
-          <a:p/>
-          <a:p>
-            <a:r>
-              <a:rPr b="1"/>
-              <a:t>Agreed Recommendations</a:t>
-            </a:r>
-          </a:p>
-          <a:p>
-            <a:r>
-              <a:t>• The project requires the transcription results to be successfully integrated and applied to the project</a:t>
-            </a:r>
-          </a:p>
-          <a:p>
-            <a:r>
-              <a:t>• Transcription functionality is crucial for the project's progression</a:t>
-            </a:r>
-          </a:p>
-          <a:p/>
-          <a:p>
-            <a:r>
-              <a:rPr b="1"/>
-              <a:t>Action Items</a:t>
-            </a:r>
-          </a:p>
-          <a:p>
-            <a:r>
-              <a:t>1. Verify transcription functionality for project integration — Andrey Kerchin — Not specified</a:t>
-            </a:r>
-          </a:p>
-        </p:txBody>
-      </p:sp>
-    </p:spTree>
-  </p:cSld>
-  <p:clrMapOvr>
-    <a:masterClrMapping/>
-  </p:clrMapOvr>
-</p:sld>
-</file>
-
 <file path=ppt/slides/slide2.xml><?xml version="1.0" encoding="utf-8"?>
 <p:sld xmlns:a="http://schemas.openxmlformats.org/drawingml/2006/main" xmlns:r="http://schemas.openxmlformats.org/officeDocument/2006/relationships" xmlns:p="http://schemas.openxmlformats.org/presentationml/2006/main">
   <p:cSld>
@@ -14781,7 +14371,7 @@
 </file>
 
 <file path=ppt/slides/slide9.xml><?xml version="1.0" encoding="utf-8"?>
-<p:sld xmlns:a="http://schemas.openxmlformats.org/drawingml/2006/main" xmlns:p="http://schemas.openxmlformats.org/presentationml/2006/main" xmlns:r="http://schemas.openxmlformats.org/officeDocument/2006/relationships">
+<p:sld xmlns:a="http://schemas.openxmlformats.org/drawingml/2006/main" xmlns:r="http://schemas.openxmlformats.org/officeDocument/2006/relationships" xmlns:p="http://schemas.openxmlformats.org/presentationml/2006/main">
   <p:cSld>
     <p:spTree>
       <p:nvGrpSpPr>
@@ -14789,151 +14379,92 @@
         <p:cNvGrpSpPr/>
         <p:nvPr/>
       </p:nvGrpSpPr>
-      <p:grpSpPr/>
+      <p:grpSpPr>
+        <a:xfrm>
+          <a:off x="0" y="0"/>
+          <a:ext cx="0" cy="0"/>
+          <a:chOff x="0" y="0"/>
+          <a:chExt cx="0" cy="0"/>
+        </a:xfrm>
+      </p:grpSpPr>
       <p:sp>
         <p:nvSpPr>
-          <p:cNvPr id="2" name="Text Placeholder 1"/>
+          <p:cNvPr id="8" name="Text Placeholder 7">
+            <a:extLst>
+              <a:ext uri="{FF2B5EF4-FFF2-40B4-BE49-F238E27FC236}">
+                <a16:creationId xmlns:a16="http://schemas.microsoft.com/office/drawing/2014/main" id="{59578A67-2261-B465-0FF1-D79919431FBB}"/>
+              </a:ext>
+            </a:extLst>
+          </p:cNvPr>
           <p:cNvSpPr>
             <a:spLocks noGrp="1"/>
           </p:cNvSpPr>
           <p:nvPr>
-            <p:ph type="body" idx="10" sz="quarter"/>
+            <p:ph type="body" sz="quarter" idx="10"/>
           </p:nvPr>
         </p:nvSpPr>
-        <p:spPr/>
+        <p:spPr>
+          <a:xfrm>
+            <a:off x="3619500" y="3864902"/>
+            <a:ext cx="4953000" cy="344827"/>
+          </a:xfrm>
+        </p:spPr>
         <p:txBody>
-          <a:bodyPr/>
+          <a:bodyPr>
+            <a:noAutofit/>
+          </a:bodyPr>
           <a:lstStyle/>
-          <a:p/>
+          <a:p>
+            <a:r>
+              <a:rPr lang="en-US" spc="10"/>
+              <a:t>Visit our site to learn more:</a:t>
+            </a:r>
+            <a:endParaRPr lang="en-ZA" spc="10"/>
+          </a:p>
         </p:txBody>
       </p:sp>
       <p:sp>
         <p:nvSpPr>
-          <p:cNvPr id="3" name="Text Placeholder 2"/>
+          <p:cNvPr id="9" name="Text Placeholder 8">
+            <a:extLst>
+              <a:ext uri="{FF2B5EF4-FFF2-40B4-BE49-F238E27FC236}">
+                <a16:creationId xmlns:a16="http://schemas.microsoft.com/office/drawing/2014/main" id="{5B36AC1F-C159-ABC1-6BC9-3CAC77BF35BB}"/>
+              </a:ext>
+            </a:extLst>
+          </p:cNvPr>
           <p:cNvSpPr>
             <a:spLocks noGrp="1"/>
           </p:cNvSpPr>
           <p:nvPr>
-            <p:ph type="body" idx="11" sz="quarter"/>
+            <p:ph type="body" sz="quarter" idx="11"/>
           </p:nvPr>
-        </p:nvSpPr>
-        <p:spPr/>
-        <p:txBody>
-          <a:bodyPr/>
-          <a:lstStyle/>
-          <a:p/>
-        </p:txBody>
-      </p:sp>
-      <p:sp>
-        <p:nvSpPr>
-          <p:cNvPr id="4" name="Text Placeholder 3"/>
-          <p:cNvSpPr>
-            <a:spLocks noGrp="1"/>
-          </p:cNvSpPr>
-          <p:nvPr>
-            <p:ph type="body" idx="12" sz="quarter"/>
-          </p:nvPr>
-        </p:nvSpPr>
-        <p:spPr/>
-        <p:txBody>
-          <a:bodyPr/>
-          <a:lstStyle/>
-          <a:p/>
-        </p:txBody>
-      </p:sp>
-      <p:sp>
-        <p:nvSpPr>
-          <p:cNvPr id="5" name="TextBox 4"/>
-          <p:cNvSpPr txBox="1"/>
-          <p:nvPr/>
         </p:nvSpPr>
         <p:spPr>
           <a:xfrm>
-            <a:off x="457200" y="457200"/>
-            <a:ext cx="8229600" cy="731520"/>
+            <a:off x="4441577" y="4747873"/>
+            <a:ext cx="3273674" cy="344827"/>
           </a:xfrm>
-          <a:prstGeom prst="rect">
-            <a:avLst/>
-          </a:prstGeom>
-          <a:noFill/>
         </p:spPr>
         <p:txBody>
-          <a:bodyPr wrap="none">
-            <a:spAutoFit/>
+          <a:bodyPr>
+            <a:noAutofit/>
           </a:bodyPr>
           <a:lstStyle/>
           <a:p>
             <a:r>
-              <a:rPr b="1" sz="3200"/>
-              <a:t>Meeting Summary</a:t>
-            </a:r>
-          </a:p>
-        </p:txBody>
-      </p:sp>
-      <p:sp>
-        <p:nvSpPr>
-          <p:cNvPr id="6" name="TextBox 5"/>
-          <p:cNvSpPr txBox="1"/>
-          <p:nvPr/>
-        </p:nvSpPr>
-        <p:spPr>
-          <a:xfrm>
-            <a:off x="457200" y="1371600"/>
-            <a:ext cx="11277600" cy="5029200"/>
-          </a:xfrm>
-          <a:prstGeom prst="rect">
-            <a:avLst/>
-          </a:prstGeom>
-          <a:noFill/>
-        </p:spPr>
-        <p:txBody>
-          <a:bodyPr wrap="square">
-            <a:spAutoFit/>
-          </a:bodyPr>
-          <a:lstStyle/>
-          <a:p>
-            <a:r>
-              <a:rPr b="1"/>
-              <a:t>Summary</a:t>
-            </a:r>
-          </a:p>
-          <a:p>
-            <a:r>
-              <a:t>Andrey Kerchin initiated the meeting to assess the performance of the transcription service. The core objective was to confirm that the transcription results are accurate and can be effectively utilized within the ongoing project.</a:t>
-            </a:r>
-          </a:p>
-          <a:p/>
-          <a:p>
-            <a:r>
-              <a:rPr b="1"/>
-              <a:t>Agreed Recommendations</a:t>
-            </a:r>
-          </a:p>
-          <a:p>
-            <a:r>
-              <a:t>• The project requires the transcription results to be successfully integrated and applied to the project</a:t>
-            </a:r>
-          </a:p>
-          <a:p>
-            <a:r>
-              <a:t>• Transcription functionality is crucial for the project's progression</a:t>
-            </a:r>
-          </a:p>
-          <a:p/>
-          <a:p>
-            <a:r>
-              <a:rPr b="1"/>
-              <a:t>Action Items</a:t>
-            </a:r>
-          </a:p>
-          <a:p>
-            <a:r>
-              <a:t>1. Verify transcription functionality for project integration — Andrey Kerchin — Not specified</a:t>
-            </a:r>
+              <a:rPr lang="en-US" dirty="0"/>
+              <a:t>https://www.litware.com</a:t>
+            </a:r>
+            <a:endParaRPr lang="en-ZA" dirty="0"/>
           </a:p>
         </p:txBody>
       </p:sp>
     </p:spTree>
+    <p:extLst>
+      <p:ext uri="{BB962C8B-B14F-4D97-AF65-F5344CB8AC3E}">
+        <p14:creationId xmlns:p14="http://schemas.microsoft.com/office/powerpoint/2010/main" val="1559448605"/>
+      </p:ext>
+    </p:extLst>
   </p:cSld>
   <p:clrMapOvr>
     <a:masterClrMapping/>

--- a/someproject/artifacts/kickoff-deck.pptx
+++ b/someproject/artifacts/kickoff-deck.pptx
@@ -19,6 +19,7 @@
     <p:sldId id="866" r:id="rId10"/>
     <p:sldId id="858" r:id="rId11"/>
     <p:sldId id="859" r:id="rId12"/>
+    <p:sldId id="901" r:id="rId39"/>
     <p:sldId id="554" r:id="rId13"/>
   </p:sldIdLst>
   <p:sldSz cx="12192000" cy="6858000"/>
@@ -9778,6 +9779,143 @@
         <p14:creationId xmlns:p14="http://schemas.microsoft.com/office/powerpoint/2010/main" val="247990684"/>
       </p:ext>
     </p:extLst>
+  </p:cSld>
+  <p:clrMapOvr>
+    <a:masterClrMapping/>
+  </p:clrMapOvr>
+</p:sld>
+</file>
+
+<file path=ppt/slides/slide10.xml><?xml version="1.0" encoding="utf-8"?>
+<p:sld xmlns:a="http://schemas.openxmlformats.org/drawingml/2006/main" xmlns:p="http://schemas.openxmlformats.org/presentationml/2006/main" xmlns:r="http://schemas.openxmlformats.org/officeDocument/2006/relationships">
+  <p:cSld>
+    <p:spTree>
+      <p:nvGrpSpPr>
+        <p:cNvPr id="1" name=""/>
+        <p:cNvGrpSpPr/>
+        <p:nvPr/>
+      </p:nvGrpSpPr>
+      <p:grpSpPr/>
+      <p:sp>
+        <p:nvSpPr>
+          <p:cNvPr id="2" name="Text Placeholder 1"/>
+          <p:cNvSpPr>
+            <a:spLocks noGrp="1"/>
+          </p:cNvSpPr>
+          <p:nvPr>
+            <p:ph type="body" idx="10" sz="quarter"/>
+          </p:nvPr>
+        </p:nvSpPr>
+        <p:spPr/>
+        <p:txBody>
+          <a:bodyPr/>
+          <a:lstStyle/>
+          <a:p/>
+        </p:txBody>
+      </p:sp>
+      <p:sp>
+        <p:nvSpPr>
+          <p:cNvPr id="3" name="Text Placeholder 2"/>
+          <p:cNvSpPr>
+            <a:spLocks noGrp="1"/>
+          </p:cNvSpPr>
+          <p:nvPr>
+            <p:ph type="body" idx="11" sz="quarter"/>
+          </p:nvPr>
+        </p:nvSpPr>
+        <p:spPr/>
+        <p:txBody>
+          <a:bodyPr/>
+          <a:lstStyle/>
+          <a:p/>
+        </p:txBody>
+      </p:sp>
+      <p:sp>
+        <p:nvSpPr>
+          <p:cNvPr id="4" name="Text Placeholder 3"/>
+          <p:cNvSpPr>
+            <a:spLocks noGrp="1"/>
+          </p:cNvSpPr>
+          <p:nvPr>
+            <p:ph type="body" idx="12" sz="quarter"/>
+          </p:nvPr>
+        </p:nvSpPr>
+        <p:spPr/>
+        <p:txBody>
+          <a:bodyPr/>
+          <a:lstStyle/>
+          <a:p/>
+        </p:txBody>
+      </p:sp>
+      <p:sp>
+        <p:nvSpPr>
+          <p:cNvPr id="5" name="TextBox 4"/>
+          <p:cNvSpPr txBox="1"/>
+          <p:nvPr/>
+        </p:nvSpPr>
+        <p:spPr>
+          <a:xfrm>
+            <a:off x="457200" y="1097280"/>
+            <a:ext cx="11277600" cy="5303520"/>
+          </a:xfrm>
+          <a:prstGeom prst="rect">
+            <a:avLst/>
+          </a:prstGeom>
+          <a:noFill/>
+        </p:spPr>
+        <p:txBody>
+          <a:bodyPr wrap="square">
+            <a:spAutoFit/>
+          </a:bodyPr>
+          <a:lstStyle/>
+          <a:p>
+            <a:r>
+              <a:rPr b="1"/>
+              <a:t>Summary</a:t>
+            </a:r>
+          </a:p>
+          <a:p>
+            <a:r>
+              <a:t>This meeting served as an initial check to evaluate the transcription service's performance. Andrey Kerchin confirmed that the transcription is a key component of the current project and emphasized the necessity for its results to be effectively applied.</a:t>
+            </a:r>
+          </a:p>
+          <a:p/>
+          <a:p>
+            <a:r>
+              <a:rPr b="1"/>
+              <a:t>Agreed Recommendations</a:t>
+            </a:r>
+          </a:p>
+          <a:p>
+            <a:r>
+              <a:t>• The transcription service is being integrated into the project</a:t>
+            </a:r>
+          </a:p>
+          <a:p>
+            <a:r>
+              <a:t>• The output of the transcription needs to be utilized within the project</a:t>
+            </a:r>
+          </a:p>
+          <a:p/>
+          <a:p>
+            <a:r>
+              <a:rPr b="1"/>
+              <a:t>Action Items</a:t>
+            </a:r>
+          </a:p>
+          <a:p>
+            <a:r>
+              <a:t>1. Verify transcription accuracy and functionality — Andrey Kerchin</a:t>
+            </a:r>
+          </a:p>
+          <a:p>
+            <a:r>
+              <a:t>2. Integrate transcription output into the project — Andrey Kerchin</a:t>
+            </a:r>
+          </a:p>
+        </p:txBody>
+      </p:sp>
+    </p:spTree>
   </p:cSld>
   <p:clrMapOvr>
     <a:masterClrMapping/>

--- a/someproject/artifacts/kickoff-deck.pptx
+++ b/someproject/artifacts/kickoff-deck.pptx
@@ -19,7 +19,6 @@
     <p:sldId id="866" r:id="rId10"/>
     <p:sldId id="858" r:id="rId11"/>
     <p:sldId id="859" r:id="rId12"/>
-    <p:sldId id="901" r:id="rId39"/>
     <p:sldId id="554" r:id="rId13"/>
   </p:sldIdLst>
   <p:sldSz cx="12192000" cy="6858000"/>
@@ -9779,143 +9778,6 @@
         <p14:creationId xmlns:p14="http://schemas.microsoft.com/office/powerpoint/2010/main" val="247990684"/>
       </p:ext>
     </p:extLst>
-  </p:cSld>
-  <p:clrMapOvr>
-    <a:masterClrMapping/>
-  </p:clrMapOvr>
-</p:sld>
-</file>
-
-<file path=ppt/slides/slide10.xml><?xml version="1.0" encoding="utf-8"?>
-<p:sld xmlns:a="http://schemas.openxmlformats.org/drawingml/2006/main" xmlns:p="http://schemas.openxmlformats.org/presentationml/2006/main" xmlns:r="http://schemas.openxmlformats.org/officeDocument/2006/relationships">
-  <p:cSld>
-    <p:spTree>
-      <p:nvGrpSpPr>
-        <p:cNvPr id="1" name=""/>
-        <p:cNvGrpSpPr/>
-        <p:nvPr/>
-      </p:nvGrpSpPr>
-      <p:grpSpPr/>
-      <p:sp>
-        <p:nvSpPr>
-          <p:cNvPr id="2" name="Text Placeholder 1"/>
-          <p:cNvSpPr>
-            <a:spLocks noGrp="1"/>
-          </p:cNvSpPr>
-          <p:nvPr>
-            <p:ph type="body" idx="10" sz="quarter"/>
-          </p:nvPr>
-        </p:nvSpPr>
-        <p:spPr/>
-        <p:txBody>
-          <a:bodyPr/>
-          <a:lstStyle/>
-          <a:p/>
-        </p:txBody>
-      </p:sp>
-      <p:sp>
-        <p:nvSpPr>
-          <p:cNvPr id="3" name="Text Placeholder 2"/>
-          <p:cNvSpPr>
-            <a:spLocks noGrp="1"/>
-          </p:cNvSpPr>
-          <p:nvPr>
-            <p:ph type="body" idx="11" sz="quarter"/>
-          </p:nvPr>
-        </p:nvSpPr>
-        <p:spPr/>
-        <p:txBody>
-          <a:bodyPr/>
-          <a:lstStyle/>
-          <a:p/>
-        </p:txBody>
-      </p:sp>
-      <p:sp>
-        <p:nvSpPr>
-          <p:cNvPr id="4" name="Text Placeholder 3"/>
-          <p:cNvSpPr>
-            <a:spLocks noGrp="1"/>
-          </p:cNvSpPr>
-          <p:nvPr>
-            <p:ph type="body" idx="12" sz="quarter"/>
-          </p:nvPr>
-        </p:nvSpPr>
-        <p:spPr/>
-        <p:txBody>
-          <a:bodyPr/>
-          <a:lstStyle/>
-          <a:p/>
-        </p:txBody>
-      </p:sp>
-      <p:sp>
-        <p:nvSpPr>
-          <p:cNvPr id="5" name="TextBox 4"/>
-          <p:cNvSpPr txBox="1"/>
-          <p:nvPr/>
-        </p:nvSpPr>
-        <p:spPr>
-          <a:xfrm>
-            <a:off x="457200" y="1097280"/>
-            <a:ext cx="11277600" cy="5303520"/>
-          </a:xfrm>
-          <a:prstGeom prst="rect">
-            <a:avLst/>
-          </a:prstGeom>
-          <a:noFill/>
-        </p:spPr>
-        <p:txBody>
-          <a:bodyPr wrap="square">
-            <a:spAutoFit/>
-          </a:bodyPr>
-          <a:lstStyle/>
-          <a:p>
-            <a:r>
-              <a:rPr b="1"/>
-              <a:t>Summary</a:t>
-            </a:r>
-          </a:p>
-          <a:p>
-            <a:r>
-              <a:t>This meeting served as an initial check to evaluate the transcription service's performance. Andrey Kerchin confirmed that the transcription is a key component of the current project and emphasized the necessity for its results to be effectively applied.</a:t>
-            </a:r>
-          </a:p>
-          <a:p/>
-          <a:p>
-            <a:r>
-              <a:rPr b="1"/>
-              <a:t>Agreed Recommendations</a:t>
-            </a:r>
-          </a:p>
-          <a:p>
-            <a:r>
-              <a:t>• The transcription service is being integrated into the project</a:t>
-            </a:r>
-          </a:p>
-          <a:p>
-            <a:r>
-              <a:t>• The output of the transcription needs to be utilized within the project</a:t>
-            </a:r>
-          </a:p>
-          <a:p/>
-          <a:p>
-            <a:r>
-              <a:rPr b="1"/>
-              <a:t>Action Items</a:t>
-            </a:r>
-          </a:p>
-          <a:p>
-            <a:r>
-              <a:t>1. Verify transcription accuracy and functionality — Andrey Kerchin</a:t>
-            </a:r>
-          </a:p>
-          <a:p>
-            <a:r>
-              <a:t>2. Integrate transcription output into the project — Andrey Kerchin</a:t>
-            </a:r>
-          </a:p>
-        </p:txBody>
-      </p:sp>
-    </p:spTree>
   </p:cSld>
   <p:clrMapOvr>
     <a:masterClrMapping/>

--- a/someproject/artifacts/kickoff-deck.pptx
+++ b/someproject/artifacts/kickoff-deck.pptx
@@ -19,6 +19,7 @@
     <p:sldId id="866" r:id="rId10"/>
     <p:sldId id="858" r:id="rId11"/>
     <p:sldId id="859" r:id="rId12"/>
+    <p:sldId id="901" r:id="rId39"/>
     <p:sldId id="554" r:id="rId13"/>
   </p:sldIdLst>
   <p:sldSz cx="12192000" cy="6858000"/>
@@ -9778,6 +9779,172 @@
         <p14:creationId xmlns:p14="http://schemas.microsoft.com/office/powerpoint/2010/main" val="247990684"/>
       </p:ext>
     </p:extLst>
+  </p:cSld>
+  <p:clrMapOvr>
+    <a:masterClrMapping/>
+  </p:clrMapOvr>
+</p:sld>
+</file>
+
+<file path=ppt/slides/slide10.xml><?xml version="1.0" encoding="utf-8"?>
+<p:sld xmlns:a="http://schemas.openxmlformats.org/drawingml/2006/main" xmlns:p="http://schemas.openxmlformats.org/presentationml/2006/main" xmlns:r="http://schemas.openxmlformats.org/officeDocument/2006/relationships">
+  <p:cSld>
+    <p:spTree>
+      <p:nvGrpSpPr>
+        <p:cNvPr id="1" name=""/>
+        <p:cNvGrpSpPr/>
+        <p:nvPr/>
+      </p:nvGrpSpPr>
+      <p:grpSpPr/>
+      <p:sp>
+        <p:nvSpPr>
+          <p:cNvPr id="2" name="Text Placeholder 1"/>
+          <p:cNvSpPr>
+            <a:spLocks noGrp="1"/>
+          </p:cNvSpPr>
+          <p:nvPr>
+            <p:ph type="body" idx="10" sz="quarter"/>
+          </p:nvPr>
+        </p:nvSpPr>
+        <p:spPr/>
+        <p:txBody>
+          <a:bodyPr/>
+          <a:lstStyle/>
+          <a:p/>
+        </p:txBody>
+      </p:sp>
+      <p:sp>
+        <p:nvSpPr>
+          <p:cNvPr id="3" name="Text Placeholder 2"/>
+          <p:cNvSpPr>
+            <a:spLocks noGrp="1"/>
+          </p:cNvSpPr>
+          <p:nvPr>
+            <p:ph type="body" idx="11" sz="quarter"/>
+          </p:nvPr>
+        </p:nvSpPr>
+        <p:spPr/>
+        <p:txBody>
+          <a:bodyPr/>
+          <a:lstStyle/>
+          <a:p/>
+        </p:txBody>
+      </p:sp>
+      <p:sp>
+        <p:nvSpPr>
+          <p:cNvPr id="4" name="Text Placeholder 3"/>
+          <p:cNvSpPr>
+            <a:spLocks noGrp="1"/>
+          </p:cNvSpPr>
+          <p:nvPr>
+            <p:ph type="body" idx="12" sz="quarter"/>
+          </p:nvPr>
+        </p:nvSpPr>
+        <p:spPr/>
+        <p:txBody>
+          <a:bodyPr/>
+          <a:lstStyle/>
+          <a:p/>
+        </p:txBody>
+      </p:sp>
+      <p:sp>
+        <p:nvSpPr>
+          <p:cNvPr id="5" name="TextBox 4"/>
+          <p:cNvSpPr txBox="1"/>
+          <p:nvPr/>
+        </p:nvSpPr>
+        <p:spPr>
+          <a:xfrm>
+            <a:off x="457200" y="457200"/>
+            <a:ext cx="11277600" cy="914400"/>
+          </a:xfrm>
+          <a:prstGeom prst="rect">
+            <a:avLst/>
+          </a:prstGeom>
+          <a:noFill/>
+        </p:spPr>
+        <p:txBody>
+          <a:bodyPr wrap="none">
+            <a:spAutoFit/>
+          </a:bodyPr>
+          <a:lstStyle/>
+          <a:p>
+            <a:r>
+              <a:rPr b="1" sz="3200"/>
+              <a:t>Meeting Summary</a:t>
+            </a:r>
+          </a:p>
+        </p:txBody>
+      </p:sp>
+      <p:sp>
+        <p:nvSpPr>
+          <p:cNvPr id="6" name="TextBox 5"/>
+          <p:cNvSpPr txBox="1"/>
+          <p:nvPr/>
+        </p:nvSpPr>
+        <p:spPr>
+          <a:xfrm>
+            <a:off x="457200" y="1371600"/>
+            <a:ext cx="11277600" cy="5029200"/>
+          </a:xfrm>
+          <a:prstGeom prst="rect">
+            <a:avLst/>
+          </a:prstGeom>
+          <a:noFill/>
+        </p:spPr>
+        <p:txBody>
+          <a:bodyPr wrap="square">
+            <a:spAutoFit/>
+          </a:bodyPr>
+          <a:lstStyle/>
+          <a:p>
+            <a:r>
+              <a:rPr b="1"/>
+              <a:t>Summary</a:t>
+            </a:r>
+          </a:p>
+          <a:p>
+            <a:r>
+              <a:t>This meeting served as a test for the transcription service. Andrey Kerchin initiated the session to evaluate the performance of the transcription. The goal is to ensure that the generated transcriptions are accurate and can be effectively integrated into the current project.</a:t>
+            </a:r>
+          </a:p>
+          <a:p/>
+          <a:p>
+            <a:r>
+              <a:rPr b="1"/>
+              <a:t>Agreed Recommendations</a:t>
+            </a:r>
+          </a:p>
+          <a:p>
+            <a:r>
+              <a:t>• Test the transcription functionality for accuracy and reliability</a:t>
+            </a:r>
+          </a:p>
+          <a:p>
+            <a:r>
+              <a:t>• Evaluate the effectiveness and application of the transcription service</a:t>
+            </a:r>
+          </a:p>
+          <a:p>
+            <a:r>
+              <a:t>• Ensure transcription results can be applied to the ongoing project</a:t>
+            </a:r>
+          </a:p>
+          <a:p/>
+          <a:p>
+            <a:r>
+              <a:rPr b="1"/>
+              <a:t>Action Items</a:t>
+            </a:r>
+          </a:p>
+          <a:p>
+            <a:r>
+              <a:t>1. Verify the accuracy and usability of the transcription service — Andrey Kerchin — Not Specified</a:t>
+            </a:r>
+          </a:p>
+        </p:txBody>
+      </p:sp>
+    </p:spTree>
   </p:cSld>
   <p:clrMapOvr>
     <a:masterClrMapping/>

--- a/someproject/artifacts/kickoff-deck.pptx
+++ b/someproject/artifacts/kickoff-deck.pptx
@@ -19,7 +19,6 @@
     <p:sldId id="866" r:id="rId10"/>
     <p:sldId id="858" r:id="rId11"/>
     <p:sldId id="859" r:id="rId12"/>
-    <p:sldId id="901" r:id="rId39"/>
     <p:sldId id="554" r:id="rId13"/>
   </p:sldIdLst>
   <p:sldSz cx="12192000" cy="6858000"/>
@@ -9779,172 +9778,6 @@
         <p14:creationId xmlns:p14="http://schemas.microsoft.com/office/powerpoint/2010/main" val="247990684"/>
       </p:ext>
     </p:extLst>
-  </p:cSld>
-  <p:clrMapOvr>
-    <a:masterClrMapping/>
-  </p:clrMapOvr>
-</p:sld>
-</file>
-
-<file path=ppt/slides/slide10.xml><?xml version="1.0" encoding="utf-8"?>
-<p:sld xmlns:a="http://schemas.openxmlformats.org/drawingml/2006/main" xmlns:p="http://schemas.openxmlformats.org/presentationml/2006/main" xmlns:r="http://schemas.openxmlformats.org/officeDocument/2006/relationships">
-  <p:cSld>
-    <p:spTree>
-      <p:nvGrpSpPr>
-        <p:cNvPr id="1" name=""/>
-        <p:cNvGrpSpPr/>
-        <p:nvPr/>
-      </p:nvGrpSpPr>
-      <p:grpSpPr/>
-      <p:sp>
-        <p:nvSpPr>
-          <p:cNvPr id="2" name="Text Placeholder 1"/>
-          <p:cNvSpPr>
-            <a:spLocks noGrp="1"/>
-          </p:cNvSpPr>
-          <p:nvPr>
-            <p:ph type="body" idx="10" sz="quarter"/>
-          </p:nvPr>
-        </p:nvSpPr>
-        <p:spPr/>
-        <p:txBody>
-          <a:bodyPr/>
-          <a:lstStyle/>
-          <a:p/>
-        </p:txBody>
-      </p:sp>
-      <p:sp>
-        <p:nvSpPr>
-          <p:cNvPr id="3" name="Text Placeholder 2"/>
-          <p:cNvSpPr>
-            <a:spLocks noGrp="1"/>
-          </p:cNvSpPr>
-          <p:nvPr>
-            <p:ph type="body" idx="11" sz="quarter"/>
-          </p:nvPr>
-        </p:nvSpPr>
-        <p:spPr/>
-        <p:txBody>
-          <a:bodyPr/>
-          <a:lstStyle/>
-          <a:p/>
-        </p:txBody>
-      </p:sp>
-      <p:sp>
-        <p:nvSpPr>
-          <p:cNvPr id="4" name="Text Placeholder 3"/>
-          <p:cNvSpPr>
-            <a:spLocks noGrp="1"/>
-          </p:cNvSpPr>
-          <p:nvPr>
-            <p:ph type="body" idx="12" sz="quarter"/>
-          </p:nvPr>
-        </p:nvSpPr>
-        <p:spPr/>
-        <p:txBody>
-          <a:bodyPr/>
-          <a:lstStyle/>
-          <a:p/>
-        </p:txBody>
-      </p:sp>
-      <p:sp>
-        <p:nvSpPr>
-          <p:cNvPr id="5" name="TextBox 4"/>
-          <p:cNvSpPr txBox="1"/>
-          <p:nvPr/>
-        </p:nvSpPr>
-        <p:spPr>
-          <a:xfrm>
-            <a:off x="457200" y="457200"/>
-            <a:ext cx="11277600" cy="914400"/>
-          </a:xfrm>
-          <a:prstGeom prst="rect">
-            <a:avLst/>
-          </a:prstGeom>
-          <a:noFill/>
-        </p:spPr>
-        <p:txBody>
-          <a:bodyPr wrap="none">
-            <a:spAutoFit/>
-          </a:bodyPr>
-          <a:lstStyle/>
-          <a:p>
-            <a:r>
-              <a:rPr b="1" sz="3200"/>
-              <a:t>Meeting Summary</a:t>
-            </a:r>
-          </a:p>
-        </p:txBody>
-      </p:sp>
-      <p:sp>
-        <p:nvSpPr>
-          <p:cNvPr id="6" name="TextBox 5"/>
-          <p:cNvSpPr txBox="1"/>
-          <p:nvPr/>
-        </p:nvSpPr>
-        <p:spPr>
-          <a:xfrm>
-            <a:off x="457200" y="1371600"/>
-            <a:ext cx="11277600" cy="5029200"/>
-          </a:xfrm>
-          <a:prstGeom prst="rect">
-            <a:avLst/>
-          </a:prstGeom>
-          <a:noFill/>
-        </p:spPr>
-        <p:txBody>
-          <a:bodyPr wrap="square">
-            <a:spAutoFit/>
-          </a:bodyPr>
-          <a:lstStyle/>
-          <a:p>
-            <a:r>
-              <a:rPr b="1"/>
-              <a:t>Summary</a:t>
-            </a:r>
-          </a:p>
-          <a:p>
-            <a:r>
-              <a:t>This meeting served as a test for the transcription service. Andrey Kerchin initiated the session to evaluate the performance of the transcription. The goal is to ensure that the generated transcriptions are accurate and can be effectively integrated into the current project.</a:t>
-            </a:r>
-          </a:p>
-          <a:p/>
-          <a:p>
-            <a:r>
-              <a:rPr b="1"/>
-              <a:t>Agreed Recommendations</a:t>
-            </a:r>
-          </a:p>
-          <a:p>
-            <a:r>
-              <a:t>• Test the transcription functionality for accuracy and reliability</a:t>
-            </a:r>
-          </a:p>
-          <a:p>
-            <a:r>
-              <a:t>• Evaluate the effectiveness and application of the transcription service</a:t>
-            </a:r>
-          </a:p>
-          <a:p>
-            <a:r>
-              <a:t>• Ensure transcription results can be applied to the ongoing project</a:t>
-            </a:r>
-          </a:p>
-          <a:p/>
-          <a:p>
-            <a:r>
-              <a:rPr b="1"/>
-              <a:t>Action Items</a:t>
-            </a:r>
-          </a:p>
-          <a:p>
-            <a:r>
-              <a:t>1. Verify the accuracy and usability of the transcription service — Andrey Kerchin — Not Specified</a:t>
-            </a:r>
-          </a:p>
-        </p:txBody>
-      </p:sp>
-    </p:spTree>
   </p:cSld>
   <p:clrMapOvr>
     <a:masterClrMapping/>

--- a/someproject/artifacts/kickoff-deck.pptx
+++ b/someproject/artifacts/kickoff-deck.pptx
@@ -19,6 +19,7 @@
     <p:sldId id="866" r:id="rId10"/>
     <p:sldId id="858" r:id="rId11"/>
     <p:sldId id="859" r:id="rId12"/>
+    <p:sldId id="901" r:id="rId39"/>
     <p:sldId id="554" r:id="rId13"/>
   </p:sldIdLst>
   <p:sldSz cx="12192000" cy="6858000"/>
@@ -9778,6 +9779,172 @@
         <p14:creationId xmlns:p14="http://schemas.microsoft.com/office/powerpoint/2010/main" val="247990684"/>
       </p:ext>
     </p:extLst>
+  </p:cSld>
+  <p:clrMapOvr>
+    <a:masterClrMapping/>
+  </p:clrMapOvr>
+</p:sld>
+</file>
+
+<file path=ppt/slides/slide10.xml><?xml version="1.0" encoding="utf-8"?>
+<p:sld xmlns:a="http://schemas.openxmlformats.org/drawingml/2006/main" xmlns:p="http://schemas.openxmlformats.org/presentationml/2006/main" xmlns:r="http://schemas.openxmlformats.org/officeDocument/2006/relationships">
+  <p:cSld>
+    <p:spTree>
+      <p:nvGrpSpPr>
+        <p:cNvPr id="1" name=""/>
+        <p:cNvGrpSpPr/>
+        <p:nvPr/>
+      </p:nvGrpSpPr>
+      <p:grpSpPr/>
+      <p:sp>
+        <p:nvSpPr>
+          <p:cNvPr id="2" name="Text Placeholder 1"/>
+          <p:cNvSpPr>
+            <a:spLocks noGrp="1"/>
+          </p:cNvSpPr>
+          <p:nvPr>
+            <p:ph type="body" idx="10" sz="quarter"/>
+          </p:nvPr>
+        </p:nvSpPr>
+        <p:spPr/>
+        <p:txBody>
+          <a:bodyPr/>
+          <a:lstStyle/>
+          <a:p/>
+        </p:txBody>
+      </p:sp>
+      <p:sp>
+        <p:nvSpPr>
+          <p:cNvPr id="3" name="Text Placeholder 2"/>
+          <p:cNvSpPr>
+            <a:spLocks noGrp="1"/>
+          </p:cNvSpPr>
+          <p:nvPr>
+            <p:ph type="body" idx="11" sz="quarter"/>
+          </p:nvPr>
+        </p:nvSpPr>
+        <p:spPr/>
+        <p:txBody>
+          <a:bodyPr/>
+          <a:lstStyle/>
+          <a:p/>
+        </p:txBody>
+      </p:sp>
+      <p:sp>
+        <p:nvSpPr>
+          <p:cNvPr id="4" name="Text Placeholder 3"/>
+          <p:cNvSpPr>
+            <a:spLocks noGrp="1"/>
+          </p:cNvSpPr>
+          <p:nvPr>
+            <p:ph type="body" idx="12" sz="quarter"/>
+          </p:nvPr>
+        </p:nvSpPr>
+        <p:spPr/>
+        <p:txBody>
+          <a:bodyPr/>
+          <a:lstStyle/>
+          <a:p/>
+        </p:txBody>
+      </p:sp>
+      <p:sp>
+        <p:nvSpPr>
+          <p:cNvPr id="5" name="TextBox 4"/>
+          <p:cNvSpPr txBox="1"/>
+          <p:nvPr/>
+        </p:nvSpPr>
+        <p:spPr>
+          <a:xfrm>
+            <a:off x="457200" y="457200"/>
+            <a:ext cx="11277600" cy="914400"/>
+          </a:xfrm>
+          <a:prstGeom prst="rect">
+            <a:avLst/>
+          </a:prstGeom>
+          <a:noFill/>
+        </p:spPr>
+        <p:txBody>
+          <a:bodyPr wrap="none">
+            <a:spAutoFit/>
+          </a:bodyPr>
+          <a:lstStyle/>
+          <a:p>
+            <a:r>
+              <a:rPr b="1" sz="3200"/>
+              <a:t>Meeting Summary</a:t>
+            </a:r>
+          </a:p>
+        </p:txBody>
+      </p:sp>
+      <p:sp>
+        <p:nvSpPr>
+          <p:cNvPr id="6" name="TextBox 5"/>
+          <p:cNvSpPr txBox="1"/>
+          <p:nvPr/>
+        </p:nvSpPr>
+        <p:spPr>
+          <a:xfrm>
+            <a:off x="457200" y="1371600"/>
+            <a:ext cx="11277600" cy="5029200"/>
+          </a:xfrm>
+          <a:prstGeom prst="rect">
+            <a:avLst/>
+          </a:prstGeom>
+          <a:noFill/>
+        </p:spPr>
+        <p:txBody>
+          <a:bodyPr wrap="square">
+            <a:spAutoFit/>
+          </a:bodyPr>
+          <a:lstStyle/>
+          <a:p>
+            <a:r>
+              <a:rPr b="1"/>
+              <a:t>Summary</a:t>
+            </a:r>
+          </a:p>
+          <a:p>
+            <a:r>
+              <a:t>Andrey Kerchin initiated a meeting to evaluate the ongoing transcription implementation for the project. The core objective was to test and confirm the functionality of the transcription service. A key requirement identified is the successful application of the transcribed content to the project's needs.</a:t>
+            </a:r>
+          </a:p>
+          <a:p/>
+          <a:p>
+            <a:r>
+              <a:rPr b="1"/>
+              <a:t>Agreed Recommendations</a:t>
+            </a:r>
+          </a:p>
+          <a:p>
+            <a:r>
+              <a:t>• The project requires the transcription results to be successfully integrated and utilized within the project's scope</a:t>
+            </a:r>
+          </a:p>
+          <a:p>
+            <a:r>
+              <a:t>• Assess the effectiveness of the transcription service being implemented for the project</a:t>
+            </a:r>
+          </a:p>
+          <a:p/>
+          <a:p>
+            <a:r>
+              <a:rPr b="1"/>
+              <a:t>Action Items</a:t>
+            </a:r>
+          </a:p>
+          <a:p>
+            <a:r>
+              <a:t>1. Verify the functionality and accuracy of the transcription service — Andrey Kerchin</a:t>
+            </a:r>
+          </a:p>
+          <a:p>
+            <a:r>
+              <a:t>2. Ensure the transcription results are applied to the project — Andrey Kerchin</a:t>
+            </a:r>
+          </a:p>
+        </p:txBody>
+      </p:sp>
+    </p:spTree>
   </p:cSld>
   <p:clrMapOvr>
     <a:masterClrMapping/>

--- a/someproject/artifacts/kickoff-deck.pptx
+++ b/someproject/artifacts/kickoff-deck.pptx
@@ -20,6 +20,7 @@
     <p:sldId id="858" r:id="rId11"/>
     <p:sldId id="859" r:id="rId12"/>
     <p:sldId id="901" r:id="rId39"/>
+    <p:sldId id="902" r:id="rId40"/>
     <p:sldId id="554" r:id="rId13"/>
   </p:sldIdLst>
   <p:sldSz cx="12192000" cy="6858000"/>
@@ -9787,6 +9788,108 @@
 </file>
 
 <file path=ppt/slides/slide10.xml><?xml version="1.0" encoding="utf-8"?>
+<p:sld xmlns:a="http://schemas.openxmlformats.org/drawingml/2006/main" xmlns:r="http://schemas.openxmlformats.org/officeDocument/2006/relationships" xmlns:p="http://schemas.openxmlformats.org/presentationml/2006/main">
+  <p:cSld>
+    <p:spTree>
+      <p:nvGrpSpPr>
+        <p:cNvPr id="1" name=""/>
+        <p:cNvGrpSpPr/>
+        <p:nvPr/>
+      </p:nvGrpSpPr>
+      <p:grpSpPr>
+        <a:xfrm>
+          <a:off x="0" y="0"/>
+          <a:ext cx="0" cy="0"/>
+          <a:chOff x="0" y="0"/>
+          <a:chExt cx="0" cy="0"/>
+        </a:xfrm>
+      </p:grpSpPr>
+      <p:sp>
+        <p:nvSpPr>
+          <p:cNvPr id="8" name="Text Placeholder 7">
+            <a:extLst>
+              <a:ext uri="{FF2B5EF4-FFF2-40B4-BE49-F238E27FC236}">
+                <a16:creationId xmlns:a16="http://schemas.microsoft.com/office/drawing/2014/main" id="{59578A67-2261-B465-0FF1-D79919431FBB}"/>
+              </a:ext>
+            </a:extLst>
+          </p:cNvPr>
+          <p:cNvSpPr>
+            <a:spLocks noGrp="1"/>
+          </p:cNvSpPr>
+          <p:nvPr>
+            <p:ph type="body" sz="quarter" idx="10"/>
+          </p:nvPr>
+        </p:nvSpPr>
+        <p:spPr>
+          <a:xfrm>
+            <a:off x="3619500" y="3864902"/>
+            <a:ext cx="4953000" cy="344827"/>
+          </a:xfrm>
+        </p:spPr>
+        <p:txBody>
+          <a:bodyPr>
+            <a:noAutofit/>
+          </a:bodyPr>
+          <a:lstStyle/>
+          <a:p>
+            <a:r>
+              <a:rPr lang="en-US" spc="10"/>
+              <a:t>Visit our site to learn more:</a:t>
+            </a:r>
+            <a:endParaRPr lang="en-ZA" spc="10"/>
+          </a:p>
+        </p:txBody>
+      </p:sp>
+      <p:sp>
+        <p:nvSpPr>
+          <p:cNvPr id="9" name="Text Placeholder 8">
+            <a:extLst>
+              <a:ext uri="{FF2B5EF4-FFF2-40B4-BE49-F238E27FC236}">
+                <a16:creationId xmlns:a16="http://schemas.microsoft.com/office/drawing/2014/main" id="{5B36AC1F-C159-ABC1-6BC9-3CAC77BF35BB}"/>
+              </a:ext>
+            </a:extLst>
+          </p:cNvPr>
+          <p:cNvSpPr>
+            <a:spLocks noGrp="1"/>
+          </p:cNvSpPr>
+          <p:nvPr>
+            <p:ph type="body" sz="quarter" idx="11"/>
+          </p:nvPr>
+        </p:nvSpPr>
+        <p:spPr>
+          <a:xfrm>
+            <a:off x="4441577" y="4747873"/>
+            <a:ext cx="3273674" cy="344827"/>
+          </a:xfrm>
+        </p:spPr>
+        <p:txBody>
+          <a:bodyPr>
+            <a:noAutofit/>
+          </a:bodyPr>
+          <a:lstStyle/>
+          <a:p>
+            <a:r>
+              <a:rPr lang="en-US" dirty="0"/>
+              <a:t>https://www.litware.com</a:t>
+            </a:r>
+            <a:endParaRPr lang="en-ZA" dirty="0"/>
+          </a:p>
+        </p:txBody>
+      </p:sp>
+    </p:spTree>
+    <p:extLst>
+      <p:ext uri="{BB962C8B-B14F-4D97-AF65-F5344CB8AC3E}">
+        <p14:creationId xmlns:p14="http://schemas.microsoft.com/office/powerpoint/2010/main" val="1559448605"/>
+      </p:ext>
+    </p:extLst>
+  </p:cSld>
+  <p:clrMapOvr>
+    <a:masterClrMapping/>
+  </p:clrMapOvr>
+</p:sld>
+</file>
+
+<file path=ppt/slides/slide11.xml><?xml version="1.0" encoding="utf-8"?>
 <p:sld xmlns:a="http://schemas.openxmlformats.org/drawingml/2006/main" xmlns:p="http://schemas.openxmlformats.org/presentationml/2006/main" xmlns:r="http://schemas.openxmlformats.org/officeDocument/2006/relationships">
   <p:cSld>
     <p:spTree>
@@ -9810,7 +9913,11 @@
         <p:txBody>
           <a:bodyPr/>
           <a:lstStyle/>
-          <a:p/>
+          <a:p>
+            <a:r>
+              <a:t>Meeting Summary</a:t>
+            </a:r>
+          </a:p>
         </p:txBody>
       </p:sp>
       <p:sp>
@@ -9827,7 +9934,11 @@
         <p:txBody>
           <a:bodyPr/>
           <a:lstStyle/>
-          <a:p/>
+          <a:p>
+            <a:r>
+              <a:t>Transcription Project Check-in</a:t>
+            </a:r>
+          </a:p>
         </p:txBody>
       </p:sp>
       <p:sp>
@@ -9844,103 +9955,193 @@
         <p:txBody>
           <a:bodyPr/>
           <a:lstStyle/>
-          <a:p/>
-        </p:txBody>
-      </p:sp>
-      <p:sp>
-        <p:nvSpPr>
-          <p:cNvPr id="5" name="TextBox 4"/>
-          <p:cNvSpPr txBox="1"/>
-          <p:nvPr/>
-        </p:nvSpPr>
-        <p:spPr>
-          <a:xfrm>
-            <a:off x="457200" y="457200"/>
-            <a:ext cx="11277600" cy="914400"/>
-          </a:xfrm>
-          <a:prstGeom prst="rect">
-            <a:avLst/>
-          </a:prstGeom>
-          <a:noFill/>
-        </p:spPr>
-        <p:txBody>
-          <a:bodyPr wrap="none">
-            <a:spAutoFit/>
-          </a:bodyPr>
-          <a:lstStyle/>
-          <a:p>
-            <a:r>
-              <a:rPr b="1" sz="3200"/>
-              <a:t>Meeting Summary</a:t>
-            </a:r>
-          </a:p>
-        </p:txBody>
-      </p:sp>
-      <p:sp>
-        <p:nvSpPr>
-          <p:cNvPr id="6" name="TextBox 5"/>
-          <p:cNvSpPr txBox="1"/>
-          <p:nvPr/>
-        </p:nvSpPr>
-        <p:spPr>
-          <a:xfrm>
-            <a:off x="457200" y="1371600"/>
-            <a:ext cx="11277600" cy="5029200"/>
-          </a:xfrm>
-          <a:prstGeom prst="rect">
-            <a:avLst/>
-          </a:prstGeom>
-          <a:noFill/>
-        </p:spPr>
-        <p:txBody>
-          <a:bodyPr wrap="square">
-            <a:spAutoFit/>
-          </a:bodyPr>
-          <a:lstStyle/>
-          <a:p>
-            <a:r>
-              <a:rPr b="1"/>
-              <a:t>Summary</a:t>
-            </a:r>
-          </a:p>
-          <a:p>
-            <a:r>
-              <a:t>Andrey Kerchin initiated a meeting to evaluate the ongoing transcription implementation for the project. The core objective was to test and confirm the functionality of the transcription service. A key requirement identified is the successful application of the transcribed content to the project's needs.</a:t>
-            </a:r>
-          </a:p>
-          <a:p/>
-          <a:p>
-            <a:r>
-              <a:rPr b="1"/>
-              <a:t>Agreed Recommendations</a:t>
-            </a:r>
-          </a:p>
-          <a:p>
-            <a:r>
-              <a:t>• The project requires the transcription results to be successfully integrated and utilized within the project's scope</a:t>
-            </a:r>
-          </a:p>
-          <a:p>
-            <a:r>
-              <a:t>• Assess the effectiveness of the transcription service being implemented for the project</a:t>
-            </a:r>
-          </a:p>
-          <a:p/>
-          <a:p>
-            <a:r>
-              <a:rPr b="1"/>
+          <a:p>
+            <a:pPr>
+              <a:spcAft>
+                <a:spcPts val="600"/>
+              </a:spcAft>
+              <a:buNone/>
+            </a:pPr>
+            <a:r>
+              <a:rPr lang="en-US" sz="1800">
+                <a:solidFill>
+                  <a:srgbClr val="1D4159"/>
+                </a:solidFill>
+                <a:latin typeface="Roboto Medium" panose="02000000000000000000" pitchFamily="2" charset="0"/>
+                <a:ea typeface="Roboto Medium" panose="02000000000000000000" pitchFamily="2" charset="0"/>
+              </a:rPr>
+              <a:t>Purpose</a:t>
+            </a:r>
+          </a:p>
+          <a:p>
+            <a:pPr marL="180000" indent="-180000">
+              <a:spcAft>
+                <a:spcPts val="300"/>
+              </a:spcAft>
+              <a:buClr>
+                <a:srgbClr val="F17042"/>
+              </a:buClr>
+              <a:buFont typeface="Arial" panose="020B0604020202020204" pitchFamily="34" charset="0"/>
+              <a:buChar char="•"/>
+            </a:pPr>
+            <a:r>
+              <a:rPr lang="en-US" sz="1600">
+                <a:solidFill>
+                  <a:srgbClr val="1D4159"/>
+                </a:solidFill>
+                <a:latin typeface="Roboto" panose="02000000000000000000" pitchFamily="2" charset="0"/>
+                <a:ea typeface="Roboto" panose="02000000000000000000" pitchFamily="2" charset="0"/>
+              </a:rPr>
+              <a:t>Test the effectiveness of the transcription service</a:t>
+            </a:r>
+          </a:p>
+          <a:p>
+            <a:pPr marL="180000" indent="-180000">
+              <a:spcAft>
+                <a:spcPts val="300"/>
+              </a:spcAft>
+              <a:buClr>
+                <a:srgbClr val="F17042"/>
+              </a:buClr>
+              <a:buFont typeface="Arial" panose="020B0604020202020204" pitchFamily="34" charset="0"/>
+              <a:buChar char="•"/>
+            </a:pPr>
+            <a:r>
+              <a:rPr lang="en-US" sz="1600">
+                <a:solidFill>
+                  <a:srgbClr val="1D4159"/>
+                </a:solidFill>
+                <a:latin typeface="Roboto" panose="02000000000000000000" pitchFamily="2" charset="0"/>
+                <a:ea typeface="Roboto" panose="02000000000000000000" pitchFamily="2" charset="0"/>
+              </a:rPr>
+              <a:t>Ensure transcription results are suitable for project application</a:t>
+            </a:r>
+          </a:p>
+          <a:p>
+            <a:pPr>
+              <a:spcAft>
+                <a:spcPts val="0"/>
+              </a:spcAft>
+            </a:pPr>
+            <a:endParaRPr lang="en-US"/>
+          </a:p>
+          <a:p>
+            <a:pPr>
+              <a:spcAft>
+                <a:spcPts val="600"/>
+              </a:spcAft>
+              <a:buNone/>
+            </a:pPr>
+            <a:r>
+              <a:rPr lang="en-US" sz="1800">
+                <a:solidFill>
+                  <a:srgbClr val="1D4159"/>
+                </a:solidFill>
+                <a:latin typeface="Roboto Medium" panose="02000000000000000000" pitchFamily="2" charset="0"/>
+                <a:ea typeface="Roboto Medium" panose="02000000000000000000" pitchFamily="2" charset="0"/>
+              </a:rPr>
+              <a:t>Key Points</a:t>
+            </a:r>
+          </a:p>
+          <a:p>
+            <a:pPr marL="180000" indent="-180000">
+              <a:spcAft>
+                <a:spcPts val="300"/>
+              </a:spcAft>
+              <a:buClr>
+                <a:srgbClr val="F17042"/>
+              </a:buClr>
+              <a:buFont typeface="Arial" panose="020B0604020202020204" pitchFamily="34" charset="0"/>
+              <a:buChar char="•"/>
+            </a:pPr>
+            <a:r>
+              <a:rPr lang="en-US" sz="1600">
+                <a:solidFill>
+                  <a:srgbClr val="1D4159"/>
+                </a:solidFill>
+                <a:latin typeface="Roboto" panose="02000000000000000000" pitchFamily="2" charset="0"/>
+                <a:ea typeface="Roboto" panose="02000000000000000000" pitchFamily="2" charset="0"/>
+              </a:rPr>
+              <a:t>Meeting focused on verifying transcription performance</a:t>
+            </a:r>
+          </a:p>
+          <a:p>
+            <a:pPr marL="180000" indent="-180000">
+              <a:spcAft>
+                <a:spcPts val="300"/>
+              </a:spcAft>
+              <a:buClr>
+                <a:srgbClr val="F17042"/>
+              </a:buClr>
+              <a:buFont typeface="Arial" panose="020B0604020202020204" pitchFamily="34" charset="0"/>
+              <a:buChar char="•"/>
+            </a:pPr>
+            <a:r>
+              <a:rPr lang="en-US" sz="1600">
+                <a:solidFill>
+                  <a:srgbClr val="1D4159"/>
+                </a:solidFill>
+                <a:latin typeface="Roboto" panose="02000000000000000000" pitchFamily="2" charset="0"/>
+                <a:ea typeface="Roboto" panose="02000000000000000000" pitchFamily="2" charset="0"/>
+              </a:rPr>
+              <a:t>Results of transcription are critical for project success</a:t>
+            </a:r>
+          </a:p>
+          <a:p>
+            <a:pPr>
+              <a:spcAft>
+                <a:spcPts val="0"/>
+              </a:spcAft>
+            </a:pPr>
+            <a:endParaRPr lang="en-US"/>
+          </a:p>
+          <a:p>
+            <a:pPr>
+              <a:spcAft>
+                <a:spcPts val="600"/>
+              </a:spcAft>
+              <a:buNone/>
+            </a:pPr>
+            <a:r>
+              <a:rPr lang="en-US" sz="1800">
+                <a:solidFill>
+                  <a:srgbClr val="1D4159"/>
+                </a:solidFill>
+                <a:latin typeface="Roboto Medium" panose="02000000000000000000" pitchFamily="2" charset="0"/>
+                <a:ea typeface="Roboto Medium" panose="02000000000000000000" pitchFamily="2" charset="0"/>
+              </a:rPr>
               <a:t>Action Items</a:t>
             </a:r>
           </a:p>
           <a:p>
-            <a:r>
-              <a:t>1. Verify the functionality and accuracy of the transcription service — Andrey Kerchin</a:t>
-            </a:r>
-          </a:p>
-          <a:p>
-            <a:r>
-              <a:t>2. Ensure the transcription results are applied to the project — Andrey Kerchin</a:t>
-            </a:r>
+            <a:pPr marL="180000" indent="-180000">
+              <a:spcAft>
+                <a:spcPts val="300"/>
+              </a:spcAft>
+              <a:buClr>
+                <a:srgbClr val="F17042"/>
+              </a:buClr>
+              <a:buFont typeface="Arial" panose="020B0604020202020204" pitchFamily="34" charset="0"/>
+              <a:buChar char="•"/>
+            </a:pPr>
+            <a:r>
+              <a:rPr lang="en-US" sz="1600">
+                <a:solidFill>
+                  <a:srgbClr val="1D4159"/>
+                </a:solidFill>
+                <a:latin typeface="Roboto" panose="02000000000000000000" pitchFamily="2" charset="0"/>
+                <a:ea typeface="Roboto" panose="02000000000000000000" pitchFamily="2" charset="0"/>
+              </a:rPr>
+              <a:t>Evaluate transcription accuracy (Owner: Andrey Kerchin)</a:t>
+            </a:r>
+          </a:p>
+          <a:p>
+            <a:pPr>
+              <a:spcAft>
+                <a:spcPts val="0"/>
+              </a:spcAft>
+            </a:pPr>
+            <a:endParaRPr lang="en-US"/>
           </a:p>
         </p:txBody>
       </p:sp>
@@ -14538,7 +14739,7 @@
 </file>
 
 <file path=ppt/slides/slide9.xml><?xml version="1.0" encoding="utf-8"?>
-<p:sld xmlns:a="http://schemas.openxmlformats.org/drawingml/2006/main" xmlns:r="http://schemas.openxmlformats.org/officeDocument/2006/relationships" xmlns:p="http://schemas.openxmlformats.org/presentationml/2006/main">
+<p:sld xmlns:a="http://schemas.openxmlformats.org/drawingml/2006/main" xmlns:p="http://schemas.openxmlformats.org/presentationml/2006/main" xmlns:r="http://schemas.openxmlformats.org/officeDocument/2006/relationships">
   <p:cSld>
     <p:spTree>
       <p:nvGrpSpPr>
@@ -14546,92 +14747,156 @@
         <p:cNvGrpSpPr/>
         <p:nvPr/>
       </p:nvGrpSpPr>
-      <p:grpSpPr>
-        <a:xfrm>
-          <a:off x="0" y="0"/>
-          <a:ext cx="0" cy="0"/>
-          <a:chOff x="0" y="0"/>
-          <a:chExt cx="0" cy="0"/>
-        </a:xfrm>
-      </p:grpSpPr>
+      <p:grpSpPr/>
       <p:sp>
         <p:nvSpPr>
-          <p:cNvPr id="8" name="Text Placeholder 7">
-            <a:extLst>
-              <a:ext uri="{FF2B5EF4-FFF2-40B4-BE49-F238E27FC236}">
-                <a16:creationId xmlns:a16="http://schemas.microsoft.com/office/drawing/2014/main" id="{59578A67-2261-B465-0FF1-D79919431FBB}"/>
-              </a:ext>
-            </a:extLst>
-          </p:cNvPr>
+          <p:cNvPr id="2" name="Text Placeholder 1"/>
           <p:cNvSpPr>
             <a:spLocks noGrp="1"/>
           </p:cNvSpPr>
           <p:nvPr>
-            <p:ph type="body" sz="quarter" idx="10"/>
+            <p:ph type="body" idx="10" sz="quarter"/>
           </p:nvPr>
         </p:nvSpPr>
-        <p:spPr>
-          <a:xfrm>
-            <a:off x="3619500" y="3864902"/>
-            <a:ext cx="4953000" cy="344827"/>
-          </a:xfrm>
-        </p:spPr>
+        <p:spPr/>
         <p:txBody>
-          <a:bodyPr>
-            <a:noAutofit/>
-          </a:bodyPr>
+          <a:bodyPr/>
           <a:lstStyle/>
-          <a:p>
-            <a:r>
-              <a:rPr lang="en-US" spc="10"/>
-              <a:t>Visit our site to learn more:</a:t>
-            </a:r>
-            <a:endParaRPr lang="en-ZA" spc="10"/>
-          </a:p>
+          <a:p/>
         </p:txBody>
       </p:sp>
       <p:sp>
         <p:nvSpPr>
-          <p:cNvPr id="9" name="Text Placeholder 8">
-            <a:extLst>
-              <a:ext uri="{FF2B5EF4-FFF2-40B4-BE49-F238E27FC236}">
-                <a16:creationId xmlns:a16="http://schemas.microsoft.com/office/drawing/2014/main" id="{5B36AC1F-C159-ABC1-6BC9-3CAC77BF35BB}"/>
-              </a:ext>
-            </a:extLst>
-          </p:cNvPr>
+          <p:cNvPr id="3" name="Text Placeholder 2"/>
           <p:cNvSpPr>
             <a:spLocks noGrp="1"/>
           </p:cNvSpPr>
           <p:nvPr>
-            <p:ph type="body" sz="quarter" idx="11"/>
+            <p:ph type="body" idx="11" sz="quarter"/>
           </p:nvPr>
+        </p:nvSpPr>
+        <p:spPr/>
+        <p:txBody>
+          <a:bodyPr/>
+          <a:lstStyle/>
+          <a:p/>
+        </p:txBody>
+      </p:sp>
+      <p:sp>
+        <p:nvSpPr>
+          <p:cNvPr id="4" name="Text Placeholder 3"/>
+          <p:cNvSpPr>
+            <a:spLocks noGrp="1"/>
+          </p:cNvSpPr>
+          <p:nvPr>
+            <p:ph type="body" idx="12" sz="quarter"/>
+          </p:nvPr>
+        </p:nvSpPr>
+        <p:spPr/>
+        <p:txBody>
+          <a:bodyPr/>
+          <a:lstStyle/>
+          <a:p/>
+        </p:txBody>
+      </p:sp>
+      <p:sp>
+        <p:nvSpPr>
+          <p:cNvPr id="5" name="TextBox 4"/>
+          <p:cNvSpPr txBox="1"/>
+          <p:nvPr/>
         </p:nvSpPr>
         <p:spPr>
           <a:xfrm>
-            <a:off x="4441577" y="4747873"/>
-            <a:ext cx="3273674" cy="344827"/>
+            <a:off x="457200" y="457200"/>
+            <a:ext cx="11277600" cy="914400"/>
           </a:xfrm>
+          <a:prstGeom prst="rect">
+            <a:avLst/>
+          </a:prstGeom>
+          <a:noFill/>
         </p:spPr>
         <p:txBody>
-          <a:bodyPr>
-            <a:noAutofit/>
+          <a:bodyPr wrap="none">
+            <a:spAutoFit/>
           </a:bodyPr>
           <a:lstStyle/>
           <a:p>
             <a:r>
-              <a:rPr lang="en-US" dirty="0"/>
-              <a:t>https://www.litware.com</a:t>
-            </a:r>
-            <a:endParaRPr lang="en-ZA" dirty="0"/>
+              <a:rPr b="1" sz="3200"/>
+              <a:t>Meeting Summary</a:t>
+            </a:r>
+          </a:p>
+        </p:txBody>
+      </p:sp>
+      <p:sp>
+        <p:nvSpPr>
+          <p:cNvPr id="6" name="TextBox 5"/>
+          <p:cNvSpPr txBox="1"/>
+          <p:nvPr/>
+        </p:nvSpPr>
+        <p:spPr>
+          <a:xfrm>
+            <a:off x="457200" y="1371600"/>
+            <a:ext cx="11277600" cy="5029200"/>
+          </a:xfrm>
+          <a:prstGeom prst="rect">
+            <a:avLst/>
+          </a:prstGeom>
+          <a:noFill/>
+        </p:spPr>
+        <p:txBody>
+          <a:bodyPr wrap="square">
+            <a:spAutoFit/>
+          </a:bodyPr>
+          <a:lstStyle/>
+          <a:p>
+            <a:r>
+              <a:rPr b="1"/>
+              <a:t>Summary</a:t>
+            </a:r>
+          </a:p>
+          <a:p>
+            <a:r>
+              <a:t>Andrey Kerchin initiated a meeting to evaluate the ongoing transcription implementation for the project. The core objective was to test and confirm the functionality of the transcription service. A key requirement identified is the successful application of the transcribed content to the project's needs.</a:t>
+            </a:r>
+          </a:p>
+          <a:p/>
+          <a:p>
+            <a:r>
+              <a:rPr b="1"/>
+              <a:t>Agreed Recommendations</a:t>
+            </a:r>
+          </a:p>
+          <a:p>
+            <a:r>
+              <a:t>• The project requires the transcription results to be successfully integrated and utilized within the project's scope</a:t>
+            </a:r>
+          </a:p>
+          <a:p>
+            <a:r>
+              <a:t>• Assess the effectiveness of the transcription service being implemented for the project</a:t>
+            </a:r>
+          </a:p>
+          <a:p/>
+          <a:p>
+            <a:r>
+              <a:rPr b="1"/>
+              <a:t>Action Items</a:t>
+            </a:r>
+          </a:p>
+          <a:p>
+            <a:r>
+              <a:t>1. Verify the functionality and accuracy of the transcription service — Andrey Kerchin</a:t>
+            </a:r>
+          </a:p>
+          <a:p>
+            <a:r>
+              <a:t>2. Ensure the transcription results are applied to the project — Andrey Kerchin</a:t>
+            </a:r>
           </a:p>
         </p:txBody>
       </p:sp>
     </p:spTree>
-    <p:extLst>
-      <p:ext uri="{BB962C8B-B14F-4D97-AF65-F5344CB8AC3E}">
-        <p14:creationId xmlns:p14="http://schemas.microsoft.com/office/powerpoint/2010/main" val="1559448605"/>
-      </p:ext>
-    </p:extLst>
   </p:cSld>
   <p:clrMapOvr>
     <a:masterClrMapping/>

--- a/someproject/artifacts/kickoff-deck.pptx
+++ b/someproject/artifacts/kickoff-deck.pptx
@@ -19,8 +19,6 @@
     <p:sldId id="866" r:id="rId10"/>
     <p:sldId id="858" r:id="rId11"/>
     <p:sldId id="859" r:id="rId12"/>
-    <p:sldId id="901" r:id="rId39"/>
-    <p:sldId id="902" r:id="rId40"/>
     <p:sldId id="554" r:id="rId13"/>
   </p:sldIdLst>
   <p:sldSz cx="12192000" cy="6858000"/>
@@ -9787,372 +9785,6 @@
 </p:sld>
 </file>
 
-<file path=ppt/slides/slide10.xml><?xml version="1.0" encoding="utf-8"?>
-<p:sld xmlns:a="http://schemas.openxmlformats.org/drawingml/2006/main" xmlns:r="http://schemas.openxmlformats.org/officeDocument/2006/relationships" xmlns:p="http://schemas.openxmlformats.org/presentationml/2006/main">
-  <p:cSld>
-    <p:spTree>
-      <p:nvGrpSpPr>
-        <p:cNvPr id="1" name=""/>
-        <p:cNvGrpSpPr/>
-        <p:nvPr/>
-      </p:nvGrpSpPr>
-      <p:grpSpPr>
-        <a:xfrm>
-          <a:off x="0" y="0"/>
-          <a:ext cx="0" cy="0"/>
-          <a:chOff x="0" y="0"/>
-          <a:chExt cx="0" cy="0"/>
-        </a:xfrm>
-      </p:grpSpPr>
-      <p:sp>
-        <p:nvSpPr>
-          <p:cNvPr id="8" name="Text Placeholder 7">
-            <a:extLst>
-              <a:ext uri="{FF2B5EF4-FFF2-40B4-BE49-F238E27FC236}">
-                <a16:creationId xmlns:a16="http://schemas.microsoft.com/office/drawing/2014/main" id="{59578A67-2261-B465-0FF1-D79919431FBB}"/>
-              </a:ext>
-            </a:extLst>
-          </p:cNvPr>
-          <p:cNvSpPr>
-            <a:spLocks noGrp="1"/>
-          </p:cNvSpPr>
-          <p:nvPr>
-            <p:ph type="body" sz="quarter" idx="10"/>
-          </p:nvPr>
-        </p:nvSpPr>
-        <p:spPr>
-          <a:xfrm>
-            <a:off x="3619500" y="3864902"/>
-            <a:ext cx="4953000" cy="344827"/>
-          </a:xfrm>
-        </p:spPr>
-        <p:txBody>
-          <a:bodyPr>
-            <a:noAutofit/>
-          </a:bodyPr>
-          <a:lstStyle/>
-          <a:p>
-            <a:r>
-              <a:rPr lang="en-US" spc="10"/>
-              <a:t>Visit our site to learn more:</a:t>
-            </a:r>
-            <a:endParaRPr lang="en-ZA" spc="10"/>
-          </a:p>
-        </p:txBody>
-      </p:sp>
-      <p:sp>
-        <p:nvSpPr>
-          <p:cNvPr id="9" name="Text Placeholder 8">
-            <a:extLst>
-              <a:ext uri="{FF2B5EF4-FFF2-40B4-BE49-F238E27FC236}">
-                <a16:creationId xmlns:a16="http://schemas.microsoft.com/office/drawing/2014/main" id="{5B36AC1F-C159-ABC1-6BC9-3CAC77BF35BB}"/>
-              </a:ext>
-            </a:extLst>
-          </p:cNvPr>
-          <p:cNvSpPr>
-            <a:spLocks noGrp="1"/>
-          </p:cNvSpPr>
-          <p:nvPr>
-            <p:ph type="body" sz="quarter" idx="11"/>
-          </p:nvPr>
-        </p:nvSpPr>
-        <p:spPr>
-          <a:xfrm>
-            <a:off x="4441577" y="4747873"/>
-            <a:ext cx="3273674" cy="344827"/>
-          </a:xfrm>
-        </p:spPr>
-        <p:txBody>
-          <a:bodyPr>
-            <a:noAutofit/>
-          </a:bodyPr>
-          <a:lstStyle/>
-          <a:p>
-            <a:r>
-              <a:rPr lang="en-US" dirty="0"/>
-              <a:t>https://www.litware.com</a:t>
-            </a:r>
-            <a:endParaRPr lang="en-ZA" dirty="0"/>
-          </a:p>
-        </p:txBody>
-      </p:sp>
-    </p:spTree>
-    <p:extLst>
-      <p:ext uri="{BB962C8B-B14F-4D97-AF65-F5344CB8AC3E}">
-        <p14:creationId xmlns:p14="http://schemas.microsoft.com/office/powerpoint/2010/main" val="1559448605"/>
-      </p:ext>
-    </p:extLst>
-  </p:cSld>
-  <p:clrMapOvr>
-    <a:masterClrMapping/>
-  </p:clrMapOvr>
-</p:sld>
-</file>
-
-<file path=ppt/slides/slide11.xml><?xml version="1.0" encoding="utf-8"?>
-<p:sld xmlns:a="http://schemas.openxmlformats.org/drawingml/2006/main" xmlns:p="http://schemas.openxmlformats.org/presentationml/2006/main" xmlns:r="http://schemas.openxmlformats.org/officeDocument/2006/relationships">
-  <p:cSld>
-    <p:spTree>
-      <p:nvGrpSpPr>
-        <p:cNvPr id="1" name=""/>
-        <p:cNvGrpSpPr/>
-        <p:nvPr/>
-      </p:nvGrpSpPr>
-      <p:grpSpPr/>
-      <p:sp>
-        <p:nvSpPr>
-          <p:cNvPr id="2" name="Text Placeholder 1"/>
-          <p:cNvSpPr>
-            <a:spLocks noGrp="1"/>
-          </p:cNvSpPr>
-          <p:nvPr>
-            <p:ph type="body" idx="10" sz="quarter"/>
-          </p:nvPr>
-        </p:nvSpPr>
-        <p:spPr/>
-        <p:txBody>
-          <a:bodyPr/>
-          <a:lstStyle/>
-          <a:p>
-            <a:r>
-              <a:t>Meeting Summary</a:t>
-            </a:r>
-          </a:p>
-        </p:txBody>
-      </p:sp>
-      <p:sp>
-        <p:nvSpPr>
-          <p:cNvPr id="3" name="Text Placeholder 2"/>
-          <p:cNvSpPr>
-            <a:spLocks noGrp="1"/>
-          </p:cNvSpPr>
-          <p:nvPr>
-            <p:ph type="body" idx="11" sz="quarter"/>
-          </p:nvPr>
-        </p:nvSpPr>
-        <p:spPr/>
-        <p:txBody>
-          <a:bodyPr/>
-          <a:lstStyle/>
-          <a:p>
-            <a:r>
-              <a:t>Transcription Project Check-in</a:t>
-            </a:r>
-          </a:p>
-        </p:txBody>
-      </p:sp>
-      <p:sp>
-        <p:nvSpPr>
-          <p:cNvPr id="4" name="Text Placeholder 3"/>
-          <p:cNvSpPr>
-            <a:spLocks noGrp="1"/>
-          </p:cNvSpPr>
-          <p:nvPr>
-            <p:ph type="body" idx="12" sz="quarter"/>
-          </p:nvPr>
-        </p:nvSpPr>
-        <p:spPr/>
-        <p:txBody>
-          <a:bodyPr/>
-          <a:lstStyle/>
-          <a:p>
-            <a:pPr>
-              <a:spcAft>
-                <a:spcPts val="600"/>
-              </a:spcAft>
-              <a:buNone/>
-            </a:pPr>
-            <a:r>
-              <a:rPr lang="en-US" sz="1800">
-                <a:solidFill>
-                  <a:srgbClr val="1D4159"/>
-                </a:solidFill>
-                <a:latin typeface="Roboto Medium" panose="02000000000000000000" pitchFamily="2" charset="0"/>
-                <a:ea typeface="Roboto Medium" panose="02000000000000000000" pitchFamily="2" charset="0"/>
-              </a:rPr>
-              <a:t>Purpose</a:t>
-            </a:r>
-          </a:p>
-          <a:p>
-            <a:pPr marL="180000" indent="-180000">
-              <a:spcAft>
-                <a:spcPts val="300"/>
-              </a:spcAft>
-              <a:buClr>
-                <a:srgbClr val="F17042"/>
-              </a:buClr>
-              <a:buFont typeface="Arial" panose="020B0604020202020204" pitchFamily="34" charset="0"/>
-              <a:buChar char="•"/>
-            </a:pPr>
-            <a:r>
-              <a:rPr lang="en-US" sz="1600">
-                <a:solidFill>
-                  <a:srgbClr val="1D4159"/>
-                </a:solidFill>
-                <a:latin typeface="Roboto" panose="02000000000000000000" pitchFamily="2" charset="0"/>
-                <a:ea typeface="Roboto" panose="02000000000000000000" pitchFamily="2" charset="0"/>
-              </a:rPr>
-              <a:t>Test the effectiveness of the transcription service</a:t>
-            </a:r>
-          </a:p>
-          <a:p>
-            <a:pPr marL="180000" indent="-180000">
-              <a:spcAft>
-                <a:spcPts val="300"/>
-              </a:spcAft>
-              <a:buClr>
-                <a:srgbClr val="F17042"/>
-              </a:buClr>
-              <a:buFont typeface="Arial" panose="020B0604020202020204" pitchFamily="34" charset="0"/>
-              <a:buChar char="•"/>
-            </a:pPr>
-            <a:r>
-              <a:rPr lang="en-US" sz="1600">
-                <a:solidFill>
-                  <a:srgbClr val="1D4159"/>
-                </a:solidFill>
-                <a:latin typeface="Roboto" panose="02000000000000000000" pitchFamily="2" charset="0"/>
-                <a:ea typeface="Roboto" panose="02000000000000000000" pitchFamily="2" charset="0"/>
-              </a:rPr>
-              <a:t>Ensure transcription results are suitable for project application</a:t>
-            </a:r>
-          </a:p>
-          <a:p>
-            <a:pPr>
-              <a:spcAft>
-                <a:spcPts val="0"/>
-              </a:spcAft>
-            </a:pPr>
-            <a:endParaRPr lang="en-US"/>
-          </a:p>
-          <a:p>
-            <a:pPr>
-              <a:spcAft>
-                <a:spcPts val="600"/>
-              </a:spcAft>
-              <a:buNone/>
-            </a:pPr>
-            <a:r>
-              <a:rPr lang="en-US" sz="1800">
-                <a:solidFill>
-                  <a:srgbClr val="1D4159"/>
-                </a:solidFill>
-                <a:latin typeface="Roboto Medium" panose="02000000000000000000" pitchFamily="2" charset="0"/>
-                <a:ea typeface="Roboto Medium" panose="02000000000000000000" pitchFamily="2" charset="0"/>
-              </a:rPr>
-              <a:t>Key Points</a:t>
-            </a:r>
-          </a:p>
-          <a:p>
-            <a:pPr marL="180000" indent="-180000">
-              <a:spcAft>
-                <a:spcPts val="300"/>
-              </a:spcAft>
-              <a:buClr>
-                <a:srgbClr val="F17042"/>
-              </a:buClr>
-              <a:buFont typeface="Arial" panose="020B0604020202020204" pitchFamily="34" charset="0"/>
-              <a:buChar char="•"/>
-            </a:pPr>
-            <a:r>
-              <a:rPr lang="en-US" sz="1600">
-                <a:solidFill>
-                  <a:srgbClr val="1D4159"/>
-                </a:solidFill>
-                <a:latin typeface="Roboto" panose="02000000000000000000" pitchFamily="2" charset="0"/>
-                <a:ea typeface="Roboto" panose="02000000000000000000" pitchFamily="2" charset="0"/>
-              </a:rPr>
-              <a:t>Meeting focused on verifying transcription performance</a:t>
-            </a:r>
-          </a:p>
-          <a:p>
-            <a:pPr marL="180000" indent="-180000">
-              <a:spcAft>
-                <a:spcPts val="300"/>
-              </a:spcAft>
-              <a:buClr>
-                <a:srgbClr val="F17042"/>
-              </a:buClr>
-              <a:buFont typeface="Arial" panose="020B0604020202020204" pitchFamily="34" charset="0"/>
-              <a:buChar char="•"/>
-            </a:pPr>
-            <a:r>
-              <a:rPr lang="en-US" sz="1600">
-                <a:solidFill>
-                  <a:srgbClr val="1D4159"/>
-                </a:solidFill>
-                <a:latin typeface="Roboto" panose="02000000000000000000" pitchFamily="2" charset="0"/>
-                <a:ea typeface="Roboto" panose="02000000000000000000" pitchFamily="2" charset="0"/>
-              </a:rPr>
-              <a:t>Results of transcription are critical for project success</a:t>
-            </a:r>
-          </a:p>
-          <a:p>
-            <a:pPr>
-              <a:spcAft>
-                <a:spcPts val="0"/>
-              </a:spcAft>
-            </a:pPr>
-            <a:endParaRPr lang="en-US"/>
-          </a:p>
-          <a:p>
-            <a:pPr>
-              <a:spcAft>
-                <a:spcPts val="600"/>
-              </a:spcAft>
-              <a:buNone/>
-            </a:pPr>
-            <a:r>
-              <a:rPr lang="en-US" sz="1800">
-                <a:solidFill>
-                  <a:srgbClr val="1D4159"/>
-                </a:solidFill>
-                <a:latin typeface="Roboto Medium" panose="02000000000000000000" pitchFamily="2" charset="0"/>
-                <a:ea typeface="Roboto Medium" panose="02000000000000000000" pitchFamily="2" charset="0"/>
-              </a:rPr>
-              <a:t>Action Items</a:t>
-            </a:r>
-          </a:p>
-          <a:p>
-            <a:pPr marL="180000" indent="-180000">
-              <a:spcAft>
-                <a:spcPts val="300"/>
-              </a:spcAft>
-              <a:buClr>
-                <a:srgbClr val="F17042"/>
-              </a:buClr>
-              <a:buFont typeface="Arial" panose="020B0604020202020204" pitchFamily="34" charset="0"/>
-              <a:buChar char="•"/>
-            </a:pPr>
-            <a:r>
-              <a:rPr lang="en-US" sz="1600">
-                <a:solidFill>
-                  <a:srgbClr val="1D4159"/>
-                </a:solidFill>
-                <a:latin typeface="Roboto" panose="02000000000000000000" pitchFamily="2" charset="0"/>
-                <a:ea typeface="Roboto" panose="02000000000000000000" pitchFamily="2" charset="0"/>
-              </a:rPr>
-              <a:t>Evaluate transcription accuracy (Owner: Andrey Kerchin)</a:t>
-            </a:r>
-          </a:p>
-          <a:p>
-            <a:pPr>
-              <a:spcAft>
-                <a:spcPts val="0"/>
-              </a:spcAft>
-            </a:pPr>
-            <a:endParaRPr lang="en-US"/>
-          </a:p>
-        </p:txBody>
-      </p:sp>
-    </p:spTree>
-  </p:cSld>
-  <p:clrMapOvr>
-    <a:masterClrMapping/>
-  </p:clrMapOvr>
-</p:sld>
-</file>
-
 <file path=ppt/slides/slide2.xml><?xml version="1.0" encoding="utf-8"?>
 <p:sld xmlns:a="http://schemas.openxmlformats.org/drawingml/2006/main" xmlns:r="http://schemas.openxmlformats.org/officeDocument/2006/relationships" xmlns:p="http://schemas.openxmlformats.org/presentationml/2006/main">
   <p:cSld>
@@ -14739,7 +14371,7 @@
 </file>
 
 <file path=ppt/slides/slide9.xml><?xml version="1.0" encoding="utf-8"?>
-<p:sld xmlns:a="http://schemas.openxmlformats.org/drawingml/2006/main" xmlns:p="http://schemas.openxmlformats.org/presentationml/2006/main" xmlns:r="http://schemas.openxmlformats.org/officeDocument/2006/relationships">
+<p:sld xmlns:a="http://schemas.openxmlformats.org/drawingml/2006/main" xmlns:r="http://schemas.openxmlformats.org/officeDocument/2006/relationships" xmlns:p="http://schemas.openxmlformats.org/presentationml/2006/main">
   <p:cSld>
     <p:spTree>
       <p:nvGrpSpPr>
@@ -14747,156 +14379,92 @@
         <p:cNvGrpSpPr/>
         <p:nvPr/>
       </p:nvGrpSpPr>
-      <p:grpSpPr/>
+      <p:grpSpPr>
+        <a:xfrm>
+          <a:off x="0" y="0"/>
+          <a:ext cx="0" cy="0"/>
+          <a:chOff x="0" y="0"/>
+          <a:chExt cx="0" cy="0"/>
+        </a:xfrm>
+      </p:grpSpPr>
       <p:sp>
         <p:nvSpPr>
-          <p:cNvPr id="2" name="Text Placeholder 1"/>
+          <p:cNvPr id="8" name="Text Placeholder 7">
+            <a:extLst>
+              <a:ext uri="{FF2B5EF4-FFF2-40B4-BE49-F238E27FC236}">
+                <a16:creationId xmlns:a16="http://schemas.microsoft.com/office/drawing/2014/main" id="{59578A67-2261-B465-0FF1-D79919431FBB}"/>
+              </a:ext>
+            </a:extLst>
+          </p:cNvPr>
           <p:cNvSpPr>
             <a:spLocks noGrp="1"/>
           </p:cNvSpPr>
           <p:nvPr>
-            <p:ph type="body" idx="10" sz="quarter"/>
+            <p:ph type="body" sz="quarter" idx="10"/>
           </p:nvPr>
         </p:nvSpPr>
-        <p:spPr/>
+        <p:spPr>
+          <a:xfrm>
+            <a:off x="3619500" y="3864902"/>
+            <a:ext cx="4953000" cy="344827"/>
+          </a:xfrm>
+        </p:spPr>
         <p:txBody>
-          <a:bodyPr/>
+          <a:bodyPr>
+            <a:noAutofit/>
+          </a:bodyPr>
           <a:lstStyle/>
-          <a:p/>
+          <a:p>
+            <a:r>
+              <a:rPr lang="en-US" spc="10"/>
+              <a:t>Visit our site to learn more:</a:t>
+            </a:r>
+            <a:endParaRPr lang="en-ZA" spc="10"/>
+          </a:p>
         </p:txBody>
       </p:sp>
       <p:sp>
         <p:nvSpPr>
-          <p:cNvPr id="3" name="Text Placeholder 2"/>
+          <p:cNvPr id="9" name="Text Placeholder 8">
+            <a:extLst>
+              <a:ext uri="{FF2B5EF4-FFF2-40B4-BE49-F238E27FC236}">
+                <a16:creationId xmlns:a16="http://schemas.microsoft.com/office/drawing/2014/main" id="{5B36AC1F-C159-ABC1-6BC9-3CAC77BF35BB}"/>
+              </a:ext>
+            </a:extLst>
+          </p:cNvPr>
           <p:cNvSpPr>
             <a:spLocks noGrp="1"/>
           </p:cNvSpPr>
           <p:nvPr>
-            <p:ph type="body" idx="11" sz="quarter"/>
+            <p:ph type="body" sz="quarter" idx="11"/>
           </p:nvPr>
-        </p:nvSpPr>
-        <p:spPr/>
-        <p:txBody>
-          <a:bodyPr/>
-          <a:lstStyle/>
-          <a:p/>
-        </p:txBody>
-      </p:sp>
-      <p:sp>
-        <p:nvSpPr>
-          <p:cNvPr id="4" name="Text Placeholder 3"/>
-          <p:cNvSpPr>
-            <a:spLocks noGrp="1"/>
-          </p:cNvSpPr>
-          <p:nvPr>
-            <p:ph type="body" idx="12" sz="quarter"/>
-          </p:nvPr>
-        </p:nvSpPr>
-        <p:spPr/>
-        <p:txBody>
-          <a:bodyPr/>
-          <a:lstStyle/>
-          <a:p/>
-        </p:txBody>
-      </p:sp>
-      <p:sp>
-        <p:nvSpPr>
-          <p:cNvPr id="5" name="TextBox 4"/>
-          <p:cNvSpPr txBox="1"/>
-          <p:nvPr/>
         </p:nvSpPr>
         <p:spPr>
           <a:xfrm>
-            <a:off x="457200" y="457200"/>
-            <a:ext cx="11277600" cy="914400"/>
+            <a:off x="4441577" y="4747873"/>
+            <a:ext cx="3273674" cy="344827"/>
           </a:xfrm>
-          <a:prstGeom prst="rect">
-            <a:avLst/>
-          </a:prstGeom>
-          <a:noFill/>
         </p:spPr>
         <p:txBody>
-          <a:bodyPr wrap="none">
-            <a:spAutoFit/>
+          <a:bodyPr>
+            <a:noAutofit/>
           </a:bodyPr>
           <a:lstStyle/>
           <a:p>
             <a:r>
-              <a:rPr b="1" sz="3200"/>
-              <a:t>Meeting Summary</a:t>
-            </a:r>
-          </a:p>
-        </p:txBody>
-      </p:sp>
-      <p:sp>
-        <p:nvSpPr>
-          <p:cNvPr id="6" name="TextBox 5"/>
-          <p:cNvSpPr txBox="1"/>
-          <p:nvPr/>
-        </p:nvSpPr>
-        <p:spPr>
-          <a:xfrm>
-            <a:off x="457200" y="1371600"/>
-            <a:ext cx="11277600" cy="5029200"/>
-          </a:xfrm>
-          <a:prstGeom prst="rect">
-            <a:avLst/>
-          </a:prstGeom>
-          <a:noFill/>
-        </p:spPr>
-        <p:txBody>
-          <a:bodyPr wrap="square">
-            <a:spAutoFit/>
-          </a:bodyPr>
-          <a:lstStyle/>
-          <a:p>
-            <a:r>
-              <a:rPr b="1"/>
-              <a:t>Summary</a:t>
-            </a:r>
-          </a:p>
-          <a:p>
-            <a:r>
-              <a:t>Andrey Kerchin initiated a meeting to evaluate the ongoing transcription implementation for the project. The core objective was to test and confirm the functionality of the transcription service. A key requirement identified is the successful application of the transcribed content to the project's needs.</a:t>
-            </a:r>
-          </a:p>
-          <a:p/>
-          <a:p>
-            <a:r>
-              <a:rPr b="1"/>
-              <a:t>Agreed Recommendations</a:t>
-            </a:r>
-          </a:p>
-          <a:p>
-            <a:r>
-              <a:t>• The project requires the transcription results to be successfully integrated and utilized within the project's scope</a:t>
-            </a:r>
-          </a:p>
-          <a:p>
-            <a:r>
-              <a:t>• Assess the effectiveness of the transcription service being implemented for the project</a:t>
-            </a:r>
-          </a:p>
-          <a:p/>
-          <a:p>
-            <a:r>
-              <a:rPr b="1"/>
-              <a:t>Action Items</a:t>
-            </a:r>
-          </a:p>
-          <a:p>
-            <a:r>
-              <a:t>1. Verify the functionality and accuracy of the transcription service — Andrey Kerchin</a:t>
-            </a:r>
-          </a:p>
-          <a:p>
-            <a:r>
-              <a:t>2. Ensure the transcription results are applied to the project — Andrey Kerchin</a:t>
-            </a:r>
+              <a:rPr lang="en-US" dirty="0"/>
+              <a:t>https://www.litware.com</a:t>
+            </a:r>
+            <a:endParaRPr lang="en-ZA" dirty="0"/>
           </a:p>
         </p:txBody>
       </p:sp>
     </p:spTree>
+    <p:extLst>
+      <p:ext uri="{BB962C8B-B14F-4D97-AF65-F5344CB8AC3E}">
+        <p14:creationId xmlns:p14="http://schemas.microsoft.com/office/powerpoint/2010/main" val="1559448605"/>
+      </p:ext>
+    </p:extLst>
   </p:cSld>
   <p:clrMapOvr>
     <a:masterClrMapping/>

--- a/someproject/artifacts/kickoff-deck.pptx
+++ b/someproject/artifacts/kickoff-deck.pptx
@@ -19,6 +19,7 @@
     <p:sldId id="866" r:id="rId10"/>
     <p:sldId id="858" r:id="rId11"/>
     <p:sldId id="859" r:id="rId12"/>
+    <p:sldId id="901" r:id="rId39"/>
     <p:sldId id="554" r:id="rId13"/>
   </p:sldIdLst>
   <p:sldSz cx="12192000" cy="6858000"/>
@@ -9778,6 +9779,270 @@
         <p14:creationId xmlns:p14="http://schemas.microsoft.com/office/powerpoint/2010/main" val="247990684"/>
       </p:ext>
     </p:extLst>
+  </p:cSld>
+  <p:clrMapOvr>
+    <a:masterClrMapping/>
+  </p:clrMapOvr>
+</p:sld>
+</file>
+
+<file path=ppt/slides/slide10.xml><?xml version="1.0" encoding="utf-8"?>
+<p:sld xmlns:a="http://schemas.openxmlformats.org/drawingml/2006/main" xmlns:p="http://schemas.openxmlformats.org/presentationml/2006/main" xmlns:r="http://schemas.openxmlformats.org/officeDocument/2006/relationships">
+  <p:cSld>
+    <p:spTree>
+      <p:nvGrpSpPr>
+        <p:cNvPr id="1" name=""/>
+        <p:cNvGrpSpPr/>
+        <p:nvPr/>
+      </p:nvGrpSpPr>
+      <p:grpSpPr/>
+      <p:sp>
+        <p:nvSpPr>
+          <p:cNvPr id="2" name="Text Placeholder 1"/>
+          <p:cNvSpPr>
+            <a:spLocks noGrp="1"/>
+          </p:cNvSpPr>
+          <p:nvPr>
+            <p:ph type="body" idx="10" sz="quarter"/>
+          </p:nvPr>
+        </p:nvSpPr>
+        <p:spPr/>
+        <p:txBody>
+          <a:bodyPr/>
+          <a:lstStyle/>
+          <a:p>
+            <a:r>
+              <a:t>Meeting Summary</a:t>
+            </a:r>
+          </a:p>
+        </p:txBody>
+      </p:sp>
+      <p:sp>
+        <p:nvSpPr>
+          <p:cNvPr id="3" name="Text Placeholder 2"/>
+          <p:cNvSpPr>
+            <a:spLocks noGrp="1"/>
+          </p:cNvSpPr>
+          <p:nvPr>
+            <p:ph type="body" idx="11" sz="quarter"/>
+          </p:nvPr>
+        </p:nvSpPr>
+        <p:spPr/>
+        <p:txBody>
+          <a:bodyPr/>
+          <a:lstStyle/>
+          <a:p>
+            <a:r>
+              <a:t>Transcription Project Review</a:t>
+            </a:r>
+          </a:p>
+        </p:txBody>
+      </p:sp>
+      <p:sp>
+        <p:nvSpPr>
+          <p:cNvPr id="4" name="Text Placeholder 3"/>
+          <p:cNvSpPr>
+            <a:spLocks noGrp="1"/>
+          </p:cNvSpPr>
+          <p:nvPr>
+            <p:ph type="body" idx="12" sz="quarter"/>
+          </p:nvPr>
+        </p:nvSpPr>
+        <p:spPr/>
+        <p:txBody>
+          <a:bodyPr/>
+          <a:lstStyle/>
+          <a:p>
+            <a:pPr>
+              <a:spcAft>
+                <a:spcPts val="600"/>
+              </a:spcAft>
+              <a:buNone/>
+            </a:pPr>
+            <a:r>
+              <a:rPr lang="en-US" sz="1800">
+                <a:solidFill>
+                  <a:srgbClr val="1D4159"/>
+                </a:solidFill>
+                <a:latin typeface="Roboto Medium" panose="02000000000000000000" pitchFamily="2" charset="0"/>
+                <a:ea typeface="Roboto Medium" panose="02000000000000000000" pitchFamily="2" charset="0"/>
+              </a:rPr>
+              <a:t>Meeting Overview</a:t>
+            </a:r>
+          </a:p>
+          <a:p>
+            <a:pPr marL="180000" indent="-180000">
+              <a:spcAft>
+                <a:spcPts val="300"/>
+              </a:spcAft>
+              <a:buClr>
+                <a:srgbClr val="F17042"/>
+              </a:buClr>
+              <a:buFont typeface="Arial" panose="020B0604020202020204" pitchFamily="34" charset="0"/>
+              <a:buChar char="•"/>
+            </a:pPr>
+            <a:r>
+              <a:rPr lang="en-US" sz="1600">
+                <a:solidFill>
+                  <a:srgbClr val="1D4159"/>
+                </a:solidFill>
+                <a:latin typeface="Roboto" panose="02000000000000000000" pitchFamily="2" charset="0"/>
+                <a:ea typeface="Roboto" panose="02000000000000000000" pitchFamily="2" charset="0"/>
+              </a:rPr>
+              <a:t>Purpose: Test the effectiveness of the transcription service</a:t>
+            </a:r>
+          </a:p>
+          <a:p>
+            <a:pPr marL="180000" indent="-180000">
+              <a:spcAft>
+                <a:spcPts val="300"/>
+              </a:spcAft>
+              <a:buClr>
+                <a:srgbClr val="F17042"/>
+              </a:buClr>
+              <a:buFont typeface="Arial" panose="020B0604020202020204" pitchFamily="34" charset="0"/>
+              <a:buChar char="•"/>
+            </a:pPr>
+            <a:r>
+              <a:rPr lang="en-US" sz="1600">
+                <a:solidFill>
+                  <a:srgbClr val="1D4159"/>
+                </a:solidFill>
+                <a:latin typeface="Roboto" panose="02000000000000000000" pitchFamily="2" charset="0"/>
+                <a:ea typeface="Roboto" panose="02000000000000000000" pitchFamily="2" charset="0"/>
+              </a:rPr>
+              <a:t>Participant: Andrey Kerchin</a:t>
+            </a:r>
+          </a:p>
+          <a:p>
+            <a:pPr>
+              <a:spcAft>
+                <a:spcPts val="0"/>
+              </a:spcAft>
+            </a:pPr>
+            <a:endParaRPr lang="en-US"/>
+          </a:p>
+          <a:p>
+            <a:pPr>
+              <a:spcAft>
+                <a:spcPts val="600"/>
+              </a:spcAft>
+              <a:buNone/>
+            </a:pPr>
+            <a:r>
+              <a:rPr lang="en-US" sz="1800">
+                <a:solidFill>
+                  <a:srgbClr val="1D4159"/>
+                </a:solidFill>
+                <a:latin typeface="Roboto Medium" panose="02000000000000000000" pitchFamily="2" charset="0"/>
+                <a:ea typeface="Roboto Medium" panose="02000000000000000000" pitchFamily="2" charset="0"/>
+              </a:rPr>
+              <a:t>Key Discussion Points</a:t>
+            </a:r>
+          </a:p>
+          <a:p>
+            <a:pPr marL="180000" indent="-180000">
+              <a:spcAft>
+                <a:spcPts val="300"/>
+              </a:spcAft>
+              <a:buClr>
+                <a:srgbClr val="F17042"/>
+              </a:buClr>
+              <a:buFont typeface="Arial" panose="020B0604020202020204" pitchFamily="34" charset="0"/>
+              <a:buChar char="•"/>
+            </a:pPr>
+            <a:r>
+              <a:rPr lang="en-US" sz="1600">
+                <a:solidFill>
+                  <a:srgbClr val="1D4159"/>
+                </a:solidFill>
+                <a:latin typeface="Roboto" panose="02000000000000000000" pitchFamily="2" charset="0"/>
+                <a:ea typeface="Roboto" panose="02000000000000000000" pitchFamily="2" charset="0"/>
+              </a:rPr>
+              <a:t>Evaluating transcription service performance</a:t>
+            </a:r>
+          </a:p>
+          <a:p>
+            <a:pPr marL="180000" indent="-180000">
+              <a:spcAft>
+                <a:spcPts val="300"/>
+              </a:spcAft>
+              <a:buClr>
+                <a:srgbClr val="F17042"/>
+              </a:buClr>
+              <a:buFont typeface="Arial" panose="020B0604020202020204" pitchFamily="34" charset="0"/>
+              <a:buChar char="•"/>
+            </a:pPr>
+            <a:r>
+              <a:rPr lang="en-US" sz="1600">
+                <a:solidFill>
+                  <a:srgbClr val="1D4159"/>
+                </a:solidFill>
+                <a:latin typeface="Roboto" panose="02000000000000000000" pitchFamily="2" charset="0"/>
+                <a:ea typeface="Roboto" panose="02000000000000000000" pitchFamily="2" charset="0"/>
+              </a:rPr>
+              <a:t>Ensuring transcription results are applied to the project</a:t>
+            </a:r>
+          </a:p>
+          <a:p>
+            <a:pPr>
+              <a:spcAft>
+                <a:spcPts val="0"/>
+              </a:spcAft>
+            </a:pPr>
+            <a:endParaRPr lang="en-US"/>
+          </a:p>
+          <a:p>
+            <a:pPr>
+              <a:spcAft>
+                <a:spcPts val="600"/>
+              </a:spcAft>
+              <a:buNone/>
+            </a:pPr>
+            <a:r>
+              <a:rPr lang="en-US" sz="1800">
+                <a:solidFill>
+                  <a:srgbClr val="1D4159"/>
+                </a:solidFill>
+                <a:latin typeface="Roboto Medium" panose="02000000000000000000" pitchFamily="2" charset="0"/>
+                <a:ea typeface="Roboto Medium" panose="02000000000000000000" pitchFamily="2" charset="0"/>
+              </a:rPr>
+              <a:t>Action Items</a:t>
+            </a:r>
+          </a:p>
+          <a:p>
+            <a:pPr marL="180000" indent="-180000">
+              <a:spcAft>
+                <a:spcPts val="300"/>
+              </a:spcAft>
+              <a:buClr>
+                <a:srgbClr val="F17042"/>
+              </a:buClr>
+              <a:buFont typeface="Arial" panose="020B0604020202020204" pitchFamily="34" charset="0"/>
+              <a:buChar char="•"/>
+            </a:pPr>
+            <a:r>
+              <a:rPr lang="en-US" sz="1600">
+                <a:solidFill>
+                  <a:srgbClr val="1D4159"/>
+                </a:solidFill>
+                <a:latin typeface="Roboto" panose="02000000000000000000" pitchFamily="2" charset="0"/>
+                <a:ea typeface="Roboto" panose="02000000000000000000" pitchFamily="2" charset="0"/>
+              </a:rPr>
+              <a:t>Test the transcription service (Owner: Andrey Kerchin)</a:t>
+            </a:r>
+          </a:p>
+          <a:p>
+            <a:pPr>
+              <a:spcAft>
+                <a:spcPts val="0"/>
+              </a:spcAft>
+            </a:pPr>
+            <a:endParaRPr lang="en-US"/>
+          </a:p>
+        </p:txBody>
+      </p:sp>
+    </p:spTree>
   </p:cSld>
   <p:clrMapOvr>
     <a:masterClrMapping/>

--- a/someproject/artifacts/kickoff-deck.pptx
+++ b/someproject/artifacts/kickoff-deck.pptx
@@ -19,7 +19,6 @@
     <p:sldId id="866" r:id="rId10"/>
     <p:sldId id="858" r:id="rId11"/>
     <p:sldId id="859" r:id="rId12"/>
-    <p:sldId id="901" r:id="rId39"/>
     <p:sldId id="554" r:id="rId13"/>
   </p:sldIdLst>
   <p:sldSz cx="12192000" cy="6858000"/>
@@ -9779,270 +9778,6 @@
         <p14:creationId xmlns:p14="http://schemas.microsoft.com/office/powerpoint/2010/main" val="247990684"/>
       </p:ext>
     </p:extLst>
-  </p:cSld>
-  <p:clrMapOvr>
-    <a:masterClrMapping/>
-  </p:clrMapOvr>
-</p:sld>
-</file>
-
-<file path=ppt/slides/slide10.xml><?xml version="1.0" encoding="utf-8"?>
-<p:sld xmlns:a="http://schemas.openxmlformats.org/drawingml/2006/main" xmlns:p="http://schemas.openxmlformats.org/presentationml/2006/main" xmlns:r="http://schemas.openxmlformats.org/officeDocument/2006/relationships">
-  <p:cSld>
-    <p:spTree>
-      <p:nvGrpSpPr>
-        <p:cNvPr id="1" name=""/>
-        <p:cNvGrpSpPr/>
-        <p:nvPr/>
-      </p:nvGrpSpPr>
-      <p:grpSpPr/>
-      <p:sp>
-        <p:nvSpPr>
-          <p:cNvPr id="2" name="Text Placeholder 1"/>
-          <p:cNvSpPr>
-            <a:spLocks noGrp="1"/>
-          </p:cNvSpPr>
-          <p:nvPr>
-            <p:ph type="body" idx="10" sz="quarter"/>
-          </p:nvPr>
-        </p:nvSpPr>
-        <p:spPr/>
-        <p:txBody>
-          <a:bodyPr/>
-          <a:lstStyle/>
-          <a:p>
-            <a:r>
-              <a:t>Meeting Summary</a:t>
-            </a:r>
-          </a:p>
-        </p:txBody>
-      </p:sp>
-      <p:sp>
-        <p:nvSpPr>
-          <p:cNvPr id="3" name="Text Placeholder 2"/>
-          <p:cNvSpPr>
-            <a:spLocks noGrp="1"/>
-          </p:cNvSpPr>
-          <p:nvPr>
-            <p:ph type="body" idx="11" sz="quarter"/>
-          </p:nvPr>
-        </p:nvSpPr>
-        <p:spPr/>
-        <p:txBody>
-          <a:bodyPr/>
-          <a:lstStyle/>
-          <a:p>
-            <a:r>
-              <a:t>Transcription Project Review</a:t>
-            </a:r>
-          </a:p>
-        </p:txBody>
-      </p:sp>
-      <p:sp>
-        <p:nvSpPr>
-          <p:cNvPr id="4" name="Text Placeholder 3"/>
-          <p:cNvSpPr>
-            <a:spLocks noGrp="1"/>
-          </p:cNvSpPr>
-          <p:nvPr>
-            <p:ph type="body" idx="12" sz="quarter"/>
-          </p:nvPr>
-        </p:nvSpPr>
-        <p:spPr/>
-        <p:txBody>
-          <a:bodyPr/>
-          <a:lstStyle/>
-          <a:p>
-            <a:pPr>
-              <a:spcAft>
-                <a:spcPts val="600"/>
-              </a:spcAft>
-              <a:buNone/>
-            </a:pPr>
-            <a:r>
-              <a:rPr lang="en-US" sz="1800">
-                <a:solidFill>
-                  <a:srgbClr val="1D4159"/>
-                </a:solidFill>
-                <a:latin typeface="Roboto Medium" panose="02000000000000000000" pitchFamily="2" charset="0"/>
-                <a:ea typeface="Roboto Medium" panose="02000000000000000000" pitchFamily="2" charset="0"/>
-              </a:rPr>
-              <a:t>Meeting Overview</a:t>
-            </a:r>
-          </a:p>
-          <a:p>
-            <a:pPr marL="180000" indent="-180000">
-              <a:spcAft>
-                <a:spcPts val="300"/>
-              </a:spcAft>
-              <a:buClr>
-                <a:srgbClr val="F17042"/>
-              </a:buClr>
-              <a:buFont typeface="Arial" panose="020B0604020202020204" pitchFamily="34" charset="0"/>
-              <a:buChar char="•"/>
-            </a:pPr>
-            <a:r>
-              <a:rPr lang="en-US" sz="1600">
-                <a:solidFill>
-                  <a:srgbClr val="1D4159"/>
-                </a:solidFill>
-                <a:latin typeface="Roboto" panose="02000000000000000000" pitchFamily="2" charset="0"/>
-                <a:ea typeface="Roboto" panose="02000000000000000000" pitchFamily="2" charset="0"/>
-              </a:rPr>
-              <a:t>Purpose: Test the effectiveness of the transcription service</a:t>
-            </a:r>
-          </a:p>
-          <a:p>
-            <a:pPr marL="180000" indent="-180000">
-              <a:spcAft>
-                <a:spcPts val="300"/>
-              </a:spcAft>
-              <a:buClr>
-                <a:srgbClr val="F17042"/>
-              </a:buClr>
-              <a:buFont typeface="Arial" panose="020B0604020202020204" pitchFamily="34" charset="0"/>
-              <a:buChar char="•"/>
-            </a:pPr>
-            <a:r>
-              <a:rPr lang="en-US" sz="1600">
-                <a:solidFill>
-                  <a:srgbClr val="1D4159"/>
-                </a:solidFill>
-                <a:latin typeface="Roboto" panose="02000000000000000000" pitchFamily="2" charset="0"/>
-                <a:ea typeface="Roboto" panose="02000000000000000000" pitchFamily="2" charset="0"/>
-              </a:rPr>
-              <a:t>Participant: Andrey Kerchin</a:t>
-            </a:r>
-          </a:p>
-          <a:p>
-            <a:pPr>
-              <a:spcAft>
-                <a:spcPts val="0"/>
-              </a:spcAft>
-            </a:pPr>
-            <a:endParaRPr lang="en-US"/>
-          </a:p>
-          <a:p>
-            <a:pPr>
-              <a:spcAft>
-                <a:spcPts val="600"/>
-              </a:spcAft>
-              <a:buNone/>
-            </a:pPr>
-            <a:r>
-              <a:rPr lang="en-US" sz="1800">
-                <a:solidFill>
-                  <a:srgbClr val="1D4159"/>
-                </a:solidFill>
-                <a:latin typeface="Roboto Medium" panose="02000000000000000000" pitchFamily="2" charset="0"/>
-                <a:ea typeface="Roboto Medium" panose="02000000000000000000" pitchFamily="2" charset="0"/>
-              </a:rPr>
-              <a:t>Key Discussion Points</a:t>
-            </a:r>
-          </a:p>
-          <a:p>
-            <a:pPr marL="180000" indent="-180000">
-              <a:spcAft>
-                <a:spcPts val="300"/>
-              </a:spcAft>
-              <a:buClr>
-                <a:srgbClr val="F17042"/>
-              </a:buClr>
-              <a:buFont typeface="Arial" panose="020B0604020202020204" pitchFamily="34" charset="0"/>
-              <a:buChar char="•"/>
-            </a:pPr>
-            <a:r>
-              <a:rPr lang="en-US" sz="1600">
-                <a:solidFill>
-                  <a:srgbClr val="1D4159"/>
-                </a:solidFill>
-                <a:latin typeface="Roboto" panose="02000000000000000000" pitchFamily="2" charset="0"/>
-                <a:ea typeface="Roboto" panose="02000000000000000000" pitchFamily="2" charset="0"/>
-              </a:rPr>
-              <a:t>Evaluating transcription service performance</a:t>
-            </a:r>
-          </a:p>
-          <a:p>
-            <a:pPr marL="180000" indent="-180000">
-              <a:spcAft>
-                <a:spcPts val="300"/>
-              </a:spcAft>
-              <a:buClr>
-                <a:srgbClr val="F17042"/>
-              </a:buClr>
-              <a:buFont typeface="Arial" panose="020B0604020202020204" pitchFamily="34" charset="0"/>
-              <a:buChar char="•"/>
-            </a:pPr>
-            <a:r>
-              <a:rPr lang="en-US" sz="1600">
-                <a:solidFill>
-                  <a:srgbClr val="1D4159"/>
-                </a:solidFill>
-                <a:latin typeface="Roboto" panose="02000000000000000000" pitchFamily="2" charset="0"/>
-                <a:ea typeface="Roboto" panose="02000000000000000000" pitchFamily="2" charset="0"/>
-              </a:rPr>
-              <a:t>Ensuring transcription results are applied to the project</a:t>
-            </a:r>
-          </a:p>
-          <a:p>
-            <a:pPr>
-              <a:spcAft>
-                <a:spcPts val="0"/>
-              </a:spcAft>
-            </a:pPr>
-            <a:endParaRPr lang="en-US"/>
-          </a:p>
-          <a:p>
-            <a:pPr>
-              <a:spcAft>
-                <a:spcPts val="600"/>
-              </a:spcAft>
-              <a:buNone/>
-            </a:pPr>
-            <a:r>
-              <a:rPr lang="en-US" sz="1800">
-                <a:solidFill>
-                  <a:srgbClr val="1D4159"/>
-                </a:solidFill>
-                <a:latin typeface="Roboto Medium" panose="02000000000000000000" pitchFamily="2" charset="0"/>
-                <a:ea typeface="Roboto Medium" panose="02000000000000000000" pitchFamily="2" charset="0"/>
-              </a:rPr>
-              <a:t>Action Items</a:t>
-            </a:r>
-          </a:p>
-          <a:p>
-            <a:pPr marL="180000" indent="-180000">
-              <a:spcAft>
-                <a:spcPts val="300"/>
-              </a:spcAft>
-              <a:buClr>
-                <a:srgbClr val="F17042"/>
-              </a:buClr>
-              <a:buFont typeface="Arial" panose="020B0604020202020204" pitchFamily="34" charset="0"/>
-              <a:buChar char="•"/>
-            </a:pPr>
-            <a:r>
-              <a:rPr lang="en-US" sz="1600">
-                <a:solidFill>
-                  <a:srgbClr val="1D4159"/>
-                </a:solidFill>
-                <a:latin typeface="Roboto" panose="02000000000000000000" pitchFamily="2" charset="0"/>
-                <a:ea typeface="Roboto" panose="02000000000000000000" pitchFamily="2" charset="0"/>
-              </a:rPr>
-              <a:t>Test the transcription service (Owner: Andrey Kerchin)</a:t>
-            </a:r>
-          </a:p>
-          <a:p>
-            <a:pPr>
-              <a:spcAft>
-                <a:spcPts val="0"/>
-              </a:spcAft>
-            </a:pPr>
-            <a:endParaRPr lang="en-US"/>
-          </a:p>
-        </p:txBody>
-      </p:sp>
-    </p:spTree>
   </p:cSld>
   <p:clrMapOvr>
     <a:masterClrMapping/>

--- a/someproject/artifacts/kickoff-deck.pptx
+++ b/someproject/artifacts/kickoff-deck.pptx
@@ -19,6 +19,7 @@
     <p:sldId id="866" r:id="rId10"/>
     <p:sldId id="858" r:id="rId11"/>
     <p:sldId id="859" r:id="rId12"/>
+    <p:sldId id="901" r:id="rId39"/>
     <p:sldId id="554" r:id="rId13"/>
   </p:sldIdLst>
   <p:sldSz cx="12192000" cy="6858000"/>
@@ -9778,6 +9779,340 @@
         <p14:creationId xmlns:p14="http://schemas.microsoft.com/office/powerpoint/2010/main" val="247990684"/>
       </p:ext>
     </p:extLst>
+  </p:cSld>
+  <p:clrMapOvr>
+    <a:masterClrMapping/>
+  </p:clrMapOvr>
+</p:sld>
+</file>
+
+<file path=ppt/slides/slide10.xml><?xml version="1.0" encoding="utf-8"?>
+<p:sld xmlns:a="http://schemas.openxmlformats.org/drawingml/2006/main" xmlns:p="http://schemas.openxmlformats.org/presentationml/2006/main" xmlns:r="http://schemas.openxmlformats.org/officeDocument/2006/relationships">
+  <p:cSld>
+    <p:spTree>
+      <p:nvGrpSpPr>
+        <p:cNvPr id="1" name=""/>
+        <p:cNvGrpSpPr/>
+        <p:nvPr/>
+      </p:nvGrpSpPr>
+      <p:grpSpPr/>
+      <p:sp>
+        <p:nvSpPr>
+          <p:cNvPr id="2" name="Text Placeholder 1"/>
+          <p:cNvSpPr>
+            <a:spLocks noGrp="1"/>
+          </p:cNvSpPr>
+          <p:nvPr>
+            <p:ph type="body" idx="10" sz="quarter"/>
+          </p:nvPr>
+        </p:nvSpPr>
+        <p:spPr/>
+        <p:txBody>
+          <a:bodyPr/>
+          <a:lstStyle/>
+          <a:p>
+            <a:r>
+              <a:t>Transcription Service Testing</a:t>
+            </a:r>
+          </a:p>
+        </p:txBody>
+      </p:sp>
+      <p:sp>
+        <p:nvSpPr>
+          <p:cNvPr id="3" name="Text Placeholder 2"/>
+          <p:cNvSpPr>
+            <a:spLocks noGrp="1"/>
+          </p:cNvSpPr>
+          <p:nvPr>
+            <p:ph type="body" idx="11" sz="quarter"/>
+          </p:nvPr>
+        </p:nvSpPr>
+        <p:spPr/>
+        <p:txBody>
+          <a:bodyPr/>
+          <a:lstStyle/>
+          <a:p>
+            <a:r>
+              <a:t>PROJECT KICKOFF MEETING</a:t>
+            </a:r>
+          </a:p>
+        </p:txBody>
+      </p:sp>
+      <p:sp>
+        <p:nvSpPr>
+          <p:cNvPr id="4" name="Text Placeholder 3"/>
+          <p:cNvSpPr>
+            <a:spLocks noGrp="1"/>
+          </p:cNvSpPr>
+          <p:nvPr>
+            <p:ph type="body" idx="12" sz="quarter"/>
+          </p:nvPr>
+        </p:nvSpPr>
+        <p:spPr/>
+        <p:txBody>
+          <a:bodyPr/>
+          <a:lstStyle/>
+          <a:p>
+            <a:pPr>
+              <a:spcAft>
+                <a:spcPts val="600"/>
+              </a:spcAft>
+              <a:buNone/>
+            </a:pPr>
+            <a:r>
+              <a:rPr lang="en-US" sz="1800">
+                <a:solidFill>
+                  <a:srgbClr val="1D4159"/>
+                </a:solidFill>
+                <a:latin typeface="Roboto Medium" panose="02000000000000000000" pitchFamily="2" charset="0"/>
+                <a:ea typeface="Roboto Medium" panose="02000000000000000000" pitchFamily="2" charset="0"/>
+              </a:rPr>
+              <a:t>Meeting Objective</a:t>
+            </a:r>
+          </a:p>
+          <a:p>
+            <a:pPr marL="180000" indent="-180000">
+              <a:spcAft>
+                <a:spcPts val="300"/>
+              </a:spcAft>
+              <a:buClr>
+                <a:srgbClr val="F17042"/>
+              </a:buClr>
+              <a:buFont typeface="Arial" panose="020B0604020202020204" pitchFamily="34" charset="0"/>
+              <a:buChar char="•"/>
+            </a:pPr>
+            <a:r>
+              <a:rPr lang="en-US" sz="1600">
+                <a:solidFill>
+                  <a:srgbClr val="1D4159"/>
+                </a:solidFill>
+                <a:latin typeface="Roboto" panose="02000000000000000000" pitchFamily="2" charset="0"/>
+                <a:ea typeface="Roboto" panose="02000000000000000000" pitchFamily="2" charset="0"/>
+              </a:rPr>
+              <a:t>Test effectiveness of transcription service</a:t>
+            </a:r>
+          </a:p>
+          <a:p>
+            <a:pPr marL="180000" indent="-180000">
+              <a:spcAft>
+                <a:spcPts val="300"/>
+              </a:spcAft>
+              <a:buClr>
+                <a:srgbClr val="F17042"/>
+              </a:buClr>
+              <a:buFont typeface="Arial" panose="020B0604020202020204" pitchFamily="34" charset="0"/>
+              <a:buChar char="•"/>
+            </a:pPr>
+            <a:r>
+              <a:rPr lang="en-US" sz="1600">
+                <a:solidFill>
+                  <a:srgbClr val="1D4159"/>
+                </a:solidFill>
+                <a:latin typeface="Roboto" panose="02000000000000000000" pitchFamily="2" charset="0"/>
+                <a:ea typeface="Roboto" panose="02000000000000000000" pitchFamily="2" charset="0"/>
+              </a:rPr>
+              <a:t>Verify transcription results can be applied to project</a:t>
+            </a:r>
+          </a:p>
+          <a:p>
+            <a:pPr>
+              <a:spcAft>
+                <a:spcPts val="0"/>
+              </a:spcAft>
+            </a:pPr>
+            <a:endParaRPr lang="en-US"/>
+          </a:p>
+          <a:p>
+            <a:pPr>
+              <a:spcAft>
+                <a:spcPts val="600"/>
+              </a:spcAft>
+              <a:buNone/>
+            </a:pPr>
+            <a:r>
+              <a:rPr lang="en-US" sz="1800">
+                <a:solidFill>
+                  <a:srgbClr val="1D4159"/>
+                </a:solidFill>
+                <a:latin typeface="Roboto Medium" panose="02000000000000000000" pitchFamily="2" charset="0"/>
+                <a:ea typeface="Roboto Medium" panose="02000000000000000000" pitchFamily="2" charset="0"/>
+              </a:rPr>
+              <a:t>Participant</a:t>
+            </a:r>
+          </a:p>
+          <a:p>
+            <a:pPr marL="180000" indent="-180000">
+              <a:spcAft>
+                <a:spcPts val="300"/>
+              </a:spcAft>
+              <a:buClr>
+                <a:srgbClr val="F17042"/>
+              </a:buClr>
+              <a:buFont typeface="Arial" panose="020B0604020202020204" pitchFamily="34" charset="0"/>
+              <a:buChar char="•"/>
+            </a:pPr>
+            <a:r>
+              <a:rPr lang="en-US" sz="1600">
+                <a:solidFill>
+                  <a:srgbClr val="1D4159"/>
+                </a:solidFill>
+                <a:latin typeface="Roboto" panose="02000000000000000000" pitchFamily="2" charset="0"/>
+                <a:ea typeface="Roboto" panose="02000000000000000000" pitchFamily="2" charset="0"/>
+              </a:rPr>
+              <a:t>Andrey Kerchin</a:t>
+            </a:r>
+          </a:p>
+          <a:p>
+            <a:pPr>
+              <a:spcAft>
+                <a:spcPts val="0"/>
+              </a:spcAft>
+            </a:pPr>
+            <a:endParaRPr lang="en-US"/>
+          </a:p>
+          <a:p>
+            <a:pPr>
+              <a:spcAft>
+                <a:spcPts val="600"/>
+              </a:spcAft>
+              <a:buNone/>
+            </a:pPr>
+            <a:r>
+              <a:rPr lang="en-US" sz="1800">
+                <a:solidFill>
+                  <a:srgbClr val="1D4159"/>
+                </a:solidFill>
+                <a:latin typeface="Roboto Medium" panose="02000000000000000000" pitchFamily="2" charset="0"/>
+                <a:ea typeface="Roboto Medium" panose="02000000000000000000" pitchFamily="2" charset="0"/>
+              </a:rPr>
+              <a:t>Key Discussion</a:t>
+            </a:r>
+          </a:p>
+          <a:p>
+            <a:pPr marL="180000" indent="-180000">
+              <a:spcAft>
+                <a:spcPts val="300"/>
+              </a:spcAft>
+              <a:buClr>
+                <a:srgbClr val="F17042"/>
+              </a:buClr>
+              <a:buFont typeface="Arial" panose="020B0604020202020204" pitchFamily="34" charset="0"/>
+              <a:buChar char="•"/>
+            </a:pPr>
+            <a:r>
+              <a:rPr lang="en-US" sz="1600">
+                <a:solidFill>
+                  <a:srgbClr val="1D4159"/>
+                </a:solidFill>
+                <a:latin typeface="Roboto" panose="02000000000000000000" pitchFamily="2" charset="0"/>
+                <a:ea typeface="Roboto" panose="02000000000000000000" pitchFamily="2" charset="0"/>
+              </a:rPr>
+              <a:t>Practical test of transcription functionality</a:t>
+            </a:r>
+          </a:p>
+          <a:p>
+            <a:pPr marL="180000" indent="-180000">
+              <a:spcAft>
+                <a:spcPts val="300"/>
+              </a:spcAft>
+              <a:buClr>
+                <a:srgbClr val="F17042"/>
+              </a:buClr>
+              <a:buFont typeface="Arial" panose="020B0604020202020204" pitchFamily="34" charset="0"/>
+              <a:buChar char="•"/>
+            </a:pPr>
+            <a:r>
+              <a:rPr lang="en-US" sz="1600">
+                <a:solidFill>
+                  <a:srgbClr val="1D4159"/>
+                </a:solidFill>
+                <a:latin typeface="Roboto" panose="02000000000000000000" pitchFamily="2" charset="0"/>
+                <a:ea typeface="Roboto" panose="02000000000000000000" pitchFamily="2" charset="0"/>
+              </a:rPr>
+              <a:t>Project integration requirements</a:t>
+            </a:r>
+          </a:p>
+          <a:p>
+            <a:pPr>
+              <a:spcAft>
+                <a:spcPts val="0"/>
+              </a:spcAft>
+            </a:pPr>
+            <a:endParaRPr lang="en-US"/>
+          </a:p>
+          <a:p>
+            <a:pPr>
+              <a:spcAft>
+                <a:spcPts val="600"/>
+              </a:spcAft>
+              <a:buNone/>
+            </a:pPr>
+            <a:r>
+              <a:rPr lang="en-US" sz="1800">
+                <a:solidFill>
+                  <a:srgbClr val="1D4159"/>
+                </a:solidFill>
+                <a:latin typeface="Roboto Medium" panose="02000000000000000000" pitchFamily="2" charset="0"/>
+                <a:ea typeface="Roboto Medium" panose="02000000000000000000" pitchFamily="2" charset="0"/>
+              </a:rPr>
+              <a:t>Action Items</a:t>
+            </a:r>
+          </a:p>
+          <a:p>
+            <a:pPr marL="180000" indent="-180000">
+              <a:spcAft>
+                <a:spcPts val="300"/>
+              </a:spcAft>
+              <a:buClr>
+                <a:srgbClr val="F17042"/>
+              </a:buClr>
+              <a:buFont typeface="Arial" panose="020B0604020202020204" pitchFamily="34" charset="0"/>
+              <a:buChar char="•"/>
+            </a:pPr>
+            <a:r>
+              <a:rPr lang="en-US" sz="1600">
+                <a:solidFill>
+                  <a:srgbClr val="1D4159"/>
+                </a:solidFill>
+                <a:latin typeface="Roboto" panose="02000000000000000000" pitchFamily="2" charset="0"/>
+                <a:ea typeface="Roboto" panose="02000000000000000000" pitchFamily="2" charset="0"/>
+              </a:rPr>
+              <a:t>Assess accuracy and applicability of results</a:t>
+            </a:r>
+          </a:p>
+          <a:p>
+            <a:pPr marL="180000" indent="-180000">
+              <a:spcAft>
+                <a:spcPts val="300"/>
+              </a:spcAft>
+              <a:buClr>
+                <a:srgbClr val="F17042"/>
+              </a:buClr>
+              <a:buFont typeface="Arial" panose="020B0604020202020204" pitchFamily="34" charset="0"/>
+              <a:buChar char="•"/>
+            </a:pPr>
+            <a:r>
+              <a:rPr lang="en-US" sz="1600">
+                <a:solidFill>
+                  <a:srgbClr val="1D4159"/>
+                </a:solidFill>
+                <a:latin typeface="Roboto" panose="02000000000000000000" pitchFamily="2" charset="0"/>
+                <a:ea typeface="Roboto" panose="02000000000000000000" pitchFamily="2" charset="0"/>
+              </a:rPr>
+              <a:t>Further evaluation based on test outcomes</a:t>
+            </a:r>
+          </a:p>
+          <a:p>
+            <a:pPr>
+              <a:spcAft>
+                <a:spcPts val="0"/>
+              </a:spcAft>
+            </a:pPr>
+            <a:endParaRPr lang="en-US"/>
+          </a:p>
+        </p:txBody>
+      </p:sp>
+    </p:spTree>
   </p:cSld>
   <p:clrMapOvr>
     <a:masterClrMapping/>

--- a/someproject/artifacts/kickoff-deck.pptx
+++ b/someproject/artifacts/kickoff-deck.pptx
@@ -20,6 +20,7 @@
     <p:sldId id="858" r:id="rId11"/>
     <p:sldId id="859" r:id="rId12"/>
     <p:sldId id="901" r:id="rId39"/>
+    <p:sldId id="902" r:id="rId40"/>
     <p:sldId id="554" r:id="rId13"/>
   </p:sldIdLst>
   <p:sldSz cx="12192000" cy="6858000"/>
@@ -9787,6 +9788,108 @@
 </file>
 
 <file path=ppt/slides/slide10.xml><?xml version="1.0" encoding="utf-8"?>
+<p:sld xmlns:a="http://schemas.openxmlformats.org/drawingml/2006/main" xmlns:r="http://schemas.openxmlformats.org/officeDocument/2006/relationships" xmlns:p="http://schemas.openxmlformats.org/presentationml/2006/main">
+  <p:cSld>
+    <p:spTree>
+      <p:nvGrpSpPr>
+        <p:cNvPr id="1" name=""/>
+        <p:cNvGrpSpPr/>
+        <p:nvPr/>
+      </p:nvGrpSpPr>
+      <p:grpSpPr>
+        <a:xfrm>
+          <a:off x="0" y="0"/>
+          <a:ext cx="0" cy="0"/>
+          <a:chOff x="0" y="0"/>
+          <a:chExt cx="0" cy="0"/>
+        </a:xfrm>
+      </p:grpSpPr>
+      <p:sp>
+        <p:nvSpPr>
+          <p:cNvPr id="8" name="Text Placeholder 7">
+            <a:extLst>
+              <a:ext uri="{FF2B5EF4-FFF2-40B4-BE49-F238E27FC236}">
+                <a16:creationId xmlns:a16="http://schemas.microsoft.com/office/drawing/2014/main" id="{59578A67-2261-B465-0FF1-D79919431FBB}"/>
+              </a:ext>
+            </a:extLst>
+          </p:cNvPr>
+          <p:cNvSpPr>
+            <a:spLocks noGrp="1"/>
+          </p:cNvSpPr>
+          <p:nvPr>
+            <p:ph type="body" sz="quarter" idx="10"/>
+          </p:nvPr>
+        </p:nvSpPr>
+        <p:spPr>
+          <a:xfrm>
+            <a:off x="3619500" y="3864902"/>
+            <a:ext cx="4953000" cy="344827"/>
+          </a:xfrm>
+        </p:spPr>
+        <p:txBody>
+          <a:bodyPr>
+            <a:noAutofit/>
+          </a:bodyPr>
+          <a:lstStyle/>
+          <a:p>
+            <a:r>
+              <a:rPr lang="en-US" spc="10"/>
+              <a:t>Visit our site to learn more:</a:t>
+            </a:r>
+            <a:endParaRPr lang="en-ZA" spc="10"/>
+          </a:p>
+        </p:txBody>
+      </p:sp>
+      <p:sp>
+        <p:nvSpPr>
+          <p:cNvPr id="9" name="Text Placeholder 8">
+            <a:extLst>
+              <a:ext uri="{FF2B5EF4-FFF2-40B4-BE49-F238E27FC236}">
+                <a16:creationId xmlns:a16="http://schemas.microsoft.com/office/drawing/2014/main" id="{5B36AC1F-C159-ABC1-6BC9-3CAC77BF35BB}"/>
+              </a:ext>
+            </a:extLst>
+          </p:cNvPr>
+          <p:cNvSpPr>
+            <a:spLocks noGrp="1"/>
+          </p:cNvSpPr>
+          <p:nvPr>
+            <p:ph type="body" sz="quarter" idx="11"/>
+          </p:nvPr>
+        </p:nvSpPr>
+        <p:spPr>
+          <a:xfrm>
+            <a:off x="4441577" y="4747873"/>
+            <a:ext cx="3273674" cy="344827"/>
+          </a:xfrm>
+        </p:spPr>
+        <p:txBody>
+          <a:bodyPr>
+            <a:noAutofit/>
+          </a:bodyPr>
+          <a:lstStyle/>
+          <a:p>
+            <a:r>
+              <a:rPr lang="en-US" dirty="0"/>
+              <a:t>https://www.litware.com</a:t>
+            </a:r>
+            <a:endParaRPr lang="en-ZA" dirty="0"/>
+          </a:p>
+        </p:txBody>
+      </p:sp>
+    </p:spTree>
+    <p:extLst>
+      <p:ext uri="{BB962C8B-B14F-4D97-AF65-F5344CB8AC3E}">
+        <p14:creationId xmlns:p14="http://schemas.microsoft.com/office/powerpoint/2010/main" val="1559448605"/>
+      </p:ext>
+    </p:extLst>
+  </p:cSld>
+  <p:clrMapOvr>
+    <a:masterClrMapping/>
+  </p:clrMapOvr>
+</p:sld>
+</file>
+
+<file path=ppt/slides/slide11.xml><?xml version="1.0" encoding="utf-8"?>
 <p:sld xmlns:a="http://schemas.openxmlformats.org/drawingml/2006/main" xmlns:p="http://schemas.openxmlformats.org/presentationml/2006/main" xmlns:r="http://schemas.openxmlformats.org/officeDocument/2006/relationships">
   <p:cSld>
     <p:spTree>
@@ -9812,7 +9915,7 @@
           <a:lstStyle/>
           <a:p>
             <a:r>
-              <a:t>Transcription Service Testing</a:t>
+              <a:t>Meeting Summary</a:t>
             </a:r>
           </a:p>
         </p:txBody>
@@ -9833,7 +9936,7 @@
           <a:lstStyle/>
           <a:p>
             <a:r>
-              <a:t>PROJECT KICKOFF MEETING</a:t>
+              <a:t>Transcription Functionality Test</a:t>
             </a:r>
           </a:p>
         </p:txBody>
@@ -9867,7 +9970,7 @@
                 <a:latin typeface="Roboto Medium" panose="02000000000000000000" pitchFamily="2" charset="0"/>
                 <a:ea typeface="Roboto Medium" panose="02000000000000000000" pitchFamily="2" charset="0"/>
               </a:rPr>
-              <a:t>Meeting Objective</a:t>
+              <a:t>Meeting Overview</a:t>
             </a:r>
           </a:p>
           <a:p>
@@ -9889,7 +9992,7 @@
                 <a:latin typeface="Roboto" panose="02000000000000000000" pitchFamily="2" charset="0"/>
                 <a:ea typeface="Roboto" panose="02000000000000000000" pitchFamily="2" charset="0"/>
               </a:rPr>
-              <a:t>Test effectiveness of transcription service</a:t>
+              <a:t>Test meeting to verify transcription functionality</a:t>
             </a:r>
           </a:p>
           <a:p>
@@ -9911,7 +10014,7 @@
                 <a:latin typeface="Roboto" panose="02000000000000000000" pitchFamily="2" charset="0"/>
                 <a:ea typeface="Roboto" panose="02000000000000000000" pitchFamily="2" charset="0"/>
               </a:rPr>
-              <a:t>Verify transcription results can be applied to project</a:t>
+              <a:t>Participant: Andrey Kerchin</a:t>
             </a:r>
           </a:p>
           <a:p>
@@ -9937,7 +10040,7 @@
                 <a:latin typeface="Roboto Medium" panose="02000000000000000000" pitchFamily="2" charset="0"/>
                 <a:ea typeface="Roboto Medium" panose="02000000000000000000" pitchFamily="2" charset="0"/>
               </a:rPr>
-              <a:t>Participant</a:t>
+              <a:t>Key Objective</a:t>
             </a:r>
           </a:p>
           <a:p>
@@ -9959,7 +10062,7 @@
                 <a:latin typeface="Roboto" panose="02000000000000000000" pitchFamily="2" charset="0"/>
                 <a:ea typeface="Roboto" panose="02000000000000000000" pitchFamily="2" charset="0"/>
               </a:rPr>
-              <a:t>Andrey Kerchin</a:t>
+              <a:t>Validate transcription system performance</a:t>
             </a:r>
           </a:p>
           <a:p>
@@ -9985,7 +10088,7 @@
                 <a:latin typeface="Roboto Medium" panose="02000000000000000000" pitchFamily="2" charset="0"/>
                 <a:ea typeface="Roboto Medium" panose="02000000000000000000" pitchFamily="2" charset="0"/>
               </a:rPr>
-              <a:t>Key Discussion</a:t>
+              <a:t>Action Items</a:t>
             </a:r>
           </a:p>
           <a:p>
@@ -10007,7 +10110,7 @@
                 <a:latin typeface="Roboto" panose="02000000000000000000" pitchFamily="2" charset="0"/>
                 <a:ea typeface="Roboto" panose="02000000000000000000" pitchFamily="2" charset="0"/>
               </a:rPr>
-              <a:t>Practical test of transcription functionality</a:t>
+              <a:t>Apply transcription results to project</a:t>
             </a:r>
           </a:p>
           <a:p>
@@ -10029,77 +10132,7 @@
                 <a:latin typeface="Roboto" panose="02000000000000000000" pitchFamily="2" charset="0"/>
                 <a:ea typeface="Roboto" panose="02000000000000000000" pitchFamily="2" charset="0"/>
               </a:rPr>
-              <a:t>Project integration requirements</a:t>
-            </a:r>
-          </a:p>
-          <a:p>
-            <a:pPr>
-              <a:spcAft>
-                <a:spcPts val="0"/>
-              </a:spcAft>
-            </a:pPr>
-            <a:endParaRPr lang="en-US"/>
-          </a:p>
-          <a:p>
-            <a:pPr>
-              <a:spcAft>
-                <a:spcPts val="600"/>
-              </a:spcAft>
-              <a:buNone/>
-            </a:pPr>
-            <a:r>
-              <a:rPr lang="en-US" sz="1800">
-                <a:solidFill>
-                  <a:srgbClr val="1D4159"/>
-                </a:solidFill>
-                <a:latin typeface="Roboto Medium" panose="02000000000000000000" pitchFamily="2" charset="0"/>
-                <a:ea typeface="Roboto Medium" panose="02000000000000000000" pitchFamily="2" charset="0"/>
-              </a:rPr>
-              <a:t>Action Items</a:t>
-            </a:r>
-          </a:p>
-          <a:p>
-            <a:pPr marL="180000" indent="-180000">
-              <a:spcAft>
-                <a:spcPts val="300"/>
-              </a:spcAft>
-              <a:buClr>
-                <a:srgbClr val="F17042"/>
-              </a:buClr>
-              <a:buFont typeface="Arial" panose="020B0604020202020204" pitchFamily="34" charset="0"/>
-              <a:buChar char="•"/>
-            </a:pPr>
-            <a:r>
-              <a:rPr lang="en-US" sz="1600">
-                <a:solidFill>
-                  <a:srgbClr val="1D4159"/>
-                </a:solidFill>
-                <a:latin typeface="Roboto" panose="02000000000000000000" pitchFamily="2" charset="0"/>
-                <a:ea typeface="Roboto" panose="02000000000000000000" pitchFamily="2" charset="0"/>
-              </a:rPr>
-              <a:t>Assess accuracy and applicability of results</a:t>
-            </a:r>
-          </a:p>
-          <a:p>
-            <a:pPr marL="180000" indent="-180000">
-              <a:spcAft>
-                <a:spcPts val="300"/>
-              </a:spcAft>
-              <a:buClr>
-                <a:srgbClr val="F17042"/>
-              </a:buClr>
-              <a:buFont typeface="Arial" panose="020B0604020202020204" pitchFamily="34" charset="0"/>
-              <a:buChar char="•"/>
-            </a:pPr>
-            <a:r>
-              <a:rPr lang="en-US" sz="1600">
-                <a:solidFill>
-                  <a:srgbClr val="1D4159"/>
-                </a:solidFill>
-                <a:latin typeface="Roboto" panose="02000000000000000000" pitchFamily="2" charset="0"/>
-                <a:ea typeface="Roboto" panose="02000000000000000000" pitchFamily="2" charset="0"/>
-              </a:rPr>
-              <a:t>Further evaluation based on test outcomes</a:t>
+              <a:t>Continue testing and integration</a:t>
             </a:r>
           </a:p>
           <a:p>
@@ -14706,7 +14739,7 @@
 </file>
 
 <file path=ppt/slides/slide9.xml><?xml version="1.0" encoding="utf-8"?>
-<p:sld xmlns:a="http://schemas.openxmlformats.org/drawingml/2006/main" xmlns:r="http://schemas.openxmlformats.org/officeDocument/2006/relationships" xmlns:p="http://schemas.openxmlformats.org/presentationml/2006/main">
+<p:sld xmlns:a="http://schemas.openxmlformats.org/drawingml/2006/main" xmlns:p="http://schemas.openxmlformats.org/presentationml/2006/main" xmlns:r="http://schemas.openxmlformats.org/officeDocument/2006/relationships">
   <p:cSld>
     <p:spTree>
       <p:nvGrpSpPr>
@@ -14714,92 +14747,324 @@
         <p:cNvGrpSpPr/>
         <p:nvPr/>
       </p:nvGrpSpPr>
-      <p:grpSpPr>
-        <a:xfrm>
-          <a:off x="0" y="0"/>
-          <a:ext cx="0" cy="0"/>
-          <a:chOff x="0" y="0"/>
-          <a:chExt cx="0" cy="0"/>
-        </a:xfrm>
-      </p:grpSpPr>
+      <p:grpSpPr/>
       <p:sp>
         <p:nvSpPr>
-          <p:cNvPr id="8" name="Text Placeholder 7">
-            <a:extLst>
-              <a:ext uri="{FF2B5EF4-FFF2-40B4-BE49-F238E27FC236}">
-                <a16:creationId xmlns:a16="http://schemas.microsoft.com/office/drawing/2014/main" id="{59578A67-2261-B465-0FF1-D79919431FBB}"/>
-              </a:ext>
-            </a:extLst>
-          </p:cNvPr>
+          <p:cNvPr id="2" name="Text Placeholder 1"/>
           <p:cNvSpPr>
             <a:spLocks noGrp="1"/>
           </p:cNvSpPr>
           <p:nvPr>
-            <p:ph type="body" sz="quarter" idx="10"/>
+            <p:ph type="body" idx="10" sz="quarter"/>
           </p:nvPr>
         </p:nvSpPr>
-        <p:spPr>
-          <a:xfrm>
-            <a:off x="3619500" y="3864902"/>
-            <a:ext cx="4953000" cy="344827"/>
-          </a:xfrm>
-        </p:spPr>
+        <p:spPr/>
         <p:txBody>
-          <a:bodyPr>
-            <a:noAutofit/>
-          </a:bodyPr>
+          <a:bodyPr/>
           <a:lstStyle/>
           <a:p>
             <a:r>
-              <a:rPr lang="en-US" spc="10"/>
-              <a:t>Visit our site to learn more:</a:t>
-            </a:r>
-            <a:endParaRPr lang="en-ZA" spc="10"/>
+              <a:t>Transcription Service Testing</a:t>
+            </a:r>
           </a:p>
         </p:txBody>
       </p:sp>
       <p:sp>
         <p:nvSpPr>
-          <p:cNvPr id="9" name="Text Placeholder 8">
-            <a:extLst>
-              <a:ext uri="{FF2B5EF4-FFF2-40B4-BE49-F238E27FC236}">
-                <a16:creationId xmlns:a16="http://schemas.microsoft.com/office/drawing/2014/main" id="{5B36AC1F-C159-ABC1-6BC9-3CAC77BF35BB}"/>
-              </a:ext>
-            </a:extLst>
-          </p:cNvPr>
+          <p:cNvPr id="3" name="Text Placeholder 2"/>
           <p:cNvSpPr>
             <a:spLocks noGrp="1"/>
           </p:cNvSpPr>
           <p:nvPr>
-            <p:ph type="body" sz="quarter" idx="11"/>
+            <p:ph type="body" idx="11" sz="quarter"/>
           </p:nvPr>
         </p:nvSpPr>
-        <p:spPr>
-          <a:xfrm>
-            <a:off x="4441577" y="4747873"/>
-            <a:ext cx="3273674" cy="344827"/>
-          </a:xfrm>
-        </p:spPr>
+        <p:spPr/>
         <p:txBody>
-          <a:bodyPr>
-            <a:noAutofit/>
-          </a:bodyPr>
+          <a:bodyPr/>
           <a:lstStyle/>
           <a:p>
             <a:r>
-              <a:rPr lang="en-US" dirty="0"/>
-              <a:t>https://www.litware.com</a:t>
-            </a:r>
-            <a:endParaRPr lang="en-ZA" dirty="0"/>
+              <a:t>PROJECT KICKOFF MEETING</a:t>
+            </a:r>
+          </a:p>
+        </p:txBody>
+      </p:sp>
+      <p:sp>
+        <p:nvSpPr>
+          <p:cNvPr id="4" name="Text Placeholder 3"/>
+          <p:cNvSpPr>
+            <a:spLocks noGrp="1"/>
+          </p:cNvSpPr>
+          <p:nvPr>
+            <p:ph type="body" idx="12" sz="quarter"/>
+          </p:nvPr>
+        </p:nvSpPr>
+        <p:spPr/>
+        <p:txBody>
+          <a:bodyPr/>
+          <a:lstStyle/>
+          <a:p>
+            <a:pPr>
+              <a:spcAft>
+                <a:spcPts val="600"/>
+              </a:spcAft>
+              <a:buNone/>
+            </a:pPr>
+            <a:r>
+              <a:rPr lang="en-US" sz="1800">
+                <a:solidFill>
+                  <a:srgbClr val="1D4159"/>
+                </a:solidFill>
+                <a:latin typeface="Roboto Medium" panose="02000000000000000000" pitchFamily="2" charset="0"/>
+                <a:ea typeface="Roboto Medium" panose="02000000000000000000" pitchFamily="2" charset="0"/>
+              </a:rPr>
+              <a:t>Meeting Objective</a:t>
+            </a:r>
+          </a:p>
+          <a:p>
+            <a:pPr marL="180000" indent="-180000">
+              <a:spcAft>
+                <a:spcPts val="300"/>
+              </a:spcAft>
+              <a:buClr>
+                <a:srgbClr val="F17042"/>
+              </a:buClr>
+              <a:buFont typeface="Arial" panose="020B0604020202020204" pitchFamily="34" charset="0"/>
+              <a:buChar char="•"/>
+            </a:pPr>
+            <a:r>
+              <a:rPr lang="en-US" sz="1600">
+                <a:solidFill>
+                  <a:srgbClr val="1D4159"/>
+                </a:solidFill>
+                <a:latin typeface="Roboto" panose="02000000000000000000" pitchFamily="2" charset="0"/>
+                <a:ea typeface="Roboto" panose="02000000000000000000" pitchFamily="2" charset="0"/>
+              </a:rPr>
+              <a:t>Test effectiveness of transcription service</a:t>
+            </a:r>
+          </a:p>
+          <a:p>
+            <a:pPr marL="180000" indent="-180000">
+              <a:spcAft>
+                <a:spcPts val="300"/>
+              </a:spcAft>
+              <a:buClr>
+                <a:srgbClr val="F17042"/>
+              </a:buClr>
+              <a:buFont typeface="Arial" panose="020B0604020202020204" pitchFamily="34" charset="0"/>
+              <a:buChar char="•"/>
+            </a:pPr>
+            <a:r>
+              <a:rPr lang="en-US" sz="1600">
+                <a:solidFill>
+                  <a:srgbClr val="1D4159"/>
+                </a:solidFill>
+                <a:latin typeface="Roboto" panose="02000000000000000000" pitchFamily="2" charset="0"/>
+                <a:ea typeface="Roboto" panose="02000000000000000000" pitchFamily="2" charset="0"/>
+              </a:rPr>
+              <a:t>Verify transcription results can be applied to project</a:t>
+            </a:r>
+          </a:p>
+          <a:p>
+            <a:pPr>
+              <a:spcAft>
+                <a:spcPts val="0"/>
+              </a:spcAft>
+            </a:pPr>
+            <a:endParaRPr lang="en-US"/>
+          </a:p>
+          <a:p>
+            <a:pPr>
+              <a:spcAft>
+                <a:spcPts val="600"/>
+              </a:spcAft>
+              <a:buNone/>
+            </a:pPr>
+            <a:r>
+              <a:rPr lang="en-US" sz="1800">
+                <a:solidFill>
+                  <a:srgbClr val="1D4159"/>
+                </a:solidFill>
+                <a:latin typeface="Roboto Medium" panose="02000000000000000000" pitchFamily="2" charset="0"/>
+                <a:ea typeface="Roboto Medium" panose="02000000000000000000" pitchFamily="2" charset="0"/>
+              </a:rPr>
+              <a:t>Participant</a:t>
+            </a:r>
+          </a:p>
+          <a:p>
+            <a:pPr marL="180000" indent="-180000">
+              <a:spcAft>
+                <a:spcPts val="300"/>
+              </a:spcAft>
+              <a:buClr>
+                <a:srgbClr val="F17042"/>
+              </a:buClr>
+              <a:buFont typeface="Arial" panose="020B0604020202020204" pitchFamily="34" charset="0"/>
+              <a:buChar char="•"/>
+            </a:pPr>
+            <a:r>
+              <a:rPr lang="en-US" sz="1600">
+                <a:solidFill>
+                  <a:srgbClr val="1D4159"/>
+                </a:solidFill>
+                <a:latin typeface="Roboto" panose="02000000000000000000" pitchFamily="2" charset="0"/>
+                <a:ea typeface="Roboto" panose="02000000000000000000" pitchFamily="2" charset="0"/>
+              </a:rPr>
+              <a:t>Andrey Kerchin</a:t>
+            </a:r>
+          </a:p>
+          <a:p>
+            <a:pPr>
+              <a:spcAft>
+                <a:spcPts val="0"/>
+              </a:spcAft>
+            </a:pPr>
+            <a:endParaRPr lang="en-US"/>
+          </a:p>
+          <a:p>
+            <a:pPr>
+              <a:spcAft>
+                <a:spcPts val="600"/>
+              </a:spcAft>
+              <a:buNone/>
+            </a:pPr>
+            <a:r>
+              <a:rPr lang="en-US" sz="1800">
+                <a:solidFill>
+                  <a:srgbClr val="1D4159"/>
+                </a:solidFill>
+                <a:latin typeface="Roboto Medium" panose="02000000000000000000" pitchFamily="2" charset="0"/>
+                <a:ea typeface="Roboto Medium" panose="02000000000000000000" pitchFamily="2" charset="0"/>
+              </a:rPr>
+              <a:t>Key Discussion</a:t>
+            </a:r>
+          </a:p>
+          <a:p>
+            <a:pPr marL="180000" indent="-180000">
+              <a:spcAft>
+                <a:spcPts val="300"/>
+              </a:spcAft>
+              <a:buClr>
+                <a:srgbClr val="F17042"/>
+              </a:buClr>
+              <a:buFont typeface="Arial" panose="020B0604020202020204" pitchFamily="34" charset="0"/>
+              <a:buChar char="•"/>
+            </a:pPr>
+            <a:r>
+              <a:rPr lang="en-US" sz="1600">
+                <a:solidFill>
+                  <a:srgbClr val="1D4159"/>
+                </a:solidFill>
+                <a:latin typeface="Roboto" panose="02000000000000000000" pitchFamily="2" charset="0"/>
+                <a:ea typeface="Roboto" panose="02000000000000000000" pitchFamily="2" charset="0"/>
+              </a:rPr>
+              <a:t>Practical test of transcription functionality</a:t>
+            </a:r>
+          </a:p>
+          <a:p>
+            <a:pPr marL="180000" indent="-180000">
+              <a:spcAft>
+                <a:spcPts val="300"/>
+              </a:spcAft>
+              <a:buClr>
+                <a:srgbClr val="F17042"/>
+              </a:buClr>
+              <a:buFont typeface="Arial" panose="020B0604020202020204" pitchFamily="34" charset="0"/>
+              <a:buChar char="•"/>
+            </a:pPr>
+            <a:r>
+              <a:rPr lang="en-US" sz="1600">
+                <a:solidFill>
+                  <a:srgbClr val="1D4159"/>
+                </a:solidFill>
+                <a:latin typeface="Roboto" panose="02000000000000000000" pitchFamily="2" charset="0"/>
+                <a:ea typeface="Roboto" panose="02000000000000000000" pitchFamily="2" charset="0"/>
+              </a:rPr>
+              <a:t>Project integration requirements</a:t>
+            </a:r>
+          </a:p>
+          <a:p>
+            <a:pPr>
+              <a:spcAft>
+                <a:spcPts val="0"/>
+              </a:spcAft>
+            </a:pPr>
+            <a:endParaRPr lang="en-US"/>
+          </a:p>
+          <a:p>
+            <a:pPr>
+              <a:spcAft>
+                <a:spcPts val="600"/>
+              </a:spcAft>
+              <a:buNone/>
+            </a:pPr>
+            <a:r>
+              <a:rPr lang="en-US" sz="1800">
+                <a:solidFill>
+                  <a:srgbClr val="1D4159"/>
+                </a:solidFill>
+                <a:latin typeface="Roboto Medium" panose="02000000000000000000" pitchFamily="2" charset="0"/>
+                <a:ea typeface="Roboto Medium" panose="02000000000000000000" pitchFamily="2" charset="0"/>
+              </a:rPr>
+              <a:t>Action Items</a:t>
+            </a:r>
+          </a:p>
+          <a:p>
+            <a:pPr marL="180000" indent="-180000">
+              <a:spcAft>
+                <a:spcPts val="300"/>
+              </a:spcAft>
+              <a:buClr>
+                <a:srgbClr val="F17042"/>
+              </a:buClr>
+              <a:buFont typeface="Arial" panose="020B0604020202020204" pitchFamily="34" charset="0"/>
+              <a:buChar char="•"/>
+            </a:pPr>
+            <a:r>
+              <a:rPr lang="en-US" sz="1600">
+                <a:solidFill>
+                  <a:srgbClr val="1D4159"/>
+                </a:solidFill>
+                <a:latin typeface="Roboto" panose="02000000000000000000" pitchFamily="2" charset="0"/>
+                <a:ea typeface="Roboto" panose="02000000000000000000" pitchFamily="2" charset="0"/>
+              </a:rPr>
+              <a:t>Assess accuracy and applicability of results</a:t>
+            </a:r>
+          </a:p>
+          <a:p>
+            <a:pPr marL="180000" indent="-180000">
+              <a:spcAft>
+                <a:spcPts val="300"/>
+              </a:spcAft>
+              <a:buClr>
+                <a:srgbClr val="F17042"/>
+              </a:buClr>
+              <a:buFont typeface="Arial" panose="020B0604020202020204" pitchFamily="34" charset="0"/>
+              <a:buChar char="•"/>
+            </a:pPr>
+            <a:r>
+              <a:rPr lang="en-US" sz="1600">
+                <a:solidFill>
+                  <a:srgbClr val="1D4159"/>
+                </a:solidFill>
+                <a:latin typeface="Roboto" panose="02000000000000000000" pitchFamily="2" charset="0"/>
+                <a:ea typeface="Roboto" panose="02000000000000000000" pitchFamily="2" charset="0"/>
+              </a:rPr>
+              <a:t>Further evaluation based on test outcomes</a:t>
+            </a:r>
+          </a:p>
+          <a:p>
+            <a:pPr>
+              <a:spcAft>
+                <a:spcPts val="0"/>
+              </a:spcAft>
+            </a:pPr>
+            <a:endParaRPr lang="en-US"/>
           </a:p>
         </p:txBody>
       </p:sp>
     </p:spTree>
-    <p:extLst>
-      <p:ext uri="{BB962C8B-B14F-4D97-AF65-F5344CB8AC3E}">
-        <p14:creationId xmlns:p14="http://schemas.microsoft.com/office/powerpoint/2010/main" val="1559448605"/>
-      </p:ext>
-    </p:extLst>
   </p:cSld>
   <p:clrMapOvr>
     <a:masterClrMapping/>

--- a/someproject/artifacts/kickoff-deck.pptx
+++ b/someproject/artifacts/kickoff-deck.pptx
@@ -19,8 +19,6 @@
     <p:sldId id="866" r:id="rId10"/>
     <p:sldId id="858" r:id="rId11"/>
     <p:sldId id="859" r:id="rId12"/>
-    <p:sldId id="901" r:id="rId39"/>
-    <p:sldId id="902" r:id="rId40"/>
     <p:sldId id="554" r:id="rId13"/>
   </p:sldIdLst>
   <p:sldSz cx="12192000" cy="6858000"/>
@@ -9787,372 +9785,6 @@
 </p:sld>
 </file>
 
-<file path=ppt/slides/slide10.xml><?xml version="1.0" encoding="utf-8"?>
-<p:sld xmlns:a="http://schemas.openxmlformats.org/drawingml/2006/main" xmlns:r="http://schemas.openxmlformats.org/officeDocument/2006/relationships" xmlns:p="http://schemas.openxmlformats.org/presentationml/2006/main">
-  <p:cSld>
-    <p:spTree>
-      <p:nvGrpSpPr>
-        <p:cNvPr id="1" name=""/>
-        <p:cNvGrpSpPr/>
-        <p:nvPr/>
-      </p:nvGrpSpPr>
-      <p:grpSpPr>
-        <a:xfrm>
-          <a:off x="0" y="0"/>
-          <a:ext cx="0" cy="0"/>
-          <a:chOff x="0" y="0"/>
-          <a:chExt cx="0" cy="0"/>
-        </a:xfrm>
-      </p:grpSpPr>
-      <p:sp>
-        <p:nvSpPr>
-          <p:cNvPr id="8" name="Text Placeholder 7">
-            <a:extLst>
-              <a:ext uri="{FF2B5EF4-FFF2-40B4-BE49-F238E27FC236}">
-                <a16:creationId xmlns:a16="http://schemas.microsoft.com/office/drawing/2014/main" id="{59578A67-2261-B465-0FF1-D79919431FBB}"/>
-              </a:ext>
-            </a:extLst>
-          </p:cNvPr>
-          <p:cNvSpPr>
-            <a:spLocks noGrp="1"/>
-          </p:cNvSpPr>
-          <p:nvPr>
-            <p:ph type="body" sz="quarter" idx="10"/>
-          </p:nvPr>
-        </p:nvSpPr>
-        <p:spPr>
-          <a:xfrm>
-            <a:off x="3619500" y="3864902"/>
-            <a:ext cx="4953000" cy="344827"/>
-          </a:xfrm>
-        </p:spPr>
-        <p:txBody>
-          <a:bodyPr>
-            <a:noAutofit/>
-          </a:bodyPr>
-          <a:lstStyle/>
-          <a:p>
-            <a:r>
-              <a:rPr lang="en-US" spc="10"/>
-              <a:t>Visit our site to learn more:</a:t>
-            </a:r>
-            <a:endParaRPr lang="en-ZA" spc="10"/>
-          </a:p>
-        </p:txBody>
-      </p:sp>
-      <p:sp>
-        <p:nvSpPr>
-          <p:cNvPr id="9" name="Text Placeholder 8">
-            <a:extLst>
-              <a:ext uri="{FF2B5EF4-FFF2-40B4-BE49-F238E27FC236}">
-                <a16:creationId xmlns:a16="http://schemas.microsoft.com/office/drawing/2014/main" id="{5B36AC1F-C159-ABC1-6BC9-3CAC77BF35BB}"/>
-              </a:ext>
-            </a:extLst>
-          </p:cNvPr>
-          <p:cNvSpPr>
-            <a:spLocks noGrp="1"/>
-          </p:cNvSpPr>
-          <p:nvPr>
-            <p:ph type="body" sz="quarter" idx="11"/>
-          </p:nvPr>
-        </p:nvSpPr>
-        <p:spPr>
-          <a:xfrm>
-            <a:off x="4441577" y="4747873"/>
-            <a:ext cx="3273674" cy="344827"/>
-          </a:xfrm>
-        </p:spPr>
-        <p:txBody>
-          <a:bodyPr>
-            <a:noAutofit/>
-          </a:bodyPr>
-          <a:lstStyle/>
-          <a:p>
-            <a:r>
-              <a:rPr lang="en-US" dirty="0"/>
-              <a:t>https://www.litware.com</a:t>
-            </a:r>
-            <a:endParaRPr lang="en-ZA" dirty="0"/>
-          </a:p>
-        </p:txBody>
-      </p:sp>
-    </p:spTree>
-    <p:extLst>
-      <p:ext uri="{BB962C8B-B14F-4D97-AF65-F5344CB8AC3E}">
-        <p14:creationId xmlns:p14="http://schemas.microsoft.com/office/powerpoint/2010/main" val="1559448605"/>
-      </p:ext>
-    </p:extLst>
-  </p:cSld>
-  <p:clrMapOvr>
-    <a:masterClrMapping/>
-  </p:clrMapOvr>
-</p:sld>
-</file>
-
-<file path=ppt/slides/slide11.xml><?xml version="1.0" encoding="utf-8"?>
-<p:sld xmlns:a="http://schemas.openxmlformats.org/drawingml/2006/main" xmlns:p="http://schemas.openxmlformats.org/presentationml/2006/main" xmlns:r="http://schemas.openxmlformats.org/officeDocument/2006/relationships">
-  <p:cSld>
-    <p:spTree>
-      <p:nvGrpSpPr>
-        <p:cNvPr id="1" name=""/>
-        <p:cNvGrpSpPr/>
-        <p:nvPr/>
-      </p:nvGrpSpPr>
-      <p:grpSpPr/>
-      <p:sp>
-        <p:nvSpPr>
-          <p:cNvPr id="2" name="Text Placeholder 1"/>
-          <p:cNvSpPr>
-            <a:spLocks noGrp="1"/>
-          </p:cNvSpPr>
-          <p:nvPr>
-            <p:ph type="body" idx="10" sz="quarter"/>
-          </p:nvPr>
-        </p:nvSpPr>
-        <p:spPr/>
-        <p:txBody>
-          <a:bodyPr/>
-          <a:lstStyle/>
-          <a:p>
-            <a:r>
-              <a:t>Meeting Summary</a:t>
-            </a:r>
-          </a:p>
-        </p:txBody>
-      </p:sp>
-      <p:sp>
-        <p:nvSpPr>
-          <p:cNvPr id="3" name="Text Placeholder 2"/>
-          <p:cNvSpPr>
-            <a:spLocks noGrp="1"/>
-          </p:cNvSpPr>
-          <p:nvPr>
-            <p:ph type="body" idx="11" sz="quarter"/>
-          </p:nvPr>
-        </p:nvSpPr>
-        <p:spPr/>
-        <p:txBody>
-          <a:bodyPr/>
-          <a:lstStyle/>
-          <a:p>
-            <a:r>
-              <a:t>Transcription Functionality Test</a:t>
-            </a:r>
-          </a:p>
-        </p:txBody>
-      </p:sp>
-      <p:sp>
-        <p:nvSpPr>
-          <p:cNvPr id="4" name="Text Placeholder 3"/>
-          <p:cNvSpPr>
-            <a:spLocks noGrp="1"/>
-          </p:cNvSpPr>
-          <p:nvPr>
-            <p:ph type="body" idx="12" sz="quarter"/>
-          </p:nvPr>
-        </p:nvSpPr>
-        <p:spPr/>
-        <p:txBody>
-          <a:bodyPr/>
-          <a:lstStyle/>
-          <a:p>
-            <a:pPr>
-              <a:spcAft>
-                <a:spcPts val="600"/>
-              </a:spcAft>
-              <a:buNone/>
-            </a:pPr>
-            <a:r>
-              <a:rPr lang="en-US" sz="1800">
-                <a:solidFill>
-                  <a:srgbClr val="1D4159"/>
-                </a:solidFill>
-                <a:latin typeface="Roboto Medium" panose="02000000000000000000" pitchFamily="2" charset="0"/>
-                <a:ea typeface="Roboto Medium" panose="02000000000000000000" pitchFamily="2" charset="0"/>
-              </a:rPr>
-              <a:t>Meeting Overview</a:t>
-            </a:r>
-          </a:p>
-          <a:p>
-            <a:pPr marL="180000" indent="-180000">
-              <a:spcAft>
-                <a:spcPts val="300"/>
-              </a:spcAft>
-              <a:buClr>
-                <a:srgbClr val="F17042"/>
-              </a:buClr>
-              <a:buFont typeface="Arial" panose="020B0604020202020204" pitchFamily="34" charset="0"/>
-              <a:buChar char="•"/>
-            </a:pPr>
-            <a:r>
-              <a:rPr lang="en-US" sz="1600">
-                <a:solidFill>
-                  <a:srgbClr val="1D4159"/>
-                </a:solidFill>
-                <a:latin typeface="Roboto" panose="02000000000000000000" pitchFamily="2" charset="0"/>
-                <a:ea typeface="Roboto" panose="02000000000000000000" pitchFamily="2" charset="0"/>
-              </a:rPr>
-              <a:t>Test meeting to verify transcription functionality</a:t>
-            </a:r>
-          </a:p>
-          <a:p>
-            <a:pPr marL="180000" indent="-180000">
-              <a:spcAft>
-                <a:spcPts val="300"/>
-              </a:spcAft>
-              <a:buClr>
-                <a:srgbClr val="F17042"/>
-              </a:buClr>
-              <a:buFont typeface="Arial" panose="020B0604020202020204" pitchFamily="34" charset="0"/>
-              <a:buChar char="•"/>
-            </a:pPr>
-            <a:r>
-              <a:rPr lang="en-US" sz="1600">
-                <a:solidFill>
-                  <a:srgbClr val="1D4159"/>
-                </a:solidFill>
-                <a:latin typeface="Roboto" panose="02000000000000000000" pitchFamily="2" charset="0"/>
-                <a:ea typeface="Roboto" panose="02000000000000000000" pitchFamily="2" charset="0"/>
-              </a:rPr>
-              <a:t>Participant: Andrey Kerchin</a:t>
-            </a:r>
-          </a:p>
-          <a:p>
-            <a:pPr>
-              <a:spcAft>
-                <a:spcPts val="0"/>
-              </a:spcAft>
-            </a:pPr>
-            <a:endParaRPr lang="en-US"/>
-          </a:p>
-          <a:p>
-            <a:pPr>
-              <a:spcAft>
-                <a:spcPts val="600"/>
-              </a:spcAft>
-              <a:buNone/>
-            </a:pPr>
-            <a:r>
-              <a:rPr lang="en-US" sz="1800">
-                <a:solidFill>
-                  <a:srgbClr val="1D4159"/>
-                </a:solidFill>
-                <a:latin typeface="Roboto Medium" panose="02000000000000000000" pitchFamily="2" charset="0"/>
-                <a:ea typeface="Roboto Medium" panose="02000000000000000000" pitchFamily="2" charset="0"/>
-              </a:rPr>
-              <a:t>Key Objective</a:t>
-            </a:r>
-          </a:p>
-          <a:p>
-            <a:pPr marL="180000" indent="-180000">
-              <a:spcAft>
-                <a:spcPts val="300"/>
-              </a:spcAft>
-              <a:buClr>
-                <a:srgbClr val="F17042"/>
-              </a:buClr>
-              <a:buFont typeface="Arial" panose="020B0604020202020204" pitchFamily="34" charset="0"/>
-              <a:buChar char="•"/>
-            </a:pPr>
-            <a:r>
-              <a:rPr lang="en-US" sz="1600">
-                <a:solidFill>
-                  <a:srgbClr val="1D4159"/>
-                </a:solidFill>
-                <a:latin typeface="Roboto" panose="02000000000000000000" pitchFamily="2" charset="0"/>
-                <a:ea typeface="Roboto" panose="02000000000000000000" pitchFamily="2" charset="0"/>
-              </a:rPr>
-              <a:t>Validate transcription system performance</a:t>
-            </a:r>
-          </a:p>
-          <a:p>
-            <a:pPr>
-              <a:spcAft>
-                <a:spcPts val="0"/>
-              </a:spcAft>
-            </a:pPr>
-            <a:endParaRPr lang="en-US"/>
-          </a:p>
-          <a:p>
-            <a:pPr>
-              <a:spcAft>
-                <a:spcPts val="600"/>
-              </a:spcAft>
-              <a:buNone/>
-            </a:pPr>
-            <a:r>
-              <a:rPr lang="en-US" sz="1800">
-                <a:solidFill>
-                  <a:srgbClr val="1D4159"/>
-                </a:solidFill>
-                <a:latin typeface="Roboto Medium" panose="02000000000000000000" pitchFamily="2" charset="0"/>
-                <a:ea typeface="Roboto Medium" panose="02000000000000000000" pitchFamily="2" charset="0"/>
-              </a:rPr>
-              <a:t>Action Items</a:t>
-            </a:r>
-          </a:p>
-          <a:p>
-            <a:pPr marL="180000" indent="-180000">
-              <a:spcAft>
-                <a:spcPts val="300"/>
-              </a:spcAft>
-              <a:buClr>
-                <a:srgbClr val="F17042"/>
-              </a:buClr>
-              <a:buFont typeface="Arial" panose="020B0604020202020204" pitchFamily="34" charset="0"/>
-              <a:buChar char="•"/>
-            </a:pPr>
-            <a:r>
-              <a:rPr lang="en-US" sz="1600">
-                <a:solidFill>
-                  <a:srgbClr val="1D4159"/>
-                </a:solidFill>
-                <a:latin typeface="Roboto" panose="02000000000000000000" pitchFamily="2" charset="0"/>
-                <a:ea typeface="Roboto" panose="02000000000000000000" pitchFamily="2" charset="0"/>
-              </a:rPr>
-              <a:t>Apply transcription results to project</a:t>
-            </a:r>
-          </a:p>
-          <a:p>
-            <a:pPr marL="180000" indent="-180000">
-              <a:spcAft>
-                <a:spcPts val="300"/>
-              </a:spcAft>
-              <a:buClr>
-                <a:srgbClr val="F17042"/>
-              </a:buClr>
-              <a:buFont typeface="Arial" panose="020B0604020202020204" pitchFamily="34" charset="0"/>
-              <a:buChar char="•"/>
-            </a:pPr>
-            <a:r>
-              <a:rPr lang="en-US" sz="1600">
-                <a:solidFill>
-                  <a:srgbClr val="1D4159"/>
-                </a:solidFill>
-                <a:latin typeface="Roboto" panose="02000000000000000000" pitchFamily="2" charset="0"/>
-                <a:ea typeface="Roboto" panose="02000000000000000000" pitchFamily="2" charset="0"/>
-              </a:rPr>
-              <a:t>Continue testing and integration</a:t>
-            </a:r>
-          </a:p>
-          <a:p>
-            <a:pPr>
-              <a:spcAft>
-                <a:spcPts val="0"/>
-              </a:spcAft>
-            </a:pPr>
-            <a:endParaRPr lang="en-US"/>
-          </a:p>
-        </p:txBody>
-      </p:sp>
-    </p:spTree>
-  </p:cSld>
-  <p:clrMapOvr>
-    <a:masterClrMapping/>
-  </p:clrMapOvr>
-</p:sld>
-</file>
-
 <file path=ppt/slides/slide2.xml><?xml version="1.0" encoding="utf-8"?>
 <p:sld xmlns:a="http://schemas.openxmlformats.org/drawingml/2006/main" xmlns:r="http://schemas.openxmlformats.org/officeDocument/2006/relationships" xmlns:p="http://schemas.openxmlformats.org/presentationml/2006/main">
   <p:cSld>
@@ -14739,7 +14371,7 @@
 </file>
 
 <file path=ppt/slides/slide9.xml><?xml version="1.0" encoding="utf-8"?>
-<p:sld xmlns:a="http://schemas.openxmlformats.org/drawingml/2006/main" xmlns:p="http://schemas.openxmlformats.org/presentationml/2006/main" xmlns:r="http://schemas.openxmlformats.org/officeDocument/2006/relationships">
+<p:sld xmlns:a="http://schemas.openxmlformats.org/drawingml/2006/main" xmlns:r="http://schemas.openxmlformats.org/officeDocument/2006/relationships" xmlns:p="http://schemas.openxmlformats.org/presentationml/2006/main">
   <p:cSld>
     <p:spTree>
       <p:nvGrpSpPr>
@@ -14747,324 +14379,92 @@
         <p:cNvGrpSpPr/>
         <p:nvPr/>
       </p:nvGrpSpPr>
-      <p:grpSpPr/>
+      <p:grpSpPr>
+        <a:xfrm>
+          <a:off x="0" y="0"/>
+          <a:ext cx="0" cy="0"/>
+          <a:chOff x="0" y="0"/>
+          <a:chExt cx="0" cy="0"/>
+        </a:xfrm>
+      </p:grpSpPr>
       <p:sp>
         <p:nvSpPr>
-          <p:cNvPr id="2" name="Text Placeholder 1"/>
+          <p:cNvPr id="8" name="Text Placeholder 7">
+            <a:extLst>
+              <a:ext uri="{FF2B5EF4-FFF2-40B4-BE49-F238E27FC236}">
+                <a16:creationId xmlns:a16="http://schemas.microsoft.com/office/drawing/2014/main" id="{59578A67-2261-B465-0FF1-D79919431FBB}"/>
+              </a:ext>
+            </a:extLst>
+          </p:cNvPr>
           <p:cNvSpPr>
             <a:spLocks noGrp="1"/>
           </p:cNvSpPr>
           <p:nvPr>
-            <p:ph type="body" idx="10" sz="quarter"/>
+            <p:ph type="body" sz="quarter" idx="10"/>
           </p:nvPr>
         </p:nvSpPr>
-        <p:spPr/>
+        <p:spPr>
+          <a:xfrm>
+            <a:off x="3619500" y="3864902"/>
+            <a:ext cx="4953000" cy="344827"/>
+          </a:xfrm>
+        </p:spPr>
         <p:txBody>
-          <a:bodyPr/>
+          <a:bodyPr>
+            <a:noAutofit/>
+          </a:bodyPr>
           <a:lstStyle/>
           <a:p>
             <a:r>
-              <a:t>Transcription Service Testing</a:t>
-            </a:r>
+              <a:rPr lang="en-US" spc="10"/>
+              <a:t>Visit our site to learn more:</a:t>
+            </a:r>
+            <a:endParaRPr lang="en-ZA" spc="10"/>
           </a:p>
         </p:txBody>
       </p:sp>
       <p:sp>
         <p:nvSpPr>
-          <p:cNvPr id="3" name="Text Placeholder 2"/>
+          <p:cNvPr id="9" name="Text Placeholder 8">
+            <a:extLst>
+              <a:ext uri="{FF2B5EF4-FFF2-40B4-BE49-F238E27FC236}">
+                <a16:creationId xmlns:a16="http://schemas.microsoft.com/office/drawing/2014/main" id="{5B36AC1F-C159-ABC1-6BC9-3CAC77BF35BB}"/>
+              </a:ext>
+            </a:extLst>
+          </p:cNvPr>
           <p:cNvSpPr>
             <a:spLocks noGrp="1"/>
           </p:cNvSpPr>
           <p:nvPr>
-            <p:ph type="body" idx="11" sz="quarter"/>
+            <p:ph type="body" sz="quarter" idx="11"/>
           </p:nvPr>
         </p:nvSpPr>
-        <p:spPr/>
+        <p:spPr>
+          <a:xfrm>
+            <a:off x="4441577" y="4747873"/>
+            <a:ext cx="3273674" cy="344827"/>
+          </a:xfrm>
+        </p:spPr>
         <p:txBody>
-          <a:bodyPr/>
+          <a:bodyPr>
+            <a:noAutofit/>
+          </a:bodyPr>
           <a:lstStyle/>
           <a:p>
             <a:r>
-              <a:t>PROJECT KICKOFF MEETING</a:t>
-            </a:r>
-          </a:p>
-        </p:txBody>
-      </p:sp>
-      <p:sp>
-        <p:nvSpPr>
-          <p:cNvPr id="4" name="Text Placeholder 3"/>
-          <p:cNvSpPr>
-            <a:spLocks noGrp="1"/>
-          </p:cNvSpPr>
-          <p:nvPr>
-            <p:ph type="body" idx="12" sz="quarter"/>
-          </p:nvPr>
-        </p:nvSpPr>
-        <p:spPr/>
-        <p:txBody>
-          <a:bodyPr/>
-          <a:lstStyle/>
-          <a:p>
-            <a:pPr>
-              <a:spcAft>
-                <a:spcPts val="600"/>
-              </a:spcAft>
-              <a:buNone/>
-            </a:pPr>
-            <a:r>
-              <a:rPr lang="en-US" sz="1800">
-                <a:solidFill>
-                  <a:srgbClr val="1D4159"/>
-                </a:solidFill>
-                <a:latin typeface="Roboto Medium" panose="02000000000000000000" pitchFamily="2" charset="0"/>
-                <a:ea typeface="Roboto Medium" panose="02000000000000000000" pitchFamily="2" charset="0"/>
-              </a:rPr>
-              <a:t>Meeting Objective</a:t>
-            </a:r>
-          </a:p>
-          <a:p>
-            <a:pPr marL="180000" indent="-180000">
-              <a:spcAft>
-                <a:spcPts val="300"/>
-              </a:spcAft>
-              <a:buClr>
-                <a:srgbClr val="F17042"/>
-              </a:buClr>
-              <a:buFont typeface="Arial" panose="020B0604020202020204" pitchFamily="34" charset="0"/>
-              <a:buChar char="•"/>
-            </a:pPr>
-            <a:r>
-              <a:rPr lang="en-US" sz="1600">
-                <a:solidFill>
-                  <a:srgbClr val="1D4159"/>
-                </a:solidFill>
-                <a:latin typeface="Roboto" panose="02000000000000000000" pitchFamily="2" charset="0"/>
-                <a:ea typeface="Roboto" panose="02000000000000000000" pitchFamily="2" charset="0"/>
-              </a:rPr>
-              <a:t>Test effectiveness of transcription service</a:t>
-            </a:r>
-          </a:p>
-          <a:p>
-            <a:pPr marL="180000" indent="-180000">
-              <a:spcAft>
-                <a:spcPts val="300"/>
-              </a:spcAft>
-              <a:buClr>
-                <a:srgbClr val="F17042"/>
-              </a:buClr>
-              <a:buFont typeface="Arial" panose="020B0604020202020204" pitchFamily="34" charset="0"/>
-              <a:buChar char="•"/>
-            </a:pPr>
-            <a:r>
-              <a:rPr lang="en-US" sz="1600">
-                <a:solidFill>
-                  <a:srgbClr val="1D4159"/>
-                </a:solidFill>
-                <a:latin typeface="Roboto" panose="02000000000000000000" pitchFamily="2" charset="0"/>
-                <a:ea typeface="Roboto" panose="02000000000000000000" pitchFamily="2" charset="0"/>
-              </a:rPr>
-              <a:t>Verify transcription results can be applied to project</a:t>
-            </a:r>
-          </a:p>
-          <a:p>
-            <a:pPr>
-              <a:spcAft>
-                <a:spcPts val="0"/>
-              </a:spcAft>
-            </a:pPr>
-            <a:endParaRPr lang="en-US"/>
-          </a:p>
-          <a:p>
-            <a:pPr>
-              <a:spcAft>
-                <a:spcPts val="600"/>
-              </a:spcAft>
-              <a:buNone/>
-            </a:pPr>
-            <a:r>
-              <a:rPr lang="en-US" sz="1800">
-                <a:solidFill>
-                  <a:srgbClr val="1D4159"/>
-                </a:solidFill>
-                <a:latin typeface="Roboto Medium" panose="02000000000000000000" pitchFamily="2" charset="0"/>
-                <a:ea typeface="Roboto Medium" panose="02000000000000000000" pitchFamily="2" charset="0"/>
-              </a:rPr>
-              <a:t>Participant</a:t>
-            </a:r>
-          </a:p>
-          <a:p>
-            <a:pPr marL="180000" indent="-180000">
-              <a:spcAft>
-                <a:spcPts val="300"/>
-              </a:spcAft>
-              <a:buClr>
-                <a:srgbClr val="F17042"/>
-              </a:buClr>
-              <a:buFont typeface="Arial" panose="020B0604020202020204" pitchFamily="34" charset="0"/>
-              <a:buChar char="•"/>
-            </a:pPr>
-            <a:r>
-              <a:rPr lang="en-US" sz="1600">
-                <a:solidFill>
-                  <a:srgbClr val="1D4159"/>
-                </a:solidFill>
-                <a:latin typeface="Roboto" panose="02000000000000000000" pitchFamily="2" charset="0"/>
-                <a:ea typeface="Roboto" panose="02000000000000000000" pitchFamily="2" charset="0"/>
-              </a:rPr>
-              <a:t>Andrey Kerchin</a:t>
-            </a:r>
-          </a:p>
-          <a:p>
-            <a:pPr>
-              <a:spcAft>
-                <a:spcPts val="0"/>
-              </a:spcAft>
-            </a:pPr>
-            <a:endParaRPr lang="en-US"/>
-          </a:p>
-          <a:p>
-            <a:pPr>
-              <a:spcAft>
-                <a:spcPts val="600"/>
-              </a:spcAft>
-              <a:buNone/>
-            </a:pPr>
-            <a:r>
-              <a:rPr lang="en-US" sz="1800">
-                <a:solidFill>
-                  <a:srgbClr val="1D4159"/>
-                </a:solidFill>
-                <a:latin typeface="Roboto Medium" panose="02000000000000000000" pitchFamily="2" charset="0"/>
-                <a:ea typeface="Roboto Medium" panose="02000000000000000000" pitchFamily="2" charset="0"/>
-              </a:rPr>
-              <a:t>Key Discussion</a:t>
-            </a:r>
-          </a:p>
-          <a:p>
-            <a:pPr marL="180000" indent="-180000">
-              <a:spcAft>
-                <a:spcPts val="300"/>
-              </a:spcAft>
-              <a:buClr>
-                <a:srgbClr val="F17042"/>
-              </a:buClr>
-              <a:buFont typeface="Arial" panose="020B0604020202020204" pitchFamily="34" charset="0"/>
-              <a:buChar char="•"/>
-            </a:pPr>
-            <a:r>
-              <a:rPr lang="en-US" sz="1600">
-                <a:solidFill>
-                  <a:srgbClr val="1D4159"/>
-                </a:solidFill>
-                <a:latin typeface="Roboto" panose="02000000000000000000" pitchFamily="2" charset="0"/>
-                <a:ea typeface="Roboto" panose="02000000000000000000" pitchFamily="2" charset="0"/>
-              </a:rPr>
-              <a:t>Practical test of transcription functionality</a:t>
-            </a:r>
-          </a:p>
-          <a:p>
-            <a:pPr marL="180000" indent="-180000">
-              <a:spcAft>
-                <a:spcPts val="300"/>
-              </a:spcAft>
-              <a:buClr>
-                <a:srgbClr val="F17042"/>
-              </a:buClr>
-              <a:buFont typeface="Arial" panose="020B0604020202020204" pitchFamily="34" charset="0"/>
-              <a:buChar char="•"/>
-            </a:pPr>
-            <a:r>
-              <a:rPr lang="en-US" sz="1600">
-                <a:solidFill>
-                  <a:srgbClr val="1D4159"/>
-                </a:solidFill>
-                <a:latin typeface="Roboto" panose="02000000000000000000" pitchFamily="2" charset="0"/>
-                <a:ea typeface="Roboto" panose="02000000000000000000" pitchFamily="2" charset="0"/>
-              </a:rPr>
-              <a:t>Project integration requirements</a:t>
-            </a:r>
-          </a:p>
-          <a:p>
-            <a:pPr>
-              <a:spcAft>
-                <a:spcPts val="0"/>
-              </a:spcAft>
-            </a:pPr>
-            <a:endParaRPr lang="en-US"/>
-          </a:p>
-          <a:p>
-            <a:pPr>
-              <a:spcAft>
-                <a:spcPts val="600"/>
-              </a:spcAft>
-              <a:buNone/>
-            </a:pPr>
-            <a:r>
-              <a:rPr lang="en-US" sz="1800">
-                <a:solidFill>
-                  <a:srgbClr val="1D4159"/>
-                </a:solidFill>
-                <a:latin typeface="Roboto Medium" panose="02000000000000000000" pitchFamily="2" charset="0"/>
-                <a:ea typeface="Roboto Medium" panose="02000000000000000000" pitchFamily="2" charset="0"/>
-              </a:rPr>
-              <a:t>Action Items</a:t>
-            </a:r>
-          </a:p>
-          <a:p>
-            <a:pPr marL="180000" indent="-180000">
-              <a:spcAft>
-                <a:spcPts val="300"/>
-              </a:spcAft>
-              <a:buClr>
-                <a:srgbClr val="F17042"/>
-              </a:buClr>
-              <a:buFont typeface="Arial" panose="020B0604020202020204" pitchFamily="34" charset="0"/>
-              <a:buChar char="•"/>
-            </a:pPr>
-            <a:r>
-              <a:rPr lang="en-US" sz="1600">
-                <a:solidFill>
-                  <a:srgbClr val="1D4159"/>
-                </a:solidFill>
-                <a:latin typeface="Roboto" panose="02000000000000000000" pitchFamily="2" charset="0"/>
-                <a:ea typeface="Roboto" panose="02000000000000000000" pitchFamily="2" charset="0"/>
-              </a:rPr>
-              <a:t>Assess accuracy and applicability of results</a:t>
-            </a:r>
-          </a:p>
-          <a:p>
-            <a:pPr marL="180000" indent="-180000">
-              <a:spcAft>
-                <a:spcPts val="300"/>
-              </a:spcAft>
-              <a:buClr>
-                <a:srgbClr val="F17042"/>
-              </a:buClr>
-              <a:buFont typeface="Arial" panose="020B0604020202020204" pitchFamily="34" charset="0"/>
-              <a:buChar char="•"/>
-            </a:pPr>
-            <a:r>
-              <a:rPr lang="en-US" sz="1600">
-                <a:solidFill>
-                  <a:srgbClr val="1D4159"/>
-                </a:solidFill>
-                <a:latin typeface="Roboto" panose="02000000000000000000" pitchFamily="2" charset="0"/>
-                <a:ea typeface="Roboto" panose="02000000000000000000" pitchFamily="2" charset="0"/>
-              </a:rPr>
-              <a:t>Further evaluation based on test outcomes</a:t>
-            </a:r>
-          </a:p>
-          <a:p>
-            <a:pPr>
-              <a:spcAft>
-                <a:spcPts val="0"/>
-              </a:spcAft>
-            </a:pPr>
-            <a:endParaRPr lang="en-US"/>
+              <a:rPr lang="en-US" dirty="0"/>
+              <a:t>https://www.litware.com</a:t>
+            </a:r>
+            <a:endParaRPr lang="en-ZA" dirty="0"/>
           </a:p>
         </p:txBody>
       </p:sp>
     </p:spTree>
+    <p:extLst>
+      <p:ext uri="{BB962C8B-B14F-4D97-AF65-F5344CB8AC3E}">
+        <p14:creationId xmlns:p14="http://schemas.microsoft.com/office/powerpoint/2010/main" val="1559448605"/>
+      </p:ext>
+    </p:extLst>
   </p:cSld>
   <p:clrMapOvr>
     <a:masterClrMapping/>

--- a/someproject/artifacts/kickoff-deck.pptx
+++ b/someproject/artifacts/kickoff-deck.pptx
@@ -19,6 +19,7 @@
     <p:sldId id="866" r:id="rId10"/>
     <p:sldId id="858" r:id="rId11"/>
     <p:sldId id="859" r:id="rId12"/>
+    <p:sldId id="901" r:id="rId39"/>
     <p:sldId id="554" r:id="rId13"/>
   </p:sldIdLst>
   <p:sldSz cx="12192000" cy="6858000"/>
@@ -9778,6 +9779,292 @@
         <p14:creationId xmlns:p14="http://schemas.microsoft.com/office/powerpoint/2010/main" val="247990684"/>
       </p:ext>
     </p:extLst>
+  </p:cSld>
+  <p:clrMapOvr>
+    <a:masterClrMapping/>
+  </p:clrMapOvr>
+</p:sld>
+</file>
+
+<file path=ppt/slides/slide10.xml><?xml version="1.0" encoding="utf-8"?>
+<p:sld xmlns:a="http://schemas.openxmlformats.org/drawingml/2006/main" xmlns:p="http://schemas.openxmlformats.org/presentationml/2006/main" xmlns:r="http://schemas.openxmlformats.org/officeDocument/2006/relationships">
+  <p:cSld>
+    <p:spTree>
+      <p:nvGrpSpPr>
+        <p:cNvPr id="1" name=""/>
+        <p:cNvGrpSpPr/>
+        <p:nvPr/>
+      </p:nvGrpSpPr>
+      <p:grpSpPr/>
+      <p:sp>
+        <p:nvSpPr>
+          <p:cNvPr id="2" name="Text Placeholder 1"/>
+          <p:cNvSpPr>
+            <a:spLocks noGrp="1"/>
+          </p:cNvSpPr>
+          <p:nvPr>
+            <p:ph type="body" idx="10" sz="quarter"/>
+          </p:nvPr>
+        </p:nvSpPr>
+        <p:spPr/>
+        <p:txBody>
+          <a:bodyPr/>
+          <a:lstStyle/>
+          <a:p>
+            <a:r>
+              <a:t>Transcription Test Summary</a:t>
+            </a:r>
+          </a:p>
+        </p:txBody>
+      </p:sp>
+      <p:sp>
+        <p:nvSpPr>
+          <p:cNvPr id="3" name="Text Placeholder 2"/>
+          <p:cNvSpPr>
+            <a:spLocks noGrp="1"/>
+          </p:cNvSpPr>
+          <p:nvPr>
+            <p:ph type="body" idx="11" sz="quarter"/>
+          </p:nvPr>
+        </p:nvSpPr>
+        <p:spPr/>
+        <p:txBody>
+          <a:bodyPr/>
+          <a:lstStyle/>
+          <a:p>
+            <a:r>
+              <a:t>Project Kickoff Meeting</a:t>
+            </a:r>
+          </a:p>
+        </p:txBody>
+      </p:sp>
+      <p:sp>
+        <p:nvSpPr>
+          <p:cNvPr id="4" name="Text Placeholder 3"/>
+          <p:cNvSpPr>
+            <a:spLocks noGrp="1"/>
+          </p:cNvSpPr>
+          <p:nvPr>
+            <p:ph type="body" idx="12" sz="quarter"/>
+          </p:nvPr>
+        </p:nvSpPr>
+        <p:spPr/>
+        <p:txBody>
+          <a:bodyPr/>
+          <a:lstStyle/>
+          <a:p>
+            <a:pPr>
+              <a:spcAft>
+                <a:spcPts val="600"/>
+              </a:spcAft>
+              <a:buNone/>
+            </a:pPr>
+            <a:r>
+              <a:rPr lang="en-US" sz="1800">
+                <a:solidFill>
+                  <a:srgbClr val="1D4159"/>
+                </a:solidFill>
+                <a:latin typeface="Roboto Medium" panose="02000000000000000000" pitchFamily="2" charset="0"/>
+                <a:ea typeface="Roboto Medium" panose="02000000000000000000" pitchFamily="2" charset="0"/>
+              </a:rPr>
+              <a:t>Meeting Overview</a:t>
+            </a:r>
+          </a:p>
+          <a:p>
+            <a:pPr marL="180000" indent="-180000">
+              <a:spcAft>
+                <a:spcPts val="300"/>
+              </a:spcAft>
+              <a:buClr>
+                <a:srgbClr val="F17042"/>
+              </a:buClr>
+              <a:buFont typeface="Arial" panose="020B0604020202020204" pitchFamily="34" charset="0"/>
+              <a:buChar char="•"/>
+            </a:pPr>
+            <a:r>
+              <a:rPr lang="en-US" sz="1600">
+                <a:solidFill>
+                  <a:srgbClr val="1D4159"/>
+                </a:solidFill>
+                <a:latin typeface="Roboto" panose="02000000000000000000" pitchFamily="2" charset="0"/>
+                <a:ea typeface="Roboto" panose="02000000000000000000" pitchFamily="2" charset="0"/>
+              </a:rPr>
+              <a:t>Test transcription functionality effectiveness</a:t>
+            </a:r>
+          </a:p>
+          <a:p>
+            <a:pPr marL="180000" indent="-180000">
+              <a:spcAft>
+                <a:spcPts val="300"/>
+              </a:spcAft>
+              <a:buClr>
+                <a:srgbClr val="F17042"/>
+              </a:buClr>
+              <a:buFont typeface="Arial" panose="020B0604020202020204" pitchFamily="34" charset="0"/>
+              <a:buChar char="•"/>
+            </a:pPr>
+            <a:r>
+              <a:rPr lang="en-US" sz="1600">
+                <a:solidFill>
+                  <a:srgbClr val="1D4159"/>
+                </a:solidFill>
+                <a:latin typeface="Roboto" panose="02000000000000000000" pitchFamily="2" charset="0"/>
+                <a:ea typeface="Roboto" panose="02000000000000000000" pitchFamily="2" charset="0"/>
+              </a:rPr>
+              <a:t>Evaluate accuracy for project application</a:t>
+            </a:r>
+          </a:p>
+          <a:p>
+            <a:pPr>
+              <a:spcAft>
+                <a:spcPts val="0"/>
+              </a:spcAft>
+            </a:pPr>
+            <a:endParaRPr lang="en-US"/>
+          </a:p>
+          <a:p>
+            <a:pPr>
+              <a:spcAft>
+                <a:spcPts val="600"/>
+              </a:spcAft>
+              <a:buNone/>
+            </a:pPr>
+            <a:r>
+              <a:rPr lang="en-US" sz="1800">
+                <a:solidFill>
+                  <a:srgbClr val="1D4159"/>
+                </a:solidFill>
+                <a:latin typeface="Roboto Medium" panose="02000000000000000000" pitchFamily="2" charset="0"/>
+                <a:ea typeface="Roboto Medium" panose="02000000000000000000" pitchFamily="2" charset="0"/>
+              </a:rPr>
+              <a:t>Key Outcomes</a:t>
+            </a:r>
+          </a:p>
+          <a:p>
+            <a:pPr marL="180000" indent="-180000">
+              <a:spcAft>
+                <a:spcPts val="300"/>
+              </a:spcAft>
+              <a:buClr>
+                <a:srgbClr val="F17042"/>
+              </a:buClr>
+              <a:buFont typeface="Arial" panose="020B0604020202020204" pitchFamily="34" charset="0"/>
+              <a:buChar char="•"/>
+            </a:pPr>
+            <a:r>
+              <a:rPr lang="en-US" sz="1600">
+                <a:solidFill>
+                  <a:srgbClr val="1D4159"/>
+                </a:solidFill>
+                <a:latin typeface="Roboto" panose="02000000000000000000" pitchFamily="2" charset="0"/>
+                <a:ea typeface="Roboto" panose="02000000000000000000" pitchFamily="2" charset="0"/>
+              </a:rPr>
+              <a:t>Transcription working as expected</a:t>
+            </a:r>
+          </a:p>
+          <a:p>
+            <a:pPr marL="180000" indent="-180000">
+              <a:spcAft>
+                <a:spcPts val="300"/>
+              </a:spcAft>
+              <a:buClr>
+                <a:srgbClr val="F17042"/>
+              </a:buClr>
+              <a:buFont typeface="Arial" panose="020B0604020202020204" pitchFamily="34" charset="0"/>
+              <a:buChar char="•"/>
+            </a:pPr>
+            <a:r>
+              <a:rPr lang="en-US" sz="1600">
+                <a:solidFill>
+                  <a:srgbClr val="1D4159"/>
+                </a:solidFill>
+                <a:latin typeface="Roboto" panose="02000000000000000000" pitchFamily="2" charset="0"/>
+                <a:ea typeface="Roboto" panose="02000000000000000000" pitchFamily="2" charset="0"/>
+              </a:rPr>
+              <a:t>Results ready for project integration</a:t>
+            </a:r>
+          </a:p>
+          <a:p>
+            <a:pPr>
+              <a:spcAft>
+                <a:spcPts val="0"/>
+              </a:spcAft>
+            </a:pPr>
+            <a:endParaRPr lang="en-US"/>
+          </a:p>
+          <a:p>
+            <a:pPr>
+              <a:spcAft>
+                <a:spcPts val="600"/>
+              </a:spcAft>
+              <a:buNone/>
+            </a:pPr>
+            <a:r>
+              <a:rPr lang="en-US" sz="1800">
+                <a:solidFill>
+                  <a:srgbClr val="1D4159"/>
+                </a:solidFill>
+                <a:latin typeface="Roboto Medium" panose="02000000000000000000" pitchFamily="2" charset="0"/>
+                <a:ea typeface="Roboto Medium" panose="02000000000000000000" pitchFamily="2" charset="0"/>
+              </a:rPr>
+              <a:t>Next Steps</a:t>
+            </a:r>
+          </a:p>
+          <a:p>
+            <a:pPr marL="180000" indent="-180000">
+              <a:spcAft>
+                <a:spcPts val="300"/>
+              </a:spcAft>
+              <a:buClr>
+                <a:srgbClr val="F17042"/>
+              </a:buClr>
+              <a:buFont typeface="Arial" panose="020B0604020202020204" pitchFamily="34" charset="0"/>
+              <a:buChar char="•"/>
+            </a:pPr>
+            <a:r>
+              <a:rPr lang="en-US" sz="1600">
+                <a:solidFill>
+                  <a:srgbClr val="1D4159"/>
+                </a:solidFill>
+                <a:latin typeface="Roboto" panose="02000000000000000000" pitchFamily="2" charset="0"/>
+                <a:ea typeface="Roboto" panose="02000000000000000000" pitchFamily="2" charset="0"/>
+              </a:rPr>
+              <a:t>Apply transcription results to project</a:t>
+            </a:r>
+          </a:p>
+          <a:p>
+            <a:pPr marL="180000" indent="-180000">
+              <a:spcAft>
+                <a:spcPts val="300"/>
+              </a:spcAft>
+              <a:buClr>
+                <a:srgbClr val="F17042"/>
+              </a:buClr>
+              <a:buFont typeface="Arial" panose="020B0604020202020204" pitchFamily="34" charset="0"/>
+              <a:buChar char="•"/>
+            </a:pPr>
+            <a:r>
+              <a:rPr lang="en-US" sz="1600">
+                <a:solidFill>
+                  <a:srgbClr val="1D4159"/>
+                </a:solidFill>
+                <a:latin typeface="Roboto" panose="02000000000000000000" pitchFamily="2" charset="0"/>
+                <a:ea typeface="Roboto" panose="02000000000000000000" pitchFamily="2" charset="0"/>
+              </a:rPr>
+              <a:t>Monitor ongoing performance</a:t>
+            </a:r>
+          </a:p>
+          <a:p>
+            <a:pPr>
+              <a:spcAft>
+                <a:spcPts val="0"/>
+              </a:spcAft>
+            </a:pPr>
+            <a:endParaRPr lang="en-US"/>
+          </a:p>
+        </p:txBody>
+      </p:sp>
+    </p:spTree>
   </p:cSld>
   <p:clrMapOvr>
     <a:masterClrMapping/>

--- a/someproject/artifacts/kickoff-deck.pptx
+++ b/someproject/artifacts/kickoff-deck.pptx
@@ -19,7 +19,6 @@
     <p:sldId id="866" r:id="rId10"/>
     <p:sldId id="858" r:id="rId11"/>
     <p:sldId id="859" r:id="rId12"/>
-    <p:sldId id="901" r:id="rId39"/>
     <p:sldId id="554" r:id="rId13"/>
   </p:sldIdLst>
   <p:sldSz cx="12192000" cy="6858000"/>
@@ -9779,292 +9778,6 @@
         <p14:creationId xmlns:p14="http://schemas.microsoft.com/office/powerpoint/2010/main" val="247990684"/>
       </p:ext>
     </p:extLst>
-  </p:cSld>
-  <p:clrMapOvr>
-    <a:masterClrMapping/>
-  </p:clrMapOvr>
-</p:sld>
-</file>
-
-<file path=ppt/slides/slide10.xml><?xml version="1.0" encoding="utf-8"?>
-<p:sld xmlns:a="http://schemas.openxmlformats.org/drawingml/2006/main" xmlns:p="http://schemas.openxmlformats.org/presentationml/2006/main" xmlns:r="http://schemas.openxmlformats.org/officeDocument/2006/relationships">
-  <p:cSld>
-    <p:spTree>
-      <p:nvGrpSpPr>
-        <p:cNvPr id="1" name=""/>
-        <p:cNvGrpSpPr/>
-        <p:nvPr/>
-      </p:nvGrpSpPr>
-      <p:grpSpPr/>
-      <p:sp>
-        <p:nvSpPr>
-          <p:cNvPr id="2" name="Text Placeholder 1"/>
-          <p:cNvSpPr>
-            <a:spLocks noGrp="1"/>
-          </p:cNvSpPr>
-          <p:nvPr>
-            <p:ph type="body" idx="10" sz="quarter"/>
-          </p:nvPr>
-        </p:nvSpPr>
-        <p:spPr/>
-        <p:txBody>
-          <a:bodyPr/>
-          <a:lstStyle/>
-          <a:p>
-            <a:r>
-              <a:t>Transcription Test Summary</a:t>
-            </a:r>
-          </a:p>
-        </p:txBody>
-      </p:sp>
-      <p:sp>
-        <p:nvSpPr>
-          <p:cNvPr id="3" name="Text Placeholder 2"/>
-          <p:cNvSpPr>
-            <a:spLocks noGrp="1"/>
-          </p:cNvSpPr>
-          <p:nvPr>
-            <p:ph type="body" idx="11" sz="quarter"/>
-          </p:nvPr>
-        </p:nvSpPr>
-        <p:spPr/>
-        <p:txBody>
-          <a:bodyPr/>
-          <a:lstStyle/>
-          <a:p>
-            <a:r>
-              <a:t>Project Kickoff Meeting</a:t>
-            </a:r>
-          </a:p>
-        </p:txBody>
-      </p:sp>
-      <p:sp>
-        <p:nvSpPr>
-          <p:cNvPr id="4" name="Text Placeholder 3"/>
-          <p:cNvSpPr>
-            <a:spLocks noGrp="1"/>
-          </p:cNvSpPr>
-          <p:nvPr>
-            <p:ph type="body" idx="12" sz="quarter"/>
-          </p:nvPr>
-        </p:nvSpPr>
-        <p:spPr/>
-        <p:txBody>
-          <a:bodyPr/>
-          <a:lstStyle/>
-          <a:p>
-            <a:pPr>
-              <a:spcAft>
-                <a:spcPts val="600"/>
-              </a:spcAft>
-              <a:buNone/>
-            </a:pPr>
-            <a:r>
-              <a:rPr lang="en-US" sz="1800">
-                <a:solidFill>
-                  <a:srgbClr val="1D4159"/>
-                </a:solidFill>
-                <a:latin typeface="Roboto Medium" panose="02000000000000000000" pitchFamily="2" charset="0"/>
-                <a:ea typeface="Roboto Medium" panose="02000000000000000000" pitchFamily="2" charset="0"/>
-              </a:rPr>
-              <a:t>Meeting Overview</a:t>
-            </a:r>
-          </a:p>
-          <a:p>
-            <a:pPr marL="180000" indent="-180000">
-              <a:spcAft>
-                <a:spcPts val="300"/>
-              </a:spcAft>
-              <a:buClr>
-                <a:srgbClr val="F17042"/>
-              </a:buClr>
-              <a:buFont typeface="Arial" panose="020B0604020202020204" pitchFamily="34" charset="0"/>
-              <a:buChar char="•"/>
-            </a:pPr>
-            <a:r>
-              <a:rPr lang="en-US" sz="1600">
-                <a:solidFill>
-                  <a:srgbClr val="1D4159"/>
-                </a:solidFill>
-                <a:latin typeface="Roboto" panose="02000000000000000000" pitchFamily="2" charset="0"/>
-                <a:ea typeface="Roboto" panose="02000000000000000000" pitchFamily="2" charset="0"/>
-              </a:rPr>
-              <a:t>Test transcription functionality effectiveness</a:t>
-            </a:r>
-          </a:p>
-          <a:p>
-            <a:pPr marL="180000" indent="-180000">
-              <a:spcAft>
-                <a:spcPts val="300"/>
-              </a:spcAft>
-              <a:buClr>
-                <a:srgbClr val="F17042"/>
-              </a:buClr>
-              <a:buFont typeface="Arial" panose="020B0604020202020204" pitchFamily="34" charset="0"/>
-              <a:buChar char="•"/>
-            </a:pPr>
-            <a:r>
-              <a:rPr lang="en-US" sz="1600">
-                <a:solidFill>
-                  <a:srgbClr val="1D4159"/>
-                </a:solidFill>
-                <a:latin typeface="Roboto" panose="02000000000000000000" pitchFamily="2" charset="0"/>
-                <a:ea typeface="Roboto" panose="02000000000000000000" pitchFamily="2" charset="0"/>
-              </a:rPr>
-              <a:t>Evaluate accuracy for project application</a:t>
-            </a:r>
-          </a:p>
-          <a:p>
-            <a:pPr>
-              <a:spcAft>
-                <a:spcPts val="0"/>
-              </a:spcAft>
-            </a:pPr>
-            <a:endParaRPr lang="en-US"/>
-          </a:p>
-          <a:p>
-            <a:pPr>
-              <a:spcAft>
-                <a:spcPts val="600"/>
-              </a:spcAft>
-              <a:buNone/>
-            </a:pPr>
-            <a:r>
-              <a:rPr lang="en-US" sz="1800">
-                <a:solidFill>
-                  <a:srgbClr val="1D4159"/>
-                </a:solidFill>
-                <a:latin typeface="Roboto Medium" panose="02000000000000000000" pitchFamily="2" charset="0"/>
-                <a:ea typeface="Roboto Medium" panose="02000000000000000000" pitchFamily="2" charset="0"/>
-              </a:rPr>
-              <a:t>Key Outcomes</a:t>
-            </a:r>
-          </a:p>
-          <a:p>
-            <a:pPr marL="180000" indent="-180000">
-              <a:spcAft>
-                <a:spcPts val="300"/>
-              </a:spcAft>
-              <a:buClr>
-                <a:srgbClr val="F17042"/>
-              </a:buClr>
-              <a:buFont typeface="Arial" panose="020B0604020202020204" pitchFamily="34" charset="0"/>
-              <a:buChar char="•"/>
-            </a:pPr>
-            <a:r>
-              <a:rPr lang="en-US" sz="1600">
-                <a:solidFill>
-                  <a:srgbClr val="1D4159"/>
-                </a:solidFill>
-                <a:latin typeface="Roboto" panose="02000000000000000000" pitchFamily="2" charset="0"/>
-                <a:ea typeface="Roboto" panose="02000000000000000000" pitchFamily="2" charset="0"/>
-              </a:rPr>
-              <a:t>Transcription working as expected</a:t>
-            </a:r>
-          </a:p>
-          <a:p>
-            <a:pPr marL="180000" indent="-180000">
-              <a:spcAft>
-                <a:spcPts val="300"/>
-              </a:spcAft>
-              <a:buClr>
-                <a:srgbClr val="F17042"/>
-              </a:buClr>
-              <a:buFont typeface="Arial" panose="020B0604020202020204" pitchFamily="34" charset="0"/>
-              <a:buChar char="•"/>
-            </a:pPr>
-            <a:r>
-              <a:rPr lang="en-US" sz="1600">
-                <a:solidFill>
-                  <a:srgbClr val="1D4159"/>
-                </a:solidFill>
-                <a:latin typeface="Roboto" panose="02000000000000000000" pitchFamily="2" charset="0"/>
-                <a:ea typeface="Roboto" panose="02000000000000000000" pitchFamily="2" charset="0"/>
-              </a:rPr>
-              <a:t>Results ready for project integration</a:t>
-            </a:r>
-          </a:p>
-          <a:p>
-            <a:pPr>
-              <a:spcAft>
-                <a:spcPts val="0"/>
-              </a:spcAft>
-            </a:pPr>
-            <a:endParaRPr lang="en-US"/>
-          </a:p>
-          <a:p>
-            <a:pPr>
-              <a:spcAft>
-                <a:spcPts val="600"/>
-              </a:spcAft>
-              <a:buNone/>
-            </a:pPr>
-            <a:r>
-              <a:rPr lang="en-US" sz="1800">
-                <a:solidFill>
-                  <a:srgbClr val="1D4159"/>
-                </a:solidFill>
-                <a:latin typeface="Roboto Medium" panose="02000000000000000000" pitchFamily="2" charset="0"/>
-                <a:ea typeface="Roboto Medium" panose="02000000000000000000" pitchFamily="2" charset="0"/>
-              </a:rPr>
-              <a:t>Next Steps</a:t>
-            </a:r>
-          </a:p>
-          <a:p>
-            <a:pPr marL="180000" indent="-180000">
-              <a:spcAft>
-                <a:spcPts val="300"/>
-              </a:spcAft>
-              <a:buClr>
-                <a:srgbClr val="F17042"/>
-              </a:buClr>
-              <a:buFont typeface="Arial" panose="020B0604020202020204" pitchFamily="34" charset="0"/>
-              <a:buChar char="•"/>
-            </a:pPr>
-            <a:r>
-              <a:rPr lang="en-US" sz="1600">
-                <a:solidFill>
-                  <a:srgbClr val="1D4159"/>
-                </a:solidFill>
-                <a:latin typeface="Roboto" panose="02000000000000000000" pitchFamily="2" charset="0"/>
-                <a:ea typeface="Roboto" panose="02000000000000000000" pitchFamily="2" charset="0"/>
-              </a:rPr>
-              <a:t>Apply transcription results to project</a:t>
-            </a:r>
-          </a:p>
-          <a:p>
-            <a:pPr marL="180000" indent="-180000">
-              <a:spcAft>
-                <a:spcPts val="300"/>
-              </a:spcAft>
-              <a:buClr>
-                <a:srgbClr val="F17042"/>
-              </a:buClr>
-              <a:buFont typeface="Arial" panose="020B0604020202020204" pitchFamily="34" charset="0"/>
-              <a:buChar char="•"/>
-            </a:pPr>
-            <a:r>
-              <a:rPr lang="en-US" sz="1600">
-                <a:solidFill>
-                  <a:srgbClr val="1D4159"/>
-                </a:solidFill>
-                <a:latin typeface="Roboto" panose="02000000000000000000" pitchFamily="2" charset="0"/>
-                <a:ea typeface="Roboto" panose="02000000000000000000" pitchFamily="2" charset="0"/>
-              </a:rPr>
-              <a:t>Monitor ongoing performance</a:t>
-            </a:r>
-          </a:p>
-          <a:p>
-            <a:pPr>
-              <a:spcAft>
-                <a:spcPts val="0"/>
-              </a:spcAft>
-            </a:pPr>
-            <a:endParaRPr lang="en-US"/>
-          </a:p>
-        </p:txBody>
-      </p:sp>
-    </p:spTree>
   </p:cSld>
   <p:clrMapOvr>
     <a:masterClrMapping/>

--- a/someproject/artifacts/kickoff-deck.pptx
+++ b/someproject/artifacts/kickoff-deck.pptx
@@ -19,6 +19,7 @@
     <p:sldId id="866" r:id="rId10"/>
     <p:sldId id="858" r:id="rId11"/>
     <p:sldId id="859" r:id="rId12"/>
+    <p:sldId id="901" r:id="rId39"/>
     <p:sldId id="554" r:id="rId13"/>
   </p:sldIdLst>
   <p:sldSz cx="12192000" cy="6858000"/>
@@ -9778,6 +9779,196 @@
         <p14:creationId xmlns:p14="http://schemas.microsoft.com/office/powerpoint/2010/main" val="247990684"/>
       </p:ext>
     </p:extLst>
+  </p:cSld>
+  <p:clrMapOvr>
+    <a:masterClrMapping/>
+  </p:clrMapOvr>
+</p:sld>
+</file>
+
+<file path=ppt/slides/slide10.xml><?xml version="1.0" encoding="utf-8"?>
+<p:sld xmlns:a="http://schemas.openxmlformats.org/drawingml/2006/main" xmlns:p="http://schemas.openxmlformats.org/presentationml/2006/main" xmlns:r="http://schemas.openxmlformats.org/officeDocument/2006/relationships">
+  <p:cSld>
+    <p:spTree>
+      <p:nvGrpSpPr>
+        <p:cNvPr id="1" name=""/>
+        <p:cNvGrpSpPr/>
+        <p:nvPr/>
+      </p:nvGrpSpPr>
+      <p:grpSpPr/>
+      <p:sp>
+        <p:nvSpPr>
+          <p:cNvPr id="2" name="Text Placeholder 1"/>
+          <p:cNvSpPr>
+            <a:spLocks noGrp="1"/>
+          </p:cNvSpPr>
+          <p:nvPr>
+            <p:ph type="body" idx="10" sz="quarter"/>
+          </p:nvPr>
+        </p:nvSpPr>
+        <p:spPr/>
+        <p:txBody>
+          <a:bodyPr/>
+          <a:lstStyle/>
+          <a:p>
+            <a:r>
+              <a:t>Meeting Summary</a:t>
+            </a:r>
+          </a:p>
+        </p:txBody>
+      </p:sp>
+      <p:sp>
+        <p:nvSpPr>
+          <p:cNvPr id="3" name="Text Placeholder 2"/>
+          <p:cNvSpPr>
+            <a:spLocks noGrp="1"/>
+          </p:cNvSpPr>
+          <p:nvPr>
+            <p:ph type="body" idx="11" sz="quarter"/>
+          </p:nvPr>
+        </p:nvSpPr>
+        <p:spPr/>
+        <p:txBody>
+          <a:bodyPr/>
+          <a:lstStyle/>
+          <a:p>
+            <a:r>
+              <a:t>Transcription Functionality Test</a:t>
+            </a:r>
+          </a:p>
+        </p:txBody>
+      </p:sp>
+      <p:sp>
+        <p:nvSpPr>
+          <p:cNvPr id="4" name="Text Placeholder 3"/>
+          <p:cNvSpPr>
+            <a:spLocks noGrp="1"/>
+          </p:cNvSpPr>
+          <p:nvPr>
+            <p:ph type="body" idx="12" sz="quarter"/>
+          </p:nvPr>
+        </p:nvSpPr>
+        <p:spPr/>
+        <p:txBody>
+          <a:bodyPr/>
+          <a:lstStyle/>
+          <a:p>
+            <a:pPr>
+              <a:spcAft>
+                <a:spcPts val="600"/>
+              </a:spcAft>
+              <a:buNone/>
+            </a:pPr>
+            <a:r>
+              <a:rPr lang="en-US" sz="1800">
+                <a:solidFill>
+                  <a:srgbClr val="1D4159"/>
+                </a:solidFill>
+                <a:latin typeface="Roboto Medium" panose="02000000000000000000" pitchFamily="2" charset="0"/>
+                <a:ea typeface="Roboto Medium" panose="02000000000000000000" pitchFamily="2" charset="0"/>
+              </a:rPr>
+              <a:t>Project Transcription Testing</a:t>
+            </a:r>
+          </a:p>
+          <a:p>
+            <a:pPr marL="180000" indent="-180000">
+              <a:spcAft>
+                <a:spcPts val="300"/>
+              </a:spcAft>
+              <a:buClr>
+                <a:srgbClr val="F17042"/>
+              </a:buClr>
+              <a:buFont typeface="Arial" panose="020B0604020202020204" pitchFamily="34" charset="0"/>
+              <a:buChar char="•"/>
+            </a:pPr>
+            <a:r>
+              <a:rPr lang="en-US" sz="1600">
+                <a:solidFill>
+                  <a:srgbClr val="1D4159"/>
+                </a:solidFill>
+                <a:latin typeface="Roboto" panose="02000000000000000000" pitchFamily="2" charset="0"/>
+                <a:ea typeface="Roboto" panose="02000000000000000000" pitchFamily="2" charset="0"/>
+              </a:rPr>
+              <a:t>Meeting led by Andrey Kerchin</a:t>
+            </a:r>
+          </a:p>
+          <a:p>
+            <a:pPr marL="180000" indent="-180000">
+              <a:spcAft>
+                <a:spcPts val="300"/>
+              </a:spcAft>
+              <a:buClr>
+                <a:srgbClr val="F17042"/>
+              </a:buClr>
+              <a:buFont typeface="Arial" panose="020B0604020202020204" pitchFamily="34" charset="0"/>
+              <a:buChar char="•"/>
+            </a:pPr>
+            <a:r>
+              <a:rPr lang="en-US" sz="1600">
+                <a:solidFill>
+                  <a:srgbClr val="1D4159"/>
+                </a:solidFill>
+                <a:latin typeface="Roboto" panose="02000000000000000000" pitchFamily="2" charset="0"/>
+                <a:ea typeface="Roboto" panose="02000000000000000000" pitchFamily="2" charset="0"/>
+              </a:rPr>
+              <a:t>Testing transcription service performance</a:t>
+            </a:r>
+          </a:p>
+          <a:p>
+            <a:pPr marL="180000" indent="-180000">
+              <a:spcAft>
+                <a:spcPts val="300"/>
+              </a:spcAft>
+              <a:buClr>
+                <a:srgbClr val="F17042"/>
+              </a:buClr>
+              <a:buFont typeface="Arial" panose="020B0604020202020204" pitchFamily="34" charset="0"/>
+              <a:buChar char="•"/>
+            </a:pPr>
+            <a:r>
+              <a:rPr lang="en-US" sz="1600">
+                <a:solidFill>
+                  <a:srgbClr val="1D4159"/>
+                </a:solidFill>
+                <a:latin typeface="Roboto" panose="02000000000000000000" pitchFamily="2" charset="0"/>
+                <a:ea typeface="Roboto" panose="02000000000000000000" pitchFamily="2" charset="0"/>
+              </a:rPr>
+              <a:t>Results to be integrated into project</a:t>
+            </a:r>
+          </a:p>
+          <a:p>
+            <a:pPr marL="180000" indent="-180000">
+              <a:spcAft>
+                <a:spcPts val="300"/>
+              </a:spcAft>
+              <a:buClr>
+                <a:srgbClr val="F17042"/>
+              </a:buClr>
+              <a:buFont typeface="Arial" panose="020B0604020202020204" pitchFamily="34" charset="0"/>
+              <a:buChar char="•"/>
+            </a:pPr>
+            <a:r>
+              <a:rPr lang="en-US" sz="1600">
+                <a:solidFill>
+                  <a:srgbClr val="1D4159"/>
+                </a:solidFill>
+                <a:latin typeface="Roboto" panose="02000000000000000000" pitchFamily="2" charset="0"/>
+                <a:ea typeface="Roboto" panose="02000000000000000000" pitchFamily="2" charset="0"/>
+              </a:rPr>
+              <a:t>Ongoing assessment phase</a:t>
+            </a:r>
+          </a:p>
+          <a:p>
+            <a:pPr>
+              <a:spcAft>
+                <a:spcPts val="0"/>
+              </a:spcAft>
+            </a:pPr>
+            <a:endParaRPr lang="en-US"/>
+          </a:p>
+        </p:txBody>
+      </p:sp>
+    </p:spTree>
   </p:cSld>
   <p:clrMapOvr>
     <a:masterClrMapping/>
